--- a/2027/ОПІ ЛК 01 Поняття програмної інженерії.pptx
+++ b/2027/ОПІ ЛК 01 Поняття програмної інженерії.pptx
@@ -1,54 +1,57 @@
 
 <file path=ppt/presentation.xml><?xml version="1.0" encoding="utf-8"?>
-<p:presentation xmlns:a="http://schemas.openxmlformats.org/drawingml/2006/main" xmlns:r="http://schemas.openxmlformats.org/officeDocument/2006/relationships" xmlns:p="http://schemas.openxmlformats.org/presentationml/2006/main" saveSubsetFonts="true" autoCompressPictures="0" embedTrueTypeFonts="true">
+<p:presentation xmlns:a="http://schemas.openxmlformats.org/drawingml/2006/main" xmlns:r="http://schemas.openxmlformats.org/officeDocument/2006/relationships" xmlns:p="http://schemas.openxmlformats.org/presentationml/2006/main" embedTrueTypeFonts="1" saveSubsetFonts="1" autoCompressPictures="0">
   <p:sldMasterIdLst>
     <p:sldMasterId id="2147483648" r:id="rId1"/>
   </p:sldMasterIdLst>
+  <p:notesMasterIdLst>
+    <p:notesMasterId r:id="rId14"/>
+  </p:notesMasterIdLst>
   <p:sldIdLst>
     <p:sldId id="256" r:id="rId2"/>
     <p:sldId id="257" r:id="rId3"/>
     <p:sldId id="258" r:id="rId4"/>
-    <p:sldId id="259" r:id="rId5"/>
-    <p:sldId id="260" r:id="rId6"/>
-    <p:sldId id="261" r:id="rId7"/>
-    <p:sldId id="262" r:id="rId8"/>
-    <p:sldId id="263" r:id="rId9"/>
-    <p:sldId id="264" r:id="rId10"/>
-    <p:sldId id="265" r:id="rId11"/>
+    <p:sldId id="266" r:id="rId5"/>
+    <p:sldId id="267" r:id="rId6"/>
+    <p:sldId id="259" r:id="rId7"/>
+    <p:sldId id="260" r:id="rId8"/>
+    <p:sldId id="261" r:id="rId9"/>
+    <p:sldId id="262" r:id="rId10"/>
+    <p:sldId id="263" r:id="rId11"/>
+    <p:sldId id="264" r:id="rId12"/>
+    <p:sldId id="265" r:id="rId13"/>
   </p:sldIdLst>
-  <p:notesMasterIdLst>
-    <p:notesMasterId r:id="rId12"/>
-  </p:notesMasterIdLst>
-  <p:sldSz cx="12191695" cy="6858000"/>
-  <p:notesSz cx="6858000" cy="12191695"/>
+  <p:sldSz cx="12192000" cy="6858000"/>
+  <p:notesSz cx="6858000" cy="12192000"/>
   <p:embeddedFontLst>
     <p:embeddedFont>
-      <p:font typeface="Bricolage Grotesque Bold"/>
-      <p:regular r:id="rId201314"/>
+      <p:font typeface="Inter Bold" panose="020B0604020202020204" charset="0"/>
+      <p:regular r:id="rId15"/>
     </p:embeddedFont>
     <p:embeddedFont>
-      <p:font typeface="Bricolage Grotesque"/>
-      <p:regular r:id="rId201315"/>
+      <p:font typeface="Calibri" panose="020F0502020204030204" pitchFamily="34" charset="0"/>
+      <p:regular r:id="rId16"/>
+      <p:bold r:id="rId17"/>
+      <p:italic r:id="rId18"/>
+      <p:boldItalic r:id="rId19"/>
     </p:embeddedFont>
     <p:embeddedFont>
-      <p:font typeface="Bricolage Grotesque SemiBold"/>
-      <p:regular r:id="rId201316"/>
+      <p:font typeface="Inter" panose="020B0604020202020204" charset="0"/>
+      <p:regular r:id="rId20"/>
+      <p:bold r:id="rId21"/>
+      <p:italic r:id="rId22"/>
+      <p:boldItalic r:id="rId23"/>
     </p:embeddedFont>
     <p:embeddedFont>
-      <p:font typeface="Inter SemiBold"/>
-      <p:regular r:id="rId201317"/>
+      <p:font typeface="Plus Jakarta Sans" panose="020B0604020202020204" charset="0"/>
+      <p:regular r:id="rId24"/>
+      <p:bold r:id="rId25"/>
+      <p:italic r:id="rId26"/>
+      <p:boldItalic r:id="rId27"/>
     </p:embeddedFont>
     <p:embeddedFont>
-      <p:font typeface="Inter Bold"/>
-      <p:regular r:id="rId201318"/>
-    </p:embeddedFont>
-    <p:embeddedFont>
-      <p:font typeface="Inter"/>
-      <p:regular r:id="rId201319"/>
-    </p:embeddedFont>
-    <p:embeddedFont>
-      <p:font typeface="Inter Black"/>
-      <p:regular r:id="rId201320"/>
+      <p:font typeface="Bricolage Grotesque SemiBold" panose="020B0604020202020204" charset="0"/>
+      <p:regular r:id="rId28"/>
     </p:embeddedFont>
   </p:embeddedFontLst>
   <p:defaultTextStyle>
@@ -143,6 +146,11 @@
       </a:defRPr>
     </a:lvl9pPr>
   </p:defaultTextStyle>
+  <p:extLst>
+    <p:ext uri="{EFAFB233-063F-42B5-8137-9DF3F51BA10A}">
+      <p15:sldGuideLst xmlns:p15="http://schemas.microsoft.com/office/powerpoint/2012/main"/>
+    </p:ext>
+  </p:extLst>
 </p:presentation>
 </file>
 
@@ -168,234 +176,10 @@
           <a:chExt cx="0" cy="0"/>
         </a:xfrm>
       </p:grpSpPr>
-      <p:sp>
-        <p:nvSpPr>
-          <p:cNvPr id="2" name="Header Placeholder 1"/>
-          <p:cNvSpPr>
-            <a:spLocks noGrp="1"/>
-          </p:cNvSpPr>
-          <p:nvPr>
-            <p:ph type="hdr" sz="quarter"/>
-          </p:nvPr>
-        </p:nvSpPr>
-        <p:spPr>
-          <a:xfrm>
-            <a:off x="0" y="0"/>
-            <a:ext cx="2971800" cy="458788"/>
-          </a:xfrm>
-          <a:prstGeom prst="rect">
-            <a:avLst/>
-          </a:prstGeom>
-        </p:spPr>
-        <p:txBody>
-          <a:bodyPr vert="horz" lIns="91440" tIns="45720" rIns="91440" bIns="45720" rtlCol="0"/>
-          <a:lstStyle>
-            <a:lvl1pPr algn="l">
-              <a:defRPr sz="1200"/>
-            </a:lvl1pPr>
-          </a:lstStyle>
-          <a:p>
-            <a:endParaRPr lang="en-US"/>
-          </a:p>
-        </p:txBody>
-      </p:sp>
-      <p:sp>
-        <p:nvSpPr>
-          <p:cNvPr id="3" name="Date Placeholder 2"/>
-          <p:cNvSpPr>
-            <a:spLocks noGrp="1"/>
-          </p:cNvSpPr>
-          <p:nvPr>
-            <p:ph type="dt" idx="1"/>
-          </p:nvPr>
-        </p:nvSpPr>
-        <p:spPr>
-          <a:xfrm>
-            <a:off x="3884613" y="0"/>
-            <a:ext cx="2971800" cy="458788"/>
-          </a:xfrm>
-          <a:prstGeom prst="rect">
-            <a:avLst/>
-          </a:prstGeom>
-        </p:spPr>
-        <p:txBody>
-          <a:bodyPr vert="horz" lIns="91440" tIns="45720" rIns="91440" bIns="45720" rtlCol="0"/>
-          <a:lstStyle>
-            <a:lvl1pPr algn="r">
-              <a:defRPr sz="1200"/>
-            </a:lvl1pPr>
-          </a:lstStyle>
-          <a:p>
-            <a:fld id="{5282F153-3F37-0F45-9E97-73ACFA13230C}" type="datetimeFigureOut">
-              <a:rPr lang="en-US"/>
-              <a:t>7/23/19</a:t>
-            </a:fld>
-            <a:endParaRPr lang="en-US"/>
-          </a:p>
-        </p:txBody>
-      </p:sp>
-      <p:sp>
-        <p:nvSpPr>
-          <p:cNvPr id="4" name="Slide Image Placeholder 3"/>
-          <p:cNvSpPr>
-            <a:spLocks noGrp="1" noRot="1" noChangeAspect="1"/>
-          </p:cNvSpPr>
-          <p:nvPr>
-            <p:ph type="sldImg" idx="2"/>
-          </p:nvPr>
-        </p:nvSpPr>
-        <p:spPr>
-          <a:xfrm>
-            <a:off x="685800" y="1143000"/>
-            <a:ext cx="5486400" cy="3086100"/>
-          </a:xfrm>
-          <a:prstGeom prst="rect">
-            <a:avLst/>
-          </a:prstGeom>
-          <a:noFill/>
-          <a:ln w="12700">
-            <a:solidFill>
-              <a:prstClr val="black"/>
-            </a:solidFill>
-          </a:ln>
-        </p:spPr>
-        <p:txBody>
-          <a:bodyPr vert="horz" lIns="91440" tIns="45720" rIns="91440" bIns="45720" rtlCol="0" anchor="ctr"/>
-          <a:lstStyle/>
-          <a:p>
-            <a:endParaRPr lang="en-US"/>
-          </a:p>
-        </p:txBody>
-      </p:sp>
-      <p:sp>
-        <p:nvSpPr>
-          <p:cNvPr id="5" name="Notes Placeholder 4"/>
-          <p:cNvSpPr>
-            <a:spLocks noGrp="1"/>
-          </p:cNvSpPr>
-          <p:nvPr>
-            <p:ph type="body" sz="quarter" idx="3"/>
-          </p:nvPr>
-        </p:nvSpPr>
-        <p:spPr>
-          <a:xfrm>
-            <a:off x="685800" y="4400550"/>
-            <a:ext cx="5486400" cy="3600450"/>
-          </a:xfrm>
-          <a:prstGeom prst="rect">
-            <a:avLst/>
-          </a:prstGeom>
-        </p:spPr>
-        <p:txBody>
-          <a:bodyPr vert="horz" lIns="91440" tIns="45720" rIns="91440" bIns="45720" rtlCol="0"/>
-          <a:lstStyle/>
-          <a:p>
-            <a:pPr lvl="0"/>
-            <a:r>
-              <a:rPr lang="en-US"/>
-              <a:t>Click to edit Master text styles</a:t>
-            </a:r>
-          </a:p>
-          <a:p>
-            <a:pPr lvl="1"/>
-            <a:r>
-              <a:rPr lang="en-US"/>
-              <a:t>Second level</a:t>
-            </a:r>
-          </a:p>
-          <a:p>
-            <a:pPr lvl="2"/>
-            <a:r>
-              <a:rPr lang="en-US"/>
-              <a:t>Third level</a:t>
-            </a:r>
-          </a:p>
-          <a:p>
-            <a:pPr lvl="3"/>
-            <a:r>
-              <a:rPr lang="en-US"/>
-              <a:t>Fourth level</a:t>
-            </a:r>
-          </a:p>
-          <a:p>
-            <a:pPr lvl="4"/>
-            <a:r>
-              <a:rPr lang="en-US"/>
-              <a:t>Fifth level</a:t>
-            </a:r>
-          </a:p>
-        </p:txBody>
-      </p:sp>
-      <p:sp>
-        <p:nvSpPr>
-          <p:cNvPr id="6" name="Footer Placeholder 5"/>
-          <p:cNvSpPr>
-            <a:spLocks noGrp="1"/>
-          </p:cNvSpPr>
-          <p:nvPr>
-            <p:ph type="ftr" sz="quarter" idx="4"/>
-          </p:nvPr>
-        </p:nvSpPr>
-        <p:spPr>
-          <a:xfrm>
-            <a:off x="0" y="8685213"/>
-            <a:ext cx="2971800" cy="458787"/>
-          </a:xfrm>
-          <a:prstGeom prst="rect">
-            <a:avLst/>
-          </a:prstGeom>
-        </p:spPr>
-        <p:txBody>
-          <a:bodyPr vert="horz" lIns="91440" tIns="45720" rIns="91440" bIns="45720" rtlCol="0" anchor="b"/>
-          <a:lstStyle>
-            <a:lvl1pPr algn="l">
-              <a:defRPr sz="1200"/>
-            </a:lvl1pPr>
-          </a:lstStyle>
-          <a:p>
-            <a:endParaRPr lang="en-US"/>
-          </a:p>
-        </p:txBody>
-      </p:sp>
-      <p:sp>
-        <p:nvSpPr>
-          <p:cNvPr id="7" name="Slide Number Placeholder 6"/>
-          <p:cNvSpPr>
-            <a:spLocks noGrp="1"/>
-          </p:cNvSpPr>
-          <p:nvPr>
-            <p:ph type="sldNum" sz="quarter" idx="5"/>
-          </p:nvPr>
-        </p:nvSpPr>
-        <p:spPr>
-          <a:xfrm>
-            <a:off x="3884613" y="8685213"/>
-            <a:ext cx="2971800" cy="458787"/>
-          </a:xfrm>
-          <a:prstGeom prst="rect">
-            <a:avLst/>
-          </a:prstGeom>
-        </p:spPr>
-        <p:txBody>
-          <a:bodyPr vert="horz" lIns="91440" tIns="45720" rIns="91440" bIns="45720" rtlCol="0" anchor="b"/>
-          <a:lstStyle>
-            <a:lvl1pPr algn="r">
-              <a:defRPr sz="1200"/>
-            </a:lvl1pPr>
-          </a:lstStyle>
-          <a:p>
-            <a:fld id="{CE5E9CC1-C706-0F49-92D6-E571CC5EEA8F}" type="slidenum">
-              <a:rPr lang="en-US"/>
-              <a:t>‹#›</a:t>
-            </a:fld>
-            <a:endParaRPr lang="en-US"/>
-          </a:p>
-        </p:txBody>
-      </p:sp>
     </p:spTree>
     <p:extLst>
       <p:ext uri="{BB962C8B-B14F-4D97-AF65-F5344CB8AC3E}">
-        <p14:creationId xmlns:p14="http://schemas.microsoft.com/office/powerpoint/2010/main" val="1024086991"/>
+        <p14:creationId xmlns:p14="http://schemas.microsoft.com/office/powerpoint/2010/main" val="3502251047"/>
       </p:ext>
     </p:extLst>
   </p:cSld>
@@ -539,10 +323,6 @@
           <a:bodyPr/>
           <a:lstStyle/>
           <a:p>
-            <a:r>
-              <a:rPr lang="en-US" dirty="0"/>
-              <a:t/>
-            </a:r>
             <a:endParaRPr lang="en-US" dirty="0"/>
           </a:p>
         </p:txBody>
@@ -627,10 +407,6 @@
           <a:bodyPr/>
           <a:lstStyle/>
           <a:p>
-            <a:r>
-              <a:rPr lang="en-US" dirty="0"/>
-              <a:t/>
-            </a:r>
             <a:endParaRPr lang="en-US" dirty="0"/>
           </a:p>
         </p:txBody>
@@ -652,7 +428,7 @@
           <a:p>
             <a:fld id="{F7021451-1387-4CA6-816F-3879F97B5CBC}" type="slidenum">
               <a:rPr lang="en-US"/>
-              <a:t>10</a:t>
+              <a:t>12</a:t>
             </a:fld>
             <a:endParaRPr lang="en-US"/>
           </a:p>
@@ -715,10 +491,6 @@
           <a:bodyPr/>
           <a:lstStyle/>
           <a:p>
-            <a:r>
-              <a:rPr lang="en-US" dirty="0"/>
-              <a:t/>
-            </a:r>
             <a:endParaRPr lang="en-US" dirty="0"/>
           </a:p>
         </p:txBody>
@@ -803,10 +575,6 @@
           <a:bodyPr/>
           <a:lstStyle/>
           <a:p>
-            <a:r>
-              <a:rPr lang="en-US" dirty="0"/>
-              <a:t/>
-            </a:r>
             <a:endParaRPr lang="en-US" dirty="0"/>
           </a:p>
         </p:txBody>
@@ -891,10 +659,6 @@
           <a:bodyPr/>
           <a:lstStyle/>
           <a:p>
-            <a:r>
-              <a:rPr lang="en-US" dirty="0"/>
-              <a:t/>
-            </a:r>
             <a:endParaRPr lang="en-US" dirty="0"/>
           </a:p>
         </p:txBody>
@@ -916,7 +680,7 @@
           <a:p>
             <a:fld id="{F7021451-1387-4CA6-816F-3879F97B5CBC}" type="slidenum">
               <a:rPr lang="en-US"/>
-              <a:t>4</a:t>
+              <a:t>6</a:t>
             </a:fld>
             <a:endParaRPr lang="en-US"/>
           </a:p>
@@ -979,10 +743,6 @@
           <a:bodyPr/>
           <a:lstStyle/>
           <a:p>
-            <a:r>
-              <a:rPr lang="en-US" dirty="0"/>
-              <a:t/>
-            </a:r>
             <a:endParaRPr lang="en-US" dirty="0"/>
           </a:p>
         </p:txBody>
@@ -1004,7 +764,7 @@
           <a:p>
             <a:fld id="{F7021451-1387-4CA6-816F-3879F97B5CBC}" type="slidenum">
               <a:rPr lang="en-US"/>
-              <a:t>5</a:t>
+              <a:t>7</a:t>
             </a:fld>
             <a:endParaRPr lang="en-US"/>
           </a:p>
@@ -1067,10 +827,6 @@
           <a:bodyPr/>
           <a:lstStyle/>
           <a:p>
-            <a:r>
-              <a:rPr lang="en-US" dirty="0"/>
-              <a:t/>
-            </a:r>
             <a:endParaRPr lang="en-US" dirty="0"/>
           </a:p>
         </p:txBody>
@@ -1092,7 +848,7 @@
           <a:p>
             <a:fld id="{F7021451-1387-4CA6-816F-3879F97B5CBC}" type="slidenum">
               <a:rPr lang="en-US"/>
-              <a:t>6</a:t>
+              <a:t>8</a:t>
             </a:fld>
             <a:endParaRPr lang="en-US"/>
           </a:p>
@@ -1155,10 +911,6 @@
           <a:bodyPr/>
           <a:lstStyle/>
           <a:p>
-            <a:r>
-              <a:rPr lang="en-US" dirty="0"/>
-              <a:t/>
-            </a:r>
             <a:endParaRPr lang="en-US" dirty="0"/>
           </a:p>
         </p:txBody>
@@ -1180,7 +932,7 @@
           <a:p>
             <a:fld id="{F7021451-1387-4CA6-816F-3879F97B5CBC}" type="slidenum">
               <a:rPr lang="en-US"/>
-              <a:t>7</a:t>
+              <a:t>9</a:t>
             </a:fld>
             <a:endParaRPr lang="en-US"/>
           </a:p>
@@ -1243,10 +995,6 @@
           <a:bodyPr/>
           <a:lstStyle/>
           <a:p>
-            <a:r>
-              <a:rPr lang="en-US" dirty="0"/>
-              <a:t/>
-            </a:r>
             <a:endParaRPr lang="en-US" dirty="0"/>
           </a:p>
         </p:txBody>
@@ -1268,7 +1016,7 @@
           <a:p>
             <a:fld id="{F7021451-1387-4CA6-816F-3879F97B5CBC}" type="slidenum">
               <a:rPr lang="en-US"/>
-              <a:t>8</a:t>
+              <a:t>10</a:t>
             </a:fld>
             <a:endParaRPr lang="en-US"/>
           </a:p>
@@ -1331,10 +1079,6 @@
           <a:bodyPr/>
           <a:lstStyle/>
           <a:p>
-            <a:r>
-              <a:rPr lang="en-US" dirty="0"/>
-              <a:t/>
-            </a:r>
             <a:endParaRPr lang="en-US" dirty="0"/>
           </a:p>
         </p:txBody>
@@ -1356,7 +1100,7 @@
           <a:p>
             <a:fld id="{F7021451-1387-4CA6-816F-3879F97B5CBC}" type="slidenum">
               <a:rPr lang="en-US"/>
-              <a:t>9</a:t>
+              <a:t>11</a:t>
             </a:fld>
             <a:endParaRPr lang="en-US"/>
           </a:p>
@@ -1424,14 +1168,14 @@
       </p:grpSpPr>
       <p:pic>
         <p:nvPicPr>
-          <p:cNvPr id="2" name="Image 0" descr="preencoded.png">    </p:cNvPr>
+          <p:cNvPr id="2" name="Image 0" descr="preencoded.png"/>
           <p:cNvPicPr>
             <a:picLocks noChangeAspect="1"/>
           </p:cNvPicPr>
           <p:nvPr/>
         </p:nvPicPr>
         <p:blipFill>
-          <a:blip r:embed="rId1"/>
+          <a:blip r:embed="rId2"/>
           <a:stretch>
             <a:fillRect/>
           </a:stretch>
@@ -1471,7 +1215,7 @@
       <p:pic>
         <p:nvPicPr>
           <p:cNvPr id="4" name="Image 1" descr="preencoded.png">
-            <a:hlinkClick r:id="rId3" tooltip=""/>
+            <a:hlinkClick r:id="rId3"/>
           </p:cNvPr>
           <p:cNvPicPr>
             <a:picLocks noChangeAspect="1"/>
@@ -1479,7 +1223,7 @@
           <p:nvPr/>
         </p:nvPicPr>
         <p:blipFill>
-          <a:blip r:embed="rId2"/>
+          <a:blip r:embed="rId4"/>
           <a:stretch>
             <a:fillRect/>
           </a:stretch>
@@ -1505,6 +1249,11 @@
 <file path=ppt/slideMasters/slideMaster1.xml><?xml version="1.0" encoding="utf-8"?>
 <p:sldMaster xmlns:a="http://schemas.openxmlformats.org/drawingml/2006/main" xmlns:r="http://schemas.openxmlformats.org/officeDocument/2006/relationships" xmlns:p="http://schemas.openxmlformats.org/presentationml/2006/main">
   <p:cSld>
+    <p:bg>
+      <p:bgRef idx="1001">
+        <a:schemeClr val="bg1"/>
+      </p:bgRef>
+    </p:bg>
     <p:spTree>
       <p:nvGrpSpPr>
         <p:cNvPr id="1" name=""/>
@@ -1799,14 +1548,14 @@
       </p:grpSpPr>
       <p:pic>
         <p:nvPicPr>
-          <p:cNvPr id="2" name="Image 0" descr="">    </p:cNvPr>
+          <p:cNvPr id="2" name="Image 0"/>
           <p:cNvPicPr>
             <a:picLocks noChangeAspect="1"/>
           </p:cNvPicPr>
           <p:nvPr/>
         </p:nvPicPr>
         <p:blipFill>
-          <a:blip r:embed="rId1"/>
+          <a:blip r:embed="rId3"/>
           <a:stretch>
             <a:fillRect/>
           </a:stretch>
@@ -1920,7 +1669,7 @@
           <a:bodyPr wrap="none" lIns="0" tIns="0" rIns="0" bIns="0" rtlCol="0" anchor="t"/>
           <a:lstStyle/>
           <a:p>
-            <a:pPr algn="l" indent="0" marL="0">
+            <a:pPr marL="0" indent="0" algn="l">
               <a:lnSpc>
                 <a:spcPct val="104000"/>
               </a:lnSpc>
@@ -1964,7 +1713,7 @@
           </a:bodyPr>
           <a:lstStyle/>
           <a:p>
-            <a:pPr algn="l" indent="0" marL="0">
+            <a:pPr marL="0" indent="0" algn="l">
               <a:lnSpc>
                 <a:spcPct val="104000"/>
               </a:lnSpc>
@@ -2008,7 +1757,7 @@
           </a:bodyPr>
           <a:lstStyle/>
           <a:p>
-            <a:pPr algn="l" indent="0" marL="0">
+            <a:pPr marL="0" indent="0" algn="l">
               <a:lnSpc>
                 <a:spcPct val="133000"/>
               </a:lnSpc>
@@ -2025,12 +1774,6 @@
               </a:rPr>
               <a:t>Термін «програмна інженерія» вперше з'явився у </a:t>
             </a:r>
-            <a:pPr algn="l" indent="0" marL="0">
-              <a:lnSpc>
-                <a:spcPct val="133000"/>
-              </a:lnSpc>
-              <a:buNone/>
-            </a:pPr>
             <a:r>
               <a:rPr lang="en-US" sz="1450" b="1" dirty="0">
                 <a:solidFill>
@@ -2042,12 +1785,6 @@
               </a:rPr>
               <a:t>1968 р.</a:t>
             </a:r>
-            <a:pPr algn="l" indent="0" marL="0">
-              <a:lnSpc>
-                <a:spcPct val="133000"/>
-              </a:lnSpc>
-              <a:buNone/>
-            </a:pPr>
             <a:r>
               <a:rPr lang="en-US" sz="1450" dirty="0">
                 <a:solidFill>
@@ -2059,12 +1796,6 @@
               </a:rPr>
               <a:t> За 40 років зміст поняття еволюціонував: від мистецтва одинаків — через теоретичну науку — до повноцінної </a:t>
             </a:r>
-            <a:pPr algn="l" indent="0" marL="0">
-              <a:lnSpc>
-                <a:spcPct val="133000"/>
-              </a:lnSpc>
-              <a:buNone/>
-            </a:pPr>
             <a:r>
               <a:rPr lang="en-US" sz="1450" dirty="0">
                 <a:solidFill>
@@ -2076,12 +1807,6 @@
               </a:rPr>
               <a:t>інженерної діяльності</a:t>
             </a:r>
-            <a:pPr algn="l" indent="0" marL="0">
-              <a:lnSpc>
-                <a:spcPct val="133000"/>
-              </a:lnSpc>
-              <a:buNone/>
-            </a:pPr>
             <a:r>
               <a:rPr lang="en-US" sz="1450" dirty="0">
                 <a:solidFill>
@@ -2106,6 +1831,1800 @@
 </file>
 
 <file path=ppt/slides/slide10.xml><?xml version="1.0" encoding="utf-8"?>
+<p:sld xmlns:a="http://schemas.openxmlformats.org/drawingml/2006/main" xmlns:r="http://schemas.openxmlformats.org/officeDocument/2006/relationships" xmlns:p="http://schemas.openxmlformats.org/presentationml/2006/main">
+  <p:cSld name="Slide 8">
+    <p:spTree>
+      <p:nvGrpSpPr>
+        <p:cNvPr id="1" name=""/>
+        <p:cNvGrpSpPr/>
+        <p:nvPr/>
+      </p:nvGrpSpPr>
+      <p:grpSpPr>
+        <a:xfrm>
+          <a:off x="0" y="0"/>
+          <a:ext cx="0" cy="0"/>
+          <a:chOff x="0" y="0"/>
+          <a:chExt cx="0" cy="0"/>
+        </a:xfrm>
+      </p:grpSpPr>
+      <p:sp>
+        <p:nvSpPr>
+          <p:cNvPr id="2" name="Text 0"/>
+          <p:cNvSpPr/>
+          <p:nvPr/>
+        </p:nvSpPr>
+        <p:spPr>
+          <a:xfrm>
+            <a:off x="661475" y="594122"/>
+            <a:ext cx="10868745" cy="544513"/>
+          </a:xfrm>
+          <a:prstGeom prst="rect">
+            <a:avLst/>
+          </a:prstGeom>
+          <a:noFill/>
+          <a:ln/>
+        </p:spPr>
+        <p:txBody>
+          <a:bodyPr wrap="none" lIns="0" tIns="0" rIns="0" bIns="0" rtlCol="0" anchor="t"/>
+          <a:lstStyle/>
+          <a:p>
+            <a:pPr marL="0" indent="0" algn="l">
+              <a:lnSpc>
+                <a:spcPct val="104000"/>
+              </a:lnSpc>
+              <a:buNone/>
+            </a:pPr>
+            <a:r>
+              <a:rPr lang="en-US" sz="3400" dirty="0">
+                <a:solidFill>
+                  <a:srgbClr val="2C2926"/>
+                </a:solidFill>
+                <a:latin typeface="Bricolage Grotesque SemiBold" pitchFamily="34" charset="0"/>
+                <a:ea typeface="Bricolage Grotesque SemiBold" pitchFamily="34" charset="-122"/>
+                <a:cs typeface="Bricolage Grotesque SemiBold" pitchFamily="34" charset="-120"/>
+              </a:rPr>
+              <a:t>Вимоги до програмного забезпечення</a:t>
+            </a:r>
+            <a:endParaRPr lang="en-US" sz="3400" dirty="0"/>
+          </a:p>
+        </p:txBody>
+      </p:sp>
+      <p:sp>
+        <p:nvSpPr>
+          <p:cNvPr id="3" name="Text 1"/>
+          <p:cNvSpPr/>
+          <p:nvPr/>
+        </p:nvSpPr>
+        <p:spPr>
+          <a:xfrm>
+            <a:off x="661475" y="1540173"/>
+            <a:ext cx="3527734" cy="272157"/>
+          </a:xfrm>
+          <a:prstGeom prst="rect">
+            <a:avLst/>
+          </a:prstGeom>
+          <a:noFill/>
+          <a:ln/>
+        </p:spPr>
+        <p:txBody>
+          <a:bodyPr wrap="none" lIns="0" tIns="0" rIns="0" bIns="0" rtlCol="0" anchor="t"/>
+          <a:lstStyle/>
+          <a:p>
+            <a:pPr marL="0" indent="0" algn="l">
+              <a:lnSpc>
+                <a:spcPct val="104000"/>
+              </a:lnSpc>
+              <a:buNone/>
+            </a:pPr>
+            <a:r>
+              <a:rPr lang="en-US" sz="1700" dirty="0">
+                <a:solidFill>
+                  <a:srgbClr val="2C2926"/>
+                </a:solidFill>
+                <a:latin typeface="Bricolage Grotesque SemiBold" pitchFamily="34" charset="0"/>
+                <a:ea typeface="Bricolage Grotesque SemiBold" pitchFamily="34" charset="-122"/>
+                <a:cs typeface="Bricolage Grotesque SemiBold" pitchFamily="34" charset="-120"/>
+              </a:rPr>
+              <a:t>Класифікація вимог</a:t>
+            </a:r>
+            <a:endParaRPr lang="en-US" sz="1700" dirty="0"/>
+          </a:p>
+        </p:txBody>
+      </p:sp>
+      <p:pic>
+        <p:nvPicPr>
+          <p:cNvPr id="4" name="Image 0" descr="preencoded.png"/>
+          <p:cNvPicPr>
+            <a:picLocks noChangeAspect="1"/>
+          </p:cNvPicPr>
+          <p:nvPr/>
+        </p:nvPicPr>
+        <p:blipFill>
+          <a:blip r:embed="rId3">
+            <a:extLst>
+              <a:ext uri="{96DAC541-7B7A-43D3-8B79-37D633B846F1}">
+                <asvg:svgBlip xmlns:asvg="http://schemas.microsoft.com/office/drawing/2016/SVG/main" xmlns="" r:embed="rId4"/>
+              </a:ext>
+            </a:extLst>
+          </a:blip>
+          <a:stretch>
+            <a:fillRect/>
+          </a:stretch>
+        </p:blipFill>
+        <p:spPr>
+          <a:xfrm>
+            <a:off x="726759" y="2001689"/>
+            <a:ext cx="261336" cy="261342"/>
+          </a:xfrm>
+          <a:prstGeom prst="rect">
+            <a:avLst/>
+          </a:prstGeom>
+        </p:spPr>
+      </p:pic>
+      <p:sp>
+        <p:nvSpPr>
+          <p:cNvPr id="5" name="Text 2"/>
+          <p:cNvSpPr/>
+          <p:nvPr/>
+        </p:nvSpPr>
+        <p:spPr>
+          <a:xfrm>
+            <a:off x="1227702" y="1993007"/>
+            <a:ext cx="2961506" cy="535583"/>
+          </a:xfrm>
+          <a:prstGeom prst="rect">
+            <a:avLst/>
+          </a:prstGeom>
+          <a:noFill/>
+          <a:ln/>
+        </p:spPr>
+        <p:txBody>
+          <a:bodyPr wrap="square" lIns="0" tIns="0" rIns="0" bIns="0" rtlCol="0" anchor="t">
+            <a:normAutofit/>
+          </a:bodyPr>
+          <a:lstStyle/>
+          <a:p>
+            <a:pPr marL="0" indent="0" algn="l">
+              <a:lnSpc>
+                <a:spcPct val="128000"/>
+              </a:lnSpc>
+              <a:buNone/>
+            </a:pPr>
+            <a:r>
+              <a:rPr lang="en-US" sz="1350" b="1" dirty="0">
+                <a:solidFill>
+                  <a:srgbClr val="2C2926"/>
+                </a:solidFill>
+                <a:latin typeface="Inter Bold" pitchFamily="34" charset="0"/>
+                <a:ea typeface="Inter Bold" pitchFamily="34" charset="-122"/>
+                <a:cs typeface="Inter Bold" pitchFamily="34" charset="-120"/>
+              </a:rPr>
+              <a:t>Вимоги користувачів</a:t>
+            </a:r>
+            <a:r>
+              <a:rPr lang="en-US" sz="1350" dirty="0">
+                <a:solidFill>
+                  <a:srgbClr val="2C2926"/>
+                </a:solidFill>
+                <a:latin typeface="Inter" pitchFamily="34" charset="0"/>
+                <a:ea typeface="Inter" pitchFamily="34" charset="-122"/>
+                <a:cs typeface="Inter" pitchFamily="34" charset="-120"/>
+              </a:rPr>
+              <a:t> — зовнішня поведінка системи, цілі та задачі</a:t>
+            </a:r>
+            <a:endParaRPr lang="en-US" sz="1350" dirty="0"/>
+          </a:p>
+        </p:txBody>
+      </p:sp>
+      <p:pic>
+        <p:nvPicPr>
+          <p:cNvPr id="6" name="Image 1" descr="preencoded.png"/>
+          <p:cNvPicPr>
+            <a:picLocks noChangeAspect="1"/>
+          </p:cNvPicPr>
+          <p:nvPr/>
+        </p:nvPicPr>
+        <p:blipFill>
+          <a:blip r:embed="rId3">
+            <a:extLst>
+              <a:ext uri="{96DAC541-7B7A-43D3-8B79-37D633B846F1}">
+                <asvg:svgBlip xmlns:asvg="http://schemas.microsoft.com/office/drawing/2016/SVG/main" xmlns="" r:embed="rId5"/>
+              </a:ext>
+            </a:extLst>
+          </a:blip>
+          <a:stretch>
+            <a:fillRect/>
+          </a:stretch>
+        </p:blipFill>
+        <p:spPr>
+          <a:xfrm>
+            <a:off x="726759" y="2858542"/>
+            <a:ext cx="261336" cy="261342"/>
+          </a:xfrm>
+          <a:prstGeom prst="rect">
+            <a:avLst/>
+          </a:prstGeom>
+        </p:spPr>
+      </p:pic>
+      <p:sp>
+        <p:nvSpPr>
+          <p:cNvPr id="7" name="Text 3"/>
+          <p:cNvSpPr/>
+          <p:nvPr/>
+        </p:nvSpPr>
+        <p:spPr>
+          <a:xfrm>
+            <a:off x="1227702" y="2849860"/>
+            <a:ext cx="2961506" cy="803374"/>
+          </a:xfrm>
+          <a:prstGeom prst="rect">
+            <a:avLst/>
+          </a:prstGeom>
+          <a:noFill/>
+          <a:ln/>
+        </p:spPr>
+        <p:txBody>
+          <a:bodyPr wrap="square" lIns="0" tIns="0" rIns="0" bIns="0" rtlCol="0" anchor="t">
+            <a:normAutofit/>
+          </a:bodyPr>
+          <a:lstStyle/>
+          <a:p>
+            <a:pPr marL="0" indent="0" algn="l">
+              <a:lnSpc>
+                <a:spcPct val="128000"/>
+              </a:lnSpc>
+              <a:buNone/>
+            </a:pPr>
+            <a:r>
+              <a:rPr lang="en-US" sz="1350" b="1" dirty="0">
+                <a:solidFill>
+                  <a:srgbClr val="2C2926"/>
+                </a:solidFill>
+                <a:latin typeface="Inter Bold" pitchFamily="34" charset="0"/>
+                <a:ea typeface="Inter Bold" pitchFamily="34" charset="-122"/>
+                <a:cs typeface="Inter Bold" pitchFamily="34" charset="-120"/>
+              </a:rPr>
+              <a:t>Системні вимоги</a:t>
+            </a:r>
+            <a:r>
+              <a:rPr lang="en-US" sz="1350" dirty="0">
+                <a:solidFill>
+                  <a:srgbClr val="2C2926"/>
+                </a:solidFill>
+                <a:latin typeface="Inter" pitchFamily="34" charset="0"/>
+                <a:ea typeface="Inter" pitchFamily="34" charset="-122"/>
+                <a:cs typeface="Inter" pitchFamily="34" charset="-120"/>
+              </a:rPr>
+              <a:t> — зовнішні умови виконання функцій і обмеження</a:t>
+            </a:r>
+            <a:endParaRPr lang="en-US" sz="1350" dirty="0"/>
+          </a:p>
+        </p:txBody>
+      </p:sp>
+      <p:pic>
+        <p:nvPicPr>
+          <p:cNvPr id="8" name="Image 2" descr="preencoded.png"/>
+          <p:cNvPicPr>
+            <a:picLocks noChangeAspect="1"/>
+          </p:cNvPicPr>
+          <p:nvPr/>
+        </p:nvPicPr>
+        <p:blipFill>
+          <a:blip r:embed="rId3">
+            <a:extLst>
+              <a:ext uri="{96DAC541-7B7A-43D3-8B79-37D633B846F1}">
+                <asvg:svgBlip xmlns:asvg="http://schemas.microsoft.com/office/drawing/2016/SVG/main" xmlns="" r:embed="rId6"/>
+              </a:ext>
+            </a:extLst>
+          </a:blip>
+          <a:stretch>
+            <a:fillRect/>
+          </a:stretch>
+        </p:blipFill>
+        <p:spPr>
+          <a:xfrm>
+            <a:off x="726759" y="3983186"/>
+            <a:ext cx="261336" cy="261342"/>
+          </a:xfrm>
+          <a:prstGeom prst="rect">
+            <a:avLst/>
+          </a:prstGeom>
+        </p:spPr>
+      </p:pic>
+      <p:sp>
+        <p:nvSpPr>
+          <p:cNvPr id="9" name="Text 4"/>
+          <p:cNvSpPr/>
+          <p:nvPr/>
+        </p:nvSpPr>
+        <p:spPr>
+          <a:xfrm>
+            <a:off x="1227702" y="3974505"/>
+            <a:ext cx="2961506" cy="535583"/>
+          </a:xfrm>
+          <a:prstGeom prst="rect">
+            <a:avLst/>
+          </a:prstGeom>
+          <a:noFill/>
+          <a:ln/>
+        </p:spPr>
+        <p:txBody>
+          <a:bodyPr wrap="square" lIns="0" tIns="0" rIns="0" bIns="0" rtlCol="0" anchor="t">
+            <a:normAutofit/>
+          </a:bodyPr>
+          <a:lstStyle/>
+          <a:p>
+            <a:pPr marL="0" indent="0" algn="l">
+              <a:lnSpc>
+                <a:spcPct val="128000"/>
+              </a:lnSpc>
+              <a:buNone/>
+            </a:pPr>
+            <a:r>
+              <a:rPr lang="en-US" sz="1350" b="1" dirty="0">
+                <a:solidFill>
+                  <a:srgbClr val="2C2926"/>
+                </a:solidFill>
+                <a:latin typeface="Inter Bold" pitchFamily="34" charset="0"/>
+                <a:ea typeface="Inter Bold" pitchFamily="34" charset="-122"/>
+                <a:cs typeface="Inter Bold" pitchFamily="34" charset="-120"/>
+              </a:rPr>
+              <a:t>Функціональні вимоги</a:t>
+            </a:r>
+            <a:r>
+              <a:rPr lang="en-US" sz="1350" dirty="0">
+                <a:solidFill>
+                  <a:srgbClr val="2C2926"/>
+                </a:solidFill>
+                <a:latin typeface="Inter" pitchFamily="34" charset="0"/>
+                <a:ea typeface="Inter" pitchFamily="34" charset="-122"/>
+                <a:cs typeface="Inter" pitchFamily="34" charset="-120"/>
+              </a:rPr>
+              <a:t> — перелік функцій та сервісів системи</a:t>
+            </a:r>
+            <a:endParaRPr lang="en-US" sz="1350" dirty="0"/>
+          </a:p>
+        </p:txBody>
+      </p:sp>
+      <p:pic>
+        <p:nvPicPr>
+          <p:cNvPr id="10" name="Image 3" descr="preencoded.png"/>
+          <p:cNvPicPr>
+            <a:picLocks noChangeAspect="1"/>
+          </p:cNvPicPr>
+          <p:nvPr/>
+        </p:nvPicPr>
+        <p:blipFill>
+          <a:blip r:embed="rId3">
+            <a:extLst>
+              <a:ext uri="{96DAC541-7B7A-43D3-8B79-37D633B846F1}">
+                <asvg:svgBlip xmlns:asvg="http://schemas.microsoft.com/office/drawing/2016/SVG/main" xmlns="" r:embed="rId8"/>
+              </a:ext>
+            </a:extLst>
+          </a:blip>
+          <a:stretch>
+            <a:fillRect/>
+          </a:stretch>
+        </p:blipFill>
+        <p:spPr>
+          <a:xfrm>
+            <a:off x="726759" y="4840039"/>
+            <a:ext cx="261336" cy="261342"/>
+          </a:xfrm>
+          <a:prstGeom prst="rect">
+            <a:avLst/>
+          </a:prstGeom>
+        </p:spPr>
+      </p:pic>
+      <p:sp>
+        <p:nvSpPr>
+          <p:cNvPr id="11" name="Text 5"/>
+          <p:cNvSpPr/>
+          <p:nvPr/>
+        </p:nvSpPr>
+        <p:spPr>
+          <a:xfrm>
+            <a:off x="1227702" y="4831358"/>
+            <a:ext cx="2961506" cy="803374"/>
+          </a:xfrm>
+          <a:prstGeom prst="rect">
+            <a:avLst/>
+          </a:prstGeom>
+          <a:noFill/>
+          <a:ln/>
+        </p:spPr>
+        <p:txBody>
+          <a:bodyPr wrap="square" lIns="0" tIns="0" rIns="0" bIns="0" rtlCol="0" anchor="t">
+            <a:normAutofit/>
+          </a:bodyPr>
+          <a:lstStyle/>
+          <a:p>
+            <a:pPr marL="0" indent="0" algn="l">
+              <a:lnSpc>
+                <a:spcPct val="128000"/>
+              </a:lnSpc>
+              <a:buNone/>
+            </a:pPr>
+            <a:r>
+              <a:rPr lang="en-US" sz="1350" b="1" dirty="0">
+                <a:solidFill>
+                  <a:srgbClr val="2C2926"/>
+                </a:solidFill>
+                <a:latin typeface="Inter Bold" pitchFamily="34" charset="0"/>
+                <a:ea typeface="Inter Bold" pitchFamily="34" charset="-122"/>
+                <a:cs typeface="Inter Bold" pitchFamily="34" charset="-120"/>
+              </a:rPr>
+              <a:t>Нефункціональні вимоги</a:t>
+            </a:r>
+            <a:r>
+              <a:rPr lang="en-US" sz="1350" dirty="0">
+                <a:solidFill>
+                  <a:srgbClr val="2C2926"/>
+                </a:solidFill>
+                <a:latin typeface="Inter" pitchFamily="34" charset="0"/>
+                <a:ea typeface="Inter" pitchFamily="34" charset="-122"/>
+                <a:cs typeface="Inter" pitchFamily="34" charset="-120"/>
+              </a:rPr>
+              <a:t> — умови виконання функцій (захист, аутентифікація)</a:t>
+            </a:r>
+            <a:endParaRPr lang="en-US" sz="1350" dirty="0"/>
+          </a:p>
+        </p:txBody>
+      </p:sp>
+      <p:pic>
+        <p:nvPicPr>
+          <p:cNvPr id="12" name="Image 4" descr="preencoded.png"/>
+          <p:cNvPicPr>
+            <a:picLocks noChangeAspect="1"/>
+          </p:cNvPicPr>
+          <p:nvPr/>
+        </p:nvPicPr>
+        <p:blipFill>
+          <a:blip r:embed="rId9"/>
+          <a:stretch>
+            <a:fillRect/>
+          </a:stretch>
+        </p:blipFill>
+        <p:spPr>
+          <a:xfrm>
+            <a:off x="4620601" y="1637903"/>
+            <a:ext cx="6915870" cy="3919041"/>
+          </a:xfrm>
+          <a:prstGeom prst="rect">
+            <a:avLst/>
+          </a:prstGeom>
+        </p:spPr>
+      </p:pic>
+      <p:sp>
+        <p:nvSpPr>
+          <p:cNvPr id="13" name="Text 6"/>
+          <p:cNvSpPr/>
+          <p:nvPr/>
+        </p:nvSpPr>
+        <p:spPr>
+          <a:xfrm>
+            <a:off x="661475" y="5996087"/>
+            <a:ext cx="11478330" cy="267791"/>
+          </a:xfrm>
+          <a:prstGeom prst="rect">
+            <a:avLst/>
+          </a:prstGeom>
+          <a:noFill/>
+          <a:ln/>
+        </p:spPr>
+        <p:txBody>
+          <a:bodyPr wrap="none" lIns="0" tIns="0" rIns="0" bIns="0" rtlCol="0" anchor="t"/>
+          <a:lstStyle/>
+          <a:p>
+            <a:pPr marL="0" indent="0" algn="l">
+              <a:lnSpc>
+                <a:spcPct val="128000"/>
+              </a:lnSpc>
+              <a:buNone/>
+            </a:pPr>
+            <a:r>
+              <a:rPr lang="en-US" sz="1350" dirty="0">
+                <a:solidFill>
+                  <a:srgbClr val="2C2926"/>
+                </a:solidFill>
+                <a:latin typeface="Inter" pitchFamily="34" charset="0"/>
+                <a:ea typeface="Inter" pitchFamily="34" charset="-122"/>
+                <a:cs typeface="Inter" pitchFamily="34" charset="-120"/>
+              </a:rPr>
+              <a:t>Вимоги задаються через </a:t>
+            </a:r>
+            <a:r>
+              <a:rPr lang="en-US" sz="1350" b="1" dirty="0">
+                <a:solidFill>
+                  <a:srgbClr val="2C2926"/>
+                </a:solidFill>
+                <a:latin typeface="Inter Bold" pitchFamily="34" charset="0"/>
+                <a:ea typeface="Inter Bold" pitchFamily="34" charset="-122"/>
+                <a:cs typeface="Inter Bold" pitchFamily="34" charset="-120"/>
+              </a:rPr>
+              <a:t>варіанти використання (use case)</a:t>
+            </a:r>
+            <a:r>
+              <a:rPr lang="en-US" sz="1350" dirty="0">
+                <a:solidFill>
+                  <a:srgbClr val="2C2926"/>
+                </a:solidFill>
+                <a:latin typeface="Inter" pitchFamily="34" charset="0"/>
+                <a:ea typeface="Inter" pitchFamily="34" charset="-122"/>
+                <a:cs typeface="Inter" pitchFamily="34" charset="-120"/>
+              </a:rPr>
+              <a:t>, сценарії або прецеденти з графічною нотацією UML.</a:t>
+            </a:r>
+            <a:endParaRPr lang="en-US" sz="1350" dirty="0"/>
+          </a:p>
+        </p:txBody>
+      </p:sp>
+    </p:spTree>
+  </p:cSld>
+  <p:clrMapOvr>
+    <a:masterClrMapping/>
+  </p:clrMapOvr>
+</p:sld>
+</file>
+
+<file path=ppt/slides/slide11.xml><?xml version="1.0" encoding="utf-8"?>
+<p:sld xmlns:a="http://schemas.openxmlformats.org/drawingml/2006/main" xmlns:r="http://schemas.openxmlformats.org/officeDocument/2006/relationships" xmlns:p="http://schemas.openxmlformats.org/presentationml/2006/main">
+  <p:cSld name="Slide 9">
+    <p:spTree>
+      <p:nvGrpSpPr>
+        <p:cNvPr id="1" name=""/>
+        <p:cNvGrpSpPr/>
+        <p:nvPr/>
+      </p:nvGrpSpPr>
+      <p:grpSpPr>
+        <a:xfrm>
+          <a:off x="0" y="0"/>
+          <a:ext cx="0" cy="0"/>
+          <a:chOff x="0" y="0"/>
+          <a:chExt cx="0" cy="0"/>
+        </a:xfrm>
+      </p:grpSpPr>
+      <p:sp>
+        <p:nvSpPr>
+          <p:cNvPr id="2" name="Text 0"/>
+          <p:cNvSpPr/>
+          <p:nvPr/>
+        </p:nvSpPr>
+        <p:spPr>
+          <a:xfrm>
+            <a:off x="661475" y="543719"/>
+            <a:ext cx="10868745" cy="498376"/>
+          </a:xfrm>
+          <a:prstGeom prst="rect">
+            <a:avLst/>
+          </a:prstGeom>
+          <a:noFill/>
+          <a:ln/>
+        </p:spPr>
+        <p:txBody>
+          <a:bodyPr wrap="none" lIns="0" tIns="0" rIns="0" bIns="0" rtlCol="0" anchor="t"/>
+          <a:lstStyle/>
+          <a:p>
+            <a:pPr marL="0" indent="0" algn="l">
+              <a:lnSpc>
+                <a:spcPct val="104000"/>
+              </a:lnSpc>
+              <a:buNone/>
+            </a:pPr>
+            <a:r>
+              <a:rPr lang="en-US" sz="3100" dirty="0">
+                <a:solidFill>
+                  <a:srgbClr val="2C2926"/>
+                </a:solidFill>
+                <a:latin typeface="Bricolage Grotesque SemiBold" pitchFamily="34" charset="0"/>
+                <a:ea typeface="Bricolage Grotesque SemiBold" pitchFamily="34" charset="-122"/>
+                <a:cs typeface="Bricolage Grotesque SemiBold" pitchFamily="34" charset="-120"/>
+              </a:rPr>
+              <a:t>Ядро знань SWEBOK</a:t>
+            </a:r>
+            <a:endParaRPr lang="en-US" sz="3100" dirty="0"/>
+          </a:p>
+        </p:txBody>
+      </p:sp>
+      <p:sp>
+        <p:nvSpPr>
+          <p:cNvPr id="3" name="Text 1"/>
+          <p:cNvSpPr/>
+          <p:nvPr/>
+        </p:nvSpPr>
+        <p:spPr>
+          <a:xfrm>
+            <a:off x="661475" y="1311176"/>
+            <a:ext cx="11478330" cy="235148"/>
+          </a:xfrm>
+          <a:prstGeom prst="rect">
+            <a:avLst/>
+          </a:prstGeom>
+          <a:noFill/>
+          <a:ln/>
+        </p:spPr>
+        <p:txBody>
+          <a:bodyPr wrap="none" lIns="0" tIns="0" rIns="0" bIns="0" rtlCol="0" anchor="t"/>
+          <a:lstStyle/>
+          <a:p>
+            <a:pPr marL="0" indent="0" algn="l">
+              <a:lnSpc>
+                <a:spcPct val="123000"/>
+              </a:lnSpc>
+              <a:buNone/>
+            </a:pPr>
+            <a:r>
+              <a:rPr lang="en-US" sz="1250" dirty="0">
+                <a:solidFill>
+                  <a:srgbClr val="2C2926"/>
+                </a:solidFill>
+                <a:latin typeface="Inter" pitchFamily="34" charset="0"/>
+                <a:ea typeface="Inter" pitchFamily="34" charset="-122"/>
+                <a:cs typeface="Inter" pitchFamily="34" charset="-120"/>
+              </a:rPr>
+              <a:t>У </a:t>
+            </a:r>
+            <a:r>
+              <a:rPr lang="en-US" sz="1250" b="1" dirty="0">
+                <a:solidFill>
+                  <a:srgbClr val="2C2926"/>
+                </a:solidFill>
+                <a:latin typeface="Inter Bold" pitchFamily="34" charset="0"/>
+                <a:ea typeface="Inter Bold" pitchFamily="34" charset="-122"/>
+                <a:cs typeface="Inter Bold" pitchFamily="34" charset="-120"/>
+              </a:rPr>
+              <a:t>1993 р.</a:t>
+            </a:r>
+            <a:r>
+              <a:rPr lang="en-US" sz="1250" dirty="0">
+                <a:solidFill>
+                  <a:srgbClr val="2C2926"/>
+                </a:solidFill>
+                <a:latin typeface="Inter" pitchFamily="34" charset="0"/>
+                <a:ea typeface="Inter" pitchFamily="34" charset="-122"/>
+                <a:cs typeface="Inter" pitchFamily="34" charset="-120"/>
+              </a:rPr>
+              <a:t> ACM та IEEE створили комітет SWECC для визначення ядра знань ПІ. SWEBOK охоплює </a:t>
+            </a:r>
+            <a:r>
+              <a:rPr lang="en-US" sz="1250" dirty="0">
+                <a:solidFill>
+                  <a:srgbClr val="E7BF6A"/>
+                </a:solidFill>
+                <a:latin typeface="Inter" pitchFamily="34" charset="0"/>
+                <a:ea typeface="Inter" pitchFamily="34" charset="-122"/>
+                <a:cs typeface="Inter" pitchFamily="34" charset="-120"/>
+              </a:rPr>
+              <a:t>10 областей знань</a:t>
+            </a:r>
+            <a:r>
+              <a:rPr lang="en-US" sz="1250" dirty="0">
+                <a:solidFill>
+                  <a:srgbClr val="2C2926"/>
+                </a:solidFill>
+                <a:latin typeface="Inter" pitchFamily="34" charset="0"/>
+                <a:ea typeface="Inter" pitchFamily="34" charset="-122"/>
+                <a:cs typeface="Inter" pitchFamily="34" charset="-120"/>
+              </a:rPr>
+              <a:t>:</a:t>
+            </a:r>
+            <a:endParaRPr lang="en-US" sz="1250" dirty="0"/>
+          </a:p>
+        </p:txBody>
+      </p:sp>
+      <p:sp>
+        <p:nvSpPr>
+          <p:cNvPr id="4" name="Text 2"/>
+          <p:cNvSpPr/>
+          <p:nvPr/>
+        </p:nvSpPr>
+        <p:spPr>
+          <a:xfrm>
+            <a:off x="661475" y="1697633"/>
+            <a:ext cx="318881" cy="199330"/>
+          </a:xfrm>
+          <a:prstGeom prst="rect">
+            <a:avLst/>
+          </a:prstGeom>
+          <a:noFill/>
+          <a:ln/>
+        </p:spPr>
+        <p:txBody>
+          <a:bodyPr wrap="none" lIns="0" tIns="0" rIns="0" bIns="0" rtlCol="0" anchor="ctr"/>
+          <a:lstStyle/>
+          <a:p>
+            <a:pPr marL="0" indent="0" algn="l">
+              <a:lnSpc>
+                <a:spcPct val="100000"/>
+              </a:lnSpc>
+              <a:buNone/>
+            </a:pPr>
+            <a:r>
+              <a:rPr lang="en-US" sz="1250" dirty="0">
+                <a:solidFill>
+                  <a:srgbClr val="2C2926"/>
+                </a:solidFill>
+                <a:latin typeface="Bricolage Grotesque Light" pitchFamily="34" charset="0"/>
+                <a:ea typeface="Bricolage Grotesque Light" pitchFamily="34" charset="-122"/>
+                <a:cs typeface="Bricolage Grotesque Light" pitchFamily="34" charset="-120"/>
+              </a:rPr>
+              <a:t>01</a:t>
+            </a:r>
+            <a:endParaRPr lang="en-US" sz="1250" dirty="0"/>
+          </a:p>
+        </p:txBody>
+      </p:sp>
+      <p:sp>
+        <p:nvSpPr>
+          <p:cNvPr id="5" name="Shape 3"/>
+          <p:cNvSpPr/>
+          <p:nvPr/>
+        </p:nvSpPr>
+        <p:spPr>
+          <a:xfrm>
+            <a:off x="661475" y="1949549"/>
+            <a:ext cx="5367104" cy="19050"/>
+          </a:xfrm>
+          <a:prstGeom prst="rect">
+            <a:avLst/>
+          </a:prstGeom>
+          <a:solidFill>
+            <a:srgbClr val="DA9B49"/>
+          </a:solidFill>
+          <a:ln/>
+        </p:spPr>
+      </p:sp>
+      <p:sp>
+        <p:nvSpPr>
+          <p:cNvPr id="6" name="Text 4"/>
+          <p:cNvSpPr/>
+          <p:nvPr/>
+        </p:nvSpPr>
+        <p:spPr>
+          <a:xfrm>
+            <a:off x="661475" y="2067322"/>
+            <a:ext cx="5367104" cy="249138"/>
+          </a:xfrm>
+          <a:prstGeom prst="rect">
+            <a:avLst/>
+          </a:prstGeom>
+          <a:noFill/>
+          <a:ln/>
+        </p:spPr>
+        <p:txBody>
+          <a:bodyPr wrap="none" lIns="0" tIns="0" rIns="0" bIns="0" rtlCol="0" anchor="t"/>
+          <a:lstStyle/>
+          <a:p>
+            <a:pPr marL="0" indent="0" algn="l">
+              <a:lnSpc>
+                <a:spcPct val="104000"/>
+              </a:lnSpc>
+              <a:buNone/>
+            </a:pPr>
+            <a:r>
+              <a:rPr lang="en-US" sz="1550" dirty="0">
+                <a:solidFill>
+                  <a:srgbClr val="2C2926"/>
+                </a:solidFill>
+                <a:latin typeface="Bricolage Grotesque SemiBold" pitchFamily="34" charset="0"/>
+                <a:ea typeface="Bricolage Grotesque SemiBold" pitchFamily="34" charset="-122"/>
+                <a:cs typeface="Bricolage Grotesque SemiBold" pitchFamily="34" charset="-120"/>
+              </a:rPr>
+              <a:t>Програмні вимоги</a:t>
+            </a:r>
+            <a:endParaRPr lang="en-US" sz="1550" dirty="0"/>
+          </a:p>
+        </p:txBody>
+      </p:sp>
+      <p:sp>
+        <p:nvSpPr>
+          <p:cNvPr id="7" name="Text 5"/>
+          <p:cNvSpPr/>
+          <p:nvPr/>
+        </p:nvSpPr>
+        <p:spPr>
+          <a:xfrm>
+            <a:off x="6163116" y="1697633"/>
+            <a:ext cx="318881" cy="199330"/>
+          </a:xfrm>
+          <a:prstGeom prst="rect">
+            <a:avLst/>
+          </a:prstGeom>
+          <a:noFill/>
+          <a:ln/>
+        </p:spPr>
+        <p:txBody>
+          <a:bodyPr wrap="none" lIns="0" tIns="0" rIns="0" bIns="0" rtlCol="0" anchor="ctr"/>
+          <a:lstStyle/>
+          <a:p>
+            <a:pPr marL="0" indent="0" algn="l">
+              <a:lnSpc>
+                <a:spcPct val="100000"/>
+              </a:lnSpc>
+              <a:buNone/>
+            </a:pPr>
+            <a:r>
+              <a:rPr lang="en-US" sz="1250" dirty="0">
+                <a:solidFill>
+                  <a:srgbClr val="2C2926"/>
+                </a:solidFill>
+                <a:latin typeface="Bricolage Grotesque Light" pitchFamily="34" charset="0"/>
+                <a:ea typeface="Bricolage Grotesque Light" pitchFamily="34" charset="-122"/>
+                <a:cs typeface="Bricolage Grotesque Light" pitchFamily="34" charset="-120"/>
+              </a:rPr>
+              <a:t>02</a:t>
+            </a:r>
+            <a:endParaRPr lang="en-US" sz="1250" dirty="0"/>
+          </a:p>
+        </p:txBody>
+      </p:sp>
+      <p:sp>
+        <p:nvSpPr>
+          <p:cNvPr id="8" name="Shape 6"/>
+          <p:cNvSpPr/>
+          <p:nvPr/>
+        </p:nvSpPr>
+        <p:spPr>
+          <a:xfrm>
+            <a:off x="6163116" y="1949549"/>
+            <a:ext cx="5367104" cy="19050"/>
+          </a:xfrm>
+          <a:prstGeom prst="rect">
+            <a:avLst/>
+          </a:prstGeom>
+          <a:solidFill>
+            <a:srgbClr val="DA9B49"/>
+          </a:solidFill>
+          <a:ln/>
+        </p:spPr>
+      </p:sp>
+      <p:sp>
+        <p:nvSpPr>
+          <p:cNvPr id="9" name="Text 7"/>
+          <p:cNvSpPr/>
+          <p:nvPr/>
+        </p:nvSpPr>
+        <p:spPr>
+          <a:xfrm>
+            <a:off x="6163116" y="2067322"/>
+            <a:ext cx="5367104" cy="249138"/>
+          </a:xfrm>
+          <a:prstGeom prst="rect">
+            <a:avLst/>
+          </a:prstGeom>
+          <a:noFill/>
+          <a:ln/>
+        </p:spPr>
+        <p:txBody>
+          <a:bodyPr wrap="none" lIns="0" tIns="0" rIns="0" bIns="0" rtlCol="0" anchor="t"/>
+          <a:lstStyle/>
+          <a:p>
+            <a:pPr marL="0" indent="0" algn="l">
+              <a:lnSpc>
+                <a:spcPct val="104000"/>
+              </a:lnSpc>
+              <a:buNone/>
+            </a:pPr>
+            <a:r>
+              <a:rPr lang="en-US" sz="1550" dirty="0">
+                <a:solidFill>
+                  <a:srgbClr val="2C2926"/>
+                </a:solidFill>
+                <a:latin typeface="Bricolage Grotesque SemiBold" pitchFamily="34" charset="0"/>
+                <a:ea typeface="Bricolage Grotesque SemiBold" pitchFamily="34" charset="-122"/>
+                <a:cs typeface="Bricolage Grotesque SemiBold" pitchFamily="34" charset="-120"/>
+              </a:rPr>
+              <a:t>Проектування ПЗ</a:t>
+            </a:r>
+            <a:endParaRPr lang="en-US" sz="1550" dirty="0"/>
+          </a:p>
+        </p:txBody>
+      </p:sp>
+      <p:sp>
+        <p:nvSpPr>
+          <p:cNvPr id="10" name="Text 8"/>
+          <p:cNvSpPr/>
+          <p:nvPr/>
+        </p:nvSpPr>
+        <p:spPr>
+          <a:xfrm>
+            <a:off x="661475" y="2570559"/>
+            <a:ext cx="318881" cy="199330"/>
+          </a:xfrm>
+          <a:prstGeom prst="rect">
+            <a:avLst/>
+          </a:prstGeom>
+          <a:noFill/>
+          <a:ln/>
+        </p:spPr>
+        <p:txBody>
+          <a:bodyPr wrap="none" lIns="0" tIns="0" rIns="0" bIns="0" rtlCol="0" anchor="ctr"/>
+          <a:lstStyle/>
+          <a:p>
+            <a:pPr marL="0" indent="0" algn="l">
+              <a:lnSpc>
+                <a:spcPct val="100000"/>
+              </a:lnSpc>
+              <a:buNone/>
+            </a:pPr>
+            <a:r>
+              <a:rPr lang="en-US" sz="1250" dirty="0">
+                <a:solidFill>
+                  <a:srgbClr val="2C2926"/>
+                </a:solidFill>
+                <a:latin typeface="Bricolage Grotesque Light" pitchFamily="34" charset="0"/>
+                <a:ea typeface="Bricolage Grotesque Light" pitchFamily="34" charset="-122"/>
+                <a:cs typeface="Bricolage Grotesque Light" pitchFamily="34" charset="-120"/>
+              </a:rPr>
+              <a:t>03</a:t>
+            </a:r>
+            <a:endParaRPr lang="en-US" sz="1250" dirty="0"/>
+          </a:p>
+        </p:txBody>
+      </p:sp>
+      <p:sp>
+        <p:nvSpPr>
+          <p:cNvPr id="11" name="Shape 9"/>
+          <p:cNvSpPr/>
+          <p:nvPr/>
+        </p:nvSpPr>
+        <p:spPr>
+          <a:xfrm>
+            <a:off x="661475" y="2806601"/>
+            <a:ext cx="5367104" cy="19050"/>
+          </a:xfrm>
+          <a:prstGeom prst="rect">
+            <a:avLst/>
+          </a:prstGeom>
+          <a:solidFill>
+            <a:srgbClr val="DA9B49"/>
+          </a:solidFill>
+          <a:ln/>
+        </p:spPr>
+      </p:sp>
+      <p:sp>
+        <p:nvSpPr>
+          <p:cNvPr id="12" name="Text 10"/>
+          <p:cNvSpPr/>
+          <p:nvPr/>
+        </p:nvSpPr>
+        <p:spPr>
+          <a:xfrm>
+            <a:off x="661475" y="2940248"/>
+            <a:ext cx="5367104" cy="249138"/>
+          </a:xfrm>
+          <a:prstGeom prst="rect">
+            <a:avLst/>
+          </a:prstGeom>
+          <a:noFill/>
+          <a:ln/>
+        </p:spPr>
+        <p:txBody>
+          <a:bodyPr wrap="none" lIns="0" tIns="0" rIns="0" bIns="0" rtlCol="0" anchor="t"/>
+          <a:lstStyle/>
+          <a:p>
+            <a:pPr marL="0" indent="0" algn="l">
+              <a:lnSpc>
+                <a:spcPct val="104000"/>
+              </a:lnSpc>
+              <a:buNone/>
+            </a:pPr>
+            <a:r>
+              <a:rPr lang="en-US" sz="1550" dirty="0">
+                <a:solidFill>
+                  <a:srgbClr val="2C2926"/>
+                </a:solidFill>
+                <a:latin typeface="Bricolage Grotesque SemiBold" pitchFamily="34" charset="0"/>
+                <a:ea typeface="Bricolage Grotesque SemiBold" pitchFamily="34" charset="-122"/>
+                <a:cs typeface="Bricolage Grotesque SemiBold" pitchFamily="34" charset="-120"/>
+              </a:rPr>
+              <a:t>Конструювання ПЗ</a:t>
+            </a:r>
+            <a:endParaRPr lang="en-US" sz="1550" dirty="0"/>
+          </a:p>
+        </p:txBody>
+      </p:sp>
+      <p:sp>
+        <p:nvSpPr>
+          <p:cNvPr id="13" name="Text 11"/>
+          <p:cNvSpPr/>
+          <p:nvPr/>
+        </p:nvSpPr>
+        <p:spPr>
+          <a:xfrm>
+            <a:off x="6163116" y="2570559"/>
+            <a:ext cx="318881" cy="199330"/>
+          </a:xfrm>
+          <a:prstGeom prst="rect">
+            <a:avLst/>
+          </a:prstGeom>
+          <a:noFill/>
+          <a:ln/>
+        </p:spPr>
+        <p:txBody>
+          <a:bodyPr wrap="none" lIns="0" tIns="0" rIns="0" bIns="0" rtlCol="0" anchor="ctr"/>
+          <a:lstStyle/>
+          <a:p>
+            <a:pPr marL="0" indent="0" algn="l">
+              <a:lnSpc>
+                <a:spcPct val="100000"/>
+              </a:lnSpc>
+              <a:buNone/>
+            </a:pPr>
+            <a:r>
+              <a:rPr lang="en-US" sz="1250" dirty="0">
+                <a:solidFill>
+                  <a:srgbClr val="2C2926"/>
+                </a:solidFill>
+                <a:latin typeface="Bricolage Grotesque Light" pitchFamily="34" charset="0"/>
+                <a:ea typeface="Bricolage Grotesque Light" pitchFamily="34" charset="-122"/>
+                <a:cs typeface="Bricolage Grotesque Light" pitchFamily="34" charset="-120"/>
+              </a:rPr>
+              <a:t>04</a:t>
+            </a:r>
+            <a:endParaRPr lang="en-US" sz="1250" dirty="0"/>
+          </a:p>
+        </p:txBody>
+      </p:sp>
+      <p:sp>
+        <p:nvSpPr>
+          <p:cNvPr id="14" name="Shape 12"/>
+          <p:cNvSpPr/>
+          <p:nvPr/>
+        </p:nvSpPr>
+        <p:spPr>
+          <a:xfrm>
+            <a:off x="6163116" y="2806601"/>
+            <a:ext cx="5367104" cy="19050"/>
+          </a:xfrm>
+          <a:prstGeom prst="rect">
+            <a:avLst/>
+          </a:prstGeom>
+          <a:solidFill>
+            <a:srgbClr val="DA9B49"/>
+          </a:solidFill>
+          <a:ln/>
+        </p:spPr>
+      </p:sp>
+      <p:sp>
+        <p:nvSpPr>
+          <p:cNvPr id="15" name="Text 13"/>
+          <p:cNvSpPr/>
+          <p:nvPr/>
+        </p:nvSpPr>
+        <p:spPr>
+          <a:xfrm>
+            <a:off x="6163116" y="2940248"/>
+            <a:ext cx="5367104" cy="249138"/>
+          </a:xfrm>
+          <a:prstGeom prst="rect">
+            <a:avLst/>
+          </a:prstGeom>
+          <a:noFill/>
+          <a:ln/>
+        </p:spPr>
+        <p:txBody>
+          <a:bodyPr wrap="none" lIns="0" tIns="0" rIns="0" bIns="0" rtlCol="0" anchor="t"/>
+          <a:lstStyle/>
+          <a:p>
+            <a:pPr marL="0" indent="0" algn="l">
+              <a:lnSpc>
+                <a:spcPct val="104000"/>
+              </a:lnSpc>
+              <a:buNone/>
+            </a:pPr>
+            <a:r>
+              <a:rPr lang="en-US" sz="1550" dirty="0">
+                <a:solidFill>
+                  <a:srgbClr val="2C2926"/>
+                </a:solidFill>
+                <a:latin typeface="Bricolage Grotesque SemiBold" pitchFamily="34" charset="0"/>
+                <a:ea typeface="Bricolage Grotesque SemiBold" pitchFamily="34" charset="-122"/>
+                <a:cs typeface="Bricolage Grotesque SemiBold" pitchFamily="34" charset="-120"/>
+              </a:rPr>
+              <a:t>Тестування ПЗ</a:t>
+            </a:r>
+            <a:endParaRPr lang="en-US" sz="1550" dirty="0"/>
+          </a:p>
+        </p:txBody>
+      </p:sp>
+      <p:sp>
+        <p:nvSpPr>
+          <p:cNvPr id="16" name="Text 14"/>
+          <p:cNvSpPr/>
+          <p:nvPr/>
+        </p:nvSpPr>
+        <p:spPr>
+          <a:xfrm>
+            <a:off x="661475" y="3443486"/>
+            <a:ext cx="318881" cy="199330"/>
+          </a:xfrm>
+          <a:prstGeom prst="rect">
+            <a:avLst/>
+          </a:prstGeom>
+          <a:noFill/>
+          <a:ln/>
+        </p:spPr>
+        <p:txBody>
+          <a:bodyPr wrap="none" lIns="0" tIns="0" rIns="0" bIns="0" rtlCol="0" anchor="ctr"/>
+          <a:lstStyle/>
+          <a:p>
+            <a:pPr marL="0" indent="0" algn="l">
+              <a:lnSpc>
+                <a:spcPct val="100000"/>
+              </a:lnSpc>
+              <a:buNone/>
+            </a:pPr>
+            <a:r>
+              <a:rPr lang="en-US" sz="1250" dirty="0">
+                <a:solidFill>
+                  <a:srgbClr val="2C2926"/>
+                </a:solidFill>
+                <a:latin typeface="Bricolage Grotesque Light" pitchFamily="34" charset="0"/>
+                <a:ea typeface="Bricolage Grotesque Light" pitchFamily="34" charset="-122"/>
+                <a:cs typeface="Bricolage Grotesque Light" pitchFamily="34" charset="-120"/>
+              </a:rPr>
+              <a:t>05</a:t>
+            </a:r>
+            <a:endParaRPr lang="en-US" sz="1250" dirty="0"/>
+          </a:p>
+        </p:txBody>
+      </p:sp>
+      <p:sp>
+        <p:nvSpPr>
+          <p:cNvPr id="17" name="Shape 15"/>
+          <p:cNvSpPr/>
+          <p:nvPr/>
+        </p:nvSpPr>
+        <p:spPr>
+          <a:xfrm>
+            <a:off x="661475" y="3663553"/>
+            <a:ext cx="5367104" cy="19050"/>
+          </a:xfrm>
+          <a:prstGeom prst="rect">
+            <a:avLst/>
+          </a:prstGeom>
+          <a:solidFill>
+            <a:srgbClr val="DA9B49"/>
+          </a:solidFill>
+          <a:ln/>
+        </p:spPr>
+      </p:sp>
+      <p:sp>
+        <p:nvSpPr>
+          <p:cNvPr id="18" name="Text 16"/>
+          <p:cNvSpPr/>
+          <p:nvPr/>
+        </p:nvSpPr>
+        <p:spPr>
+          <a:xfrm>
+            <a:off x="661475" y="3813175"/>
+            <a:ext cx="5367104" cy="249138"/>
+          </a:xfrm>
+          <a:prstGeom prst="rect">
+            <a:avLst/>
+          </a:prstGeom>
+          <a:noFill/>
+          <a:ln/>
+        </p:spPr>
+        <p:txBody>
+          <a:bodyPr wrap="none" lIns="0" tIns="0" rIns="0" bIns="0" rtlCol="0" anchor="t"/>
+          <a:lstStyle/>
+          <a:p>
+            <a:pPr marL="0" indent="0" algn="l">
+              <a:lnSpc>
+                <a:spcPct val="104000"/>
+              </a:lnSpc>
+              <a:buNone/>
+            </a:pPr>
+            <a:r>
+              <a:rPr lang="en-US" sz="1550" dirty="0">
+                <a:solidFill>
+                  <a:srgbClr val="2C2926"/>
+                </a:solidFill>
+                <a:latin typeface="Bricolage Grotesque SemiBold" pitchFamily="34" charset="0"/>
+                <a:ea typeface="Bricolage Grotesque SemiBold" pitchFamily="34" charset="-122"/>
+                <a:cs typeface="Bricolage Grotesque SemiBold" pitchFamily="34" charset="-120"/>
+              </a:rPr>
+              <a:t>Супровід ПЗ</a:t>
+            </a:r>
+            <a:endParaRPr lang="en-US" sz="1550" dirty="0"/>
+          </a:p>
+        </p:txBody>
+      </p:sp>
+      <p:sp>
+        <p:nvSpPr>
+          <p:cNvPr id="19" name="Text 17"/>
+          <p:cNvSpPr/>
+          <p:nvPr/>
+        </p:nvSpPr>
+        <p:spPr>
+          <a:xfrm>
+            <a:off x="6163116" y="3443486"/>
+            <a:ext cx="318881" cy="199330"/>
+          </a:xfrm>
+          <a:prstGeom prst="rect">
+            <a:avLst/>
+          </a:prstGeom>
+          <a:noFill/>
+          <a:ln/>
+        </p:spPr>
+        <p:txBody>
+          <a:bodyPr wrap="none" lIns="0" tIns="0" rIns="0" bIns="0" rtlCol="0" anchor="ctr"/>
+          <a:lstStyle/>
+          <a:p>
+            <a:pPr marL="0" indent="0" algn="l">
+              <a:lnSpc>
+                <a:spcPct val="100000"/>
+              </a:lnSpc>
+              <a:buNone/>
+            </a:pPr>
+            <a:r>
+              <a:rPr lang="en-US" sz="1250" dirty="0">
+                <a:solidFill>
+                  <a:srgbClr val="2C2926"/>
+                </a:solidFill>
+                <a:latin typeface="Bricolage Grotesque Light" pitchFamily="34" charset="0"/>
+                <a:ea typeface="Bricolage Grotesque Light" pitchFamily="34" charset="-122"/>
+                <a:cs typeface="Bricolage Grotesque Light" pitchFamily="34" charset="-120"/>
+              </a:rPr>
+              <a:t>06</a:t>
+            </a:r>
+            <a:endParaRPr lang="en-US" sz="1250" dirty="0"/>
+          </a:p>
+        </p:txBody>
+      </p:sp>
+      <p:sp>
+        <p:nvSpPr>
+          <p:cNvPr id="20" name="Shape 18"/>
+          <p:cNvSpPr/>
+          <p:nvPr/>
+        </p:nvSpPr>
+        <p:spPr>
+          <a:xfrm>
+            <a:off x="6163116" y="3663553"/>
+            <a:ext cx="5367104" cy="19050"/>
+          </a:xfrm>
+          <a:prstGeom prst="rect">
+            <a:avLst/>
+          </a:prstGeom>
+          <a:solidFill>
+            <a:srgbClr val="DA9B49"/>
+          </a:solidFill>
+          <a:ln/>
+        </p:spPr>
+      </p:sp>
+      <p:sp>
+        <p:nvSpPr>
+          <p:cNvPr id="21" name="Text 19"/>
+          <p:cNvSpPr/>
+          <p:nvPr/>
+        </p:nvSpPr>
+        <p:spPr>
+          <a:xfrm>
+            <a:off x="6163116" y="3813175"/>
+            <a:ext cx="5367104" cy="249138"/>
+          </a:xfrm>
+          <a:prstGeom prst="rect">
+            <a:avLst/>
+          </a:prstGeom>
+          <a:noFill/>
+          <a:ln/>
+        </p:spPr>
+        <p:txBody>
+          <a:bodyPr wrap="none" lIns="0" tIns="0" rIns="0" bIns="0" rtlCol="0" anchor="t"/>
+          <a:lstStyle/>
+          <a:p>
+            <a:pPr marL="0" indent="0" algn="l">
+              <a:lnSpc>
+                <a:spcPct val="104000"/>
+              </a:lnSpc>
+              <a:buNone/>
+            </a:pPr>
+            <a:r>
+              <a:rPr lang="en-US" sz="1550" dirty="0">
+                <a:solidFill>
+                  <a:srgbClr val="2C2926"/>
+                </a:solidFill>
+                <a:latin typeface="Bricolage Grotesque SemiBold" pitchFamily="34" charset="0"/>
+                <a:ea typeface="Bricolage Grotesque SemiBold" pitchFamily="34" charset="-122"/>
+                <a:cs typeface="Bricolage Grotesque SemiBold" pitchFamily="34" charset="-120"/>
+              </a:rPr>
+              <a:t>Керування конфігурацією ПЗ</a:t>
+            </a:r>
+            <a:endParaRPr lang="en-US" sz="1550" dirty="0"/>
+          </a:p>
+        </p:txBody>
+      </p:sp>
+      <p:sp>
+        <p:nvSpPr>
+          <p:cNvPr id="22" name="Text 20"/>
+          <p:cNvSpPr/>
+          <p:nvPr/>
+        </p:nvSpPr>
+        <p:spPr>
+          <a:xfrm>
+            <a:off x="661475" y="4316413"/>
+            <a:ext cx="318881" cy="199330"/>
+          </a:xfrm>
+          <a:prstGeom prst="rect">
+            <a:avLst/>
+          </a:prstGeom>
+          <a:noFill/>
+          <a:ln/>
+        </p:spPr>
+        <p:txBody>
+          <a:bodyPr wrap="none" lIns="0" tIns="0" rIns="0" bIns="0" rtlCol="0" anchor="ctr"/>
+          <a:lstStyle/>
+          <a:p>
+            <a:pPr marL="0" indent="0" algn="l">
+              <a:lnSpc>
+                <a:spcPct val="100000"/>
+              </a:lnSpc>
+              <a:buNone/>
+            </a:pPr>
+            <a:r>
+              <a:rPr lang="en-US" sz="1250" dirty="0">
+                <a:solidFill>
+                  <a:srgbClr val="2C2926"/>
+                </a:solidFill>
+                <a:latin typeface="Bricolage Grotesque Light" pitchFamily="34" charset="0"/>
+                <a:ea typeface="Bricolage Grotesque Light" pitchFamily="34" charset="-122"/>
+                <a:cs typeface="Bricolage Grotesque Light" pitchFamily="34" charset="-120"/>
+              </a:rPr>
+              <a:t>07</a:t>
+            </a:r>
+            <a:endParaRPr lang="en-US" sz="1250" dirty="0"/>
+          </a:p>
+        </p:txBody>
+      </p:sp>
+      <p:sp>
+        <p:nvSpPr>
+          <p:cNvPr id="23" name="Shape 21"/>
+          <p:cNvSpPr/>
+          <p:nvPr/>
+        </p:nvSpPr>
+        <p:spPr>
+          <a:xfrm>
+            <a:off x="661475" y="4520605"/>
+            <a:ext cx="5367104" cy="19050"/>
+          </a:xfrm>
+          <a:prstGeom prst="rect">
+            <a:avLst/>
+          </a:prstGeom>
+          <a:solidFill>
+            <a:srgbClr val="DA9B49"/>
+          </a:solidFill>
+          <a:ln/>
+        </p:spPr>
+      </p:sp>
+      <p:sp>
+        <p:nvSpPr>
+          <p:cNvPr id="24" name="Text 22"/>
+          <p:cNvSpPr/>
+          <p:nvPr/>
+        </p:nvSpPr>
+        <p:spPr>
+          <a:xfrm>
+            <a:off x="661475" y="4686102"/>
+            <a:ext cx="5367104" cy="249138"/>
+          </a:xfrm>
+          <a:prstGeom prst="rect">
+            <a:avLst/>
+          </a:prstGeom>
+          <a:noFill/>
+          <a:ln/>
+        </p:spPr>
+        <p:txBody>
+          <a:bodyPr wrap="none" lIns="0" tIns="0" rIns="0" bIns="0" rtlCol="0" anchor="t"/>
+          <a:lstStyle/>
+          <a:p>
+            <a:pPr marL="0" indent="0" algn="l">
+              <a:lnSpc>
+                <a:spcPct val="104000"/>
+              </a:lnSpc>
+              <a:buNone/>
+            </a:pPr>
+            <a:r>
+              <a:rPr lang="en-US" sz="1550" dirty="0">
+                <a:solidFill>
+                  <a:srgbClr val="2C2926"/>
+                </a:solidFill>
+                <a:latin typeface="Bricolage Grotesque SemiBold" pitchFamily="34" charset="0"/>
+                <a:ea typeface="Bricolage Grotesque SemiBold" pitchFamily="34" charset="-122"/>
+                <a:cs typeface="Bricolage Grotesque SemiBold" pitchFamily="34" charset="-120"/>
+              </a:rPr>
+              <a:t>Керування інженерією ПЗ</a:t>
+            </a:r>
+            <a:endParaRPr lang="en-US" sz="1550" dirty="0"/>
+          </a:p>
+        </p:txBody>
+      </p:sp>
+      <p:sp>
+        <p:nvSpPr>
+          <p:cNvPr id="25" name="Text 23"/>
+          <p:cNvSpPr/>
+          <p:nvPr/>
+        </p:nvSpPr>
+        <p:spPr>
+          <a:xfrm>
+            <a:off x="6163116" y="4316413"/>
+            <a:ext cx="318881" cy="199330"/>
+          </a:xfrm>
+          <a:prstGeom prst="rect">
+            <a:avLst/>
+          </a:prstGeom>
+          <a:noFill/>
+          <a:ln/>
+        </p:spPr>
+        <p:txBody>
+          <a:bodyPr wrap="none" lIns="0" tIns="0" rIns="0" bIns="0" rtlCol="0" anchor="ctr"/>
+          <a:lstStyle/>
+          <a:p>
+            <a:pPr marL="0" indent="0" algn="l">
+              <a:lnSpc>
+                <a:spcPct val="100000"/>
+              </a:lnSpc>
+              <a:buNone/>
+            </a:pPr>
+            <a:r>
+              <a:rPr lang="en-US" sz="1250" dirty="0">
+                <a:solidFill>
+                  <a:srgbClr val="2C2926"/>
+                </a:solidFill>
+                <a:latin typeface="Bricolage Grotesque Light" pitchFamily="34" charset="0"/>
+                <a:ea typeface="Bricolage Grotesque Light" pitchFamily="34" charset="-122"/>
+                <a:cs typeface="Bricolage Grotesque Light" pitchFamily="34" charset="-120"/>
+              </a:rPr>
+              <a:t>08</a:t>
+            </a:r>
+            <a:endParaRPr lang="en-US" sz="1250" dirty="0"/>
+          </a:p>
+        </p:txBody>
+      </p:sp>
+      <p:sp>
+        <p:nvSpPr>
+          <p:cNvPr id="26" name="Shape 24"/>
+          <p:cNvSpPr/>
+          <p:nvPr/>
+        </p:nvSpPr>
+        <p:spPr>
+          <a:xfrm>
+            <a:off x="6163116" y="4520605"/>
+            <a:ext cx="5367104" cy="19050"/>
+          </a:xfrm>
+          <a:prstGeom prst="rect">
+            <a:avLst/>
+          </a:prstGeom>
+          <a:solidFill>
+            <a:srgbClr val="DA9B49"/>
+          </a:solidFill>
+          <a:ln/>
+        </p:spPr>
+      </p:sp>
+      <p:sp>
+        <p:nvSpPr>
+          <p:cNvPr id="27" name="Text 25"/>
+          <p:cNvSpPr/>
+          <p:nvPr/>
+        </p:nvSpPr>
+        <p:spPr>
+          <a:xfrm>
+            <a:off x="6163116" y="4686102"/>
+            <a:ext cx="5367104" cy="249138"/>
+          </a:xfrm>
+          <a:prstGeom prst="rect">
+            <a:avLst/>
+          </a:prstGeom>
+          <a:noFill/>
+          <a:ln/>
+        </p:spPr>
+        <p:txBody>
+          <a:bodyPr wrap="none" lIns="0" tIns="0" rIns="0" bIns="0" rtlCol="0" anchor="t"/>
+          <a:lstStyle/>
+          <a:p>
+            <a:pPr marL="0" indent="0" algn="l">
+              <a:lnSpc>
+                <a:spcPct val="104000"/>
+              </a:lnSpc>
+              <a:buNone/>
+            </a:pPr>
+            <a:r>
+              <a:rPr lang="en-US" sz="1550" dirty="0">
+                <a:solidFill>
+                  <a:srgbClr val="2C2926"/>
+                </a:solidFill>
+                <a:latin typeface="Bricolage Grotesque SemiBold" pitchFamily="34" charset="0"/>
+                <a:ea typeface="Bricolage Grotesque SemiBold" pitchFamily="34" charset="-122"/>
+                <a:cs typeface="Bricolage Grotesque SemiBold" pitchFamily="34" charset="-120"/>
+              </a:rPr>
+              <a:t>Процес інженерії ПЗ</a:t>
+            </a:r>
+            <a:endParaRPr lang="en-US" sz="1550" dirty="0"/>
+          </a:p>
+        </p:txBody>
+      </p:sp>
+      <p:sp>
+        <p:nvSpPr>
+          <p:cNvPr id="28" name="Text 26"/>
+          <p:cNvSpPr/>
+          <p:nvPr/>
+        </p:nvSpPr>
+        <p:spPr>
+          <a:xfrm>
+            <a:off x="661475" y="5189339"/>
+            <a:ext cx="318881" cy="199330"/>
+          </a:xfrm>
+          <a:prstGeom prst="rect">
+            <a:avLst/>
+          </a:prstGeom>
+          <a:noFill/>
+          <a:ln/>
+        </p:spPr>
+        <p:txBody>
+          <a:bodyPr wrap="none" lIns="0" tIns="0" rIns="0" bIns="0" rtlCol="0" anchor="ctr"/>
+          <a:lstStyle/>
+          <a:p>
+            <a:pPr marL="0" indent="0" algn="l">
+              <a:lnSpc>
+                <a:spcPct val="100000"/>
+              </a:lnSpc>
+              <a:buNone/>
+            </a:pPr>
+            <a:r>
+              <a:rPr lang="en-US" sz="1250" dirty="0">
+                <a:solidFill>
+                  <a:srgbClr val="2C2926"/>
+                </a:solidFill>
+                <a:latin typeface="Bricolage Grotesque Light" pitchFamily="34" charset="0"/>
+                <a:ea typeface="Bricolage Grotesque Light" pitchFamily="34" charset="-122"/>
+                <a:cs typeface="Bricolage Grotesque Light" pitchFamily="34" charset="-120"/>
+              </a:rPr>
+              <a:t>09</a:t>
+            </a:r>
+            <a:endParaRPr lang="en-US" sz="1250" dirty="0"/>
+          </a:p>
+        </p:txBody>
+      </p:sp>
+      <p:sp>
+        <p:nvSpPr>
+          <p:cNvPr id="29" name="Shape 27"/>
+          <p:cNvSpPr/>
+          <p:nvPr/>
+        </p:nvSpPr>
+        <p:spPr>
+          <a:xfrm>
+            <a:off x="661475" y="5377557"/>
+            <a:ext cx="5367104" cy="19050"/>
+          </a:xfrm>
+          <a:prstGeom prst="rect">
+            <a:avLst/>
+          </a:prstGeom>
+          <a:solidFill>
+            <a:srgbClr val="DA9B49"/>
+          </a:solidFill>
+          <a:ln/>
+        </p:spPr>
+      </p:sp>
+      <p:sp>
+        <p:nvSpPr>
+          <p:cNvPr id="30" name="Text 28"/>
+          <p:cNvSpPr/>
+          <p:nvPr/>
+        </p:nvSpPr>
+        <p:spPr>
+          <a:xfrm>
+            <a:off x="661475" y="5559028"/>
+            <a:ext cx="5367104" cy="249138"/>
+          </a:xfrm>
+          <a:prstGeom prst="rect">
+            <a:avLst/>
+          </a:prstGeom>
+          <a:noFill/>
+          <a:ln/>
+        </p:spPr>
+        <p:txBody>
+          <a:bodyPr wrap="none" lIns="0" tIns="0" rIns="0" bIns="0" rtlCol="0" anchor="t"/>
+          <a:lstStyle/>
+          <a:p>
+            <a:pPr marL="0" indent="0" algn="l">
+              <a:lnSpc>
+                <a:spcPct val="104000"/>
+              </a:lnSpc>
+              <a:buNone/>
+            </a:pPr>
+            <a:r>
+              <a:rPr lang="en-US" sz="1550" dirty="0">
+                <a:solidFill>
+                  <a:srgbClr val="2C2926"/>
+                </a:solidFill>
+                <a:latin typeface="Bricolage Grotesque SemiBold" pitchFamily="34" charset="0"/>
+                <a:ea typeface="Bricolage Grotesque SemiBold" pitchFamily="34" charset="-122"/>
+                <a:cs typeface="Bricolage Grotesque SemiBold" pitchFamily="34" charset="-120"/>
+              </a:rPr>
+              <a:t>Інструменти та методи ПІ</a:t>
+            </a:r>
+            <a:endParaRPr lang="en-US" sz="1550" dirty="0"/>
+          </a:p>
+        </p:txBody>
+      </p:sp>
+      <p:sp>
+        <p:nvSpPr>
+          <p:cNvPr id="31" name="Text 29"/>
+          <p:cNvSpPr/>
+          <p:nvPr/>
+        </p:nvSpPr>
+        <p:spPr>
+          <a:xfrm>
+            <a:off x="6163116" y="5189339"/>
+            <a:ext cx="318881" cy="199330"/>
+          </a:xfrm>
+          <a:prstGeom prst="rect">
+            <a:avLst/>
+          </a:prstGeom>
+          <a:noFill/>
+          <a:ln/>
+        </p:spPr>
+        <p:txBody>
+          <a:bodyPr wrap="none" lIns="0" tIns="0" rIns="0" bIns="0" rtlCol="0" anchor="ctr"/>
+          <a:lstStyle/>
+          <a:p>
+            <a:pPr marL="0" indent="0" algn="l">
+              <a:lnSpc>
+                <a:spcPct val="100000"/>
+              </a:lnSpc>
+              <a:buNone/>
+            </a:pPr>
+            <a:r>
+              <a:rPr lang="en-US" sz="1250" dirty="0">
+                <a:solidFill>
+                  <a:srgbClr val="2C2926"/>
+                </a:solidFill>
+                <a:latin typeface="Bricolage Grotesque Light" pitchFamily="34" charset="0"/>
+                <a:ea typeface="Bricolage Grotesque Light" pitchFamily="34" charset="-122"/>
+                <a:cs typeface="Bricolage Grotesque Light" pitchFamily="34" charset="-120"/>
+              </a:rPr>
+              <a:t>10</a:t>
+            </a:r>
+            <a:endParaRPr lang="en-US" sz="1250" dirty="0"/>
+          </a:p>
+        </p:txBody>
+      </p:sp>
+      <p:sp>
+        <p:nvSpPr>
+          <p:cNvPr id="32" name="Shape 30"/>
+          <p:cNvSpPr/>
+          <p:nvPr/>
+        </p:nvSpPr>
+        <p:spPr>
+          <a:xfrm>
+            <a:off x="6163116" y="5377557"/>
+            <a:ext cx="5367104" cy="19050"/>
+          </a:xfrm>
+          <a:prstGeom prst="rect">
+            <a:avLst/>
+          </a:prstGeom>
+          <a:solidFill>
+            <a:srgbClr val="DA9B49"/>
+          </a:solidFill>
+          <a:ln/>
+        </p:spPr>
+      </p:sp>
+      <p:sp>
+        <p:nvSpPr>
+          <p:cNvPr id="33" name="Text 31"/>
+          <p:cNvSpPr/>
+          <p:nvPr/>
+        </p:nvSpPr>
+        <p:spPr>
+          <a:xfrm>
+            <a:off x="6163116" y="5559028"/>
+            <a:ext cx="5367104" cy="249138"/>
+          </a:xfrm>
+          <a:prstGeom prst="rect">
+            <a:avLst/>
+          </a:prstGeom>
+          <a:noFill/>
+          <a:ln/>
+        </p:spPr>
+        <p:txBody>
+          <a:bodyPr wrap="none" lIns="0" tIns="0" rIns="0" bIns="0" rtlCol="0" anchor="t"/>
+          <a:lstStyle/>
+          <a:p>
+            <a:pPr marL="0" indent="0" algn="l">
+              <a:lnSpc>
+                <a:spcPct val="104000"/>
+              </a:lnSpc>
+              <a:buNone/>
+            </a:pPr>
+            <a:r>
+              <a:rPr lang="en-US" sz="1550" dirty="0">
+                <a:solidFill>
+                  <a:srgbClr val="2C2926"/>
+                </a:solidFill>
+                <a:latin typeface="Bricolage Grotesque SemiBold" pitchFamily="34" charset="0"/>
+                <a:ea typeface="Bricolage Grotesque SemiBold" pitchFamily="34" charset="-122"/>
+                <a:cs typeface="Bricolage Grotesque SemiBold" pitchFamily="34" charset="-120"/>
+              </a:rPr>
+              <a:t>Якість ПЗ</a:t>
+            </a:r>
+            <a:endParaRPr lang="en-US" sz="1550" dirty="0"/>
+          </a:p>
+        </p:txBody>
+      </p:sp>
+      <p:sp>
+        <p:nvSpPr>
+          <p:cNvPr id="34" name="Text 32"/>
+          <p:cNvSpPr/>
+          <p:nvPr/>
+        </p:nvSpPr>
+        <p:spPr>
+          <a:xfrm>
+            <a:off x="661475" y="6079034"/>
+            <a:ext cx="11478330" cy="235148"/>
+          </a:xfrm>
+          <a:prstGeom prst="rect">
+            <a:avLst/>
+          </a:prstGeom>
+          <a:noFill/>
+          <a:ln/>
+        </p:spPr>
+        <p:txBody>
+          <a:bodyPr wrap="none" lIns="0" tIns="0" rIns="0" bIns="0" rtlCol="0" anchor="t"/>
+          <a:lstStyle/>
+          <a:p>
+            <a:pPr marL="0" indent="0" algn="l">
+              <a:lnSpc>
+                <a:spcPct val="123000"/>
+              </a:lnSpc>
+              <a:buNone/>
+            </a:pPr>
+            <a:r>
+              <a:rPr lang="en-US" sz="1250" dirty="0">
+                <a:solidFill>
+                  <a:srgbClr val="2C2926"/>
+                </a:solidFill>
+                <a:latin typeface="Inter" pitchFamily="34" charset="0"/>
+                <a:ea typeface="Inter" pitchFamily="34" charset="-122"/>
+                <a:cs typeface="Inter" pitchFamily="34" charset="-120"/>
+              </a:rPr>
+              <a:t>Золоте правило Джексона: </a:t>
+            </a:r>
+            <a:r>
+              <a:rPr lang="en-US" sz="1250" i="1" dirty="0">
+                <a:solidFill>
+                  <a:srgbClr val="2C2926"/>
+                </a:solidFill>
+                <a:latin typeface="Inter" pitchFamily="34" charset="0"/>
+                <a:ea typeface="Inter" pitchFamily="34" charset="-122"/>
+                <a:cs typeface="Inter" pitchFamily="34" charset="-120"/>
+              </a:rPr>
+              <a:t>«Будь-яка щойно завершена програмна система одразу потребує змін»</a:t>
+            </a:r>
+            <a:r>
+              <a:rPr lang="en-US" sz="1250" dirty="0">
+                <a:solidFill>
+                  <a:srgbClr val="2C2926"/>
+                </a:solidFill>
+                <a:latin typeface="Inter" pitchFamily="34" charset="0"/>
+                <a:ea typeface="Inter" pitchFamily="34" charset="-122"/>
+                <a:cs typeface="Inter" pitchFamily="34" charset="-120"/>
+              </a:rPr>
+              <a:t>.</a:t>
+            </a:r>
+            <a:endParaRPr lang="en-US" sz="1250" dirty="0"/>
+          </a:p>
+        </p:txBody>
+      </p:sp>
+    </p:spTree>
+  </p:cSld>
+  <p:clrMapOvr>
+    <a:masterClrMapping/>
+  </p:clrMapOvr>
+</p:sld>
+</file>
+
+<file path=ppt/slides/slide12.xml><?xml version="1.0" encoding="utf-8"?>
 <p:sld xmlns:a="http://schemas.openxmlformats.org/drawingml/2006/main" xmlns:r="http://schemas.openxmlformats.org/officeDocument/2006/relationships" xmlns:p="http://schemas.openxmlformats.org/presentationml/2006/main">
   <p:cSld name="Slide 10">
     <p:spTree>
@@ -2143,7 +3662,7 @@
           <a:bodyPr wrap="none" lIns="0" tIns="0" rIns="0" bIns="0" rtlCol="0" anchor="t"/>
           <a:lstStyle/>
           <a:p>
-            <a:pPr algn="l" indent="0" marL="0">
+            <a:pPr marL="0" indent="0" algn="l">
               <a:lnSpc>
                 <a:spcPct val="104000"/>
               </a:lnSpc>
@@ -2185,7 +3704,7 @@
           <a:bodyPr wrap="none" lIns="0" tIns="0" rIns="0" bIns="0" rtlCol="0" anchor="t"/>
           <a:lstStyle/>
           <a:p>
-            <a:pPr algn="l" indent="0" marL="0">
+            <a:pPr marL="0" indent="0" algn="l">
               <a:lnSpc>
                 <a:spcPct val="104000"/>
               </a:lnSpc>
@@ -2229,7 +3748,7 @@
           </a:bodyPr>
           <a:lstStyle/>
           <a:p>
-            <a:pPr algn="l" indent="0" marL="0">
+            <a:pPr marL="0" indent="0" algn="l">
               <a:lnSpc>
                 <a:spcPct val="108000"/>
               </a:lnSpc>
@@ -2271,7 +3790,7 @@
           <a:bodyPr wrap="none" lIns="0" tIns="0" rIns="0" bIns="0" rtlCol="0" anchor="t"/>
           <a:lstStyle/>
           <a:p>
-            <a:pPr algn="l" indent="0" marL="0">
+            <a:pPr marL="0" indent="0" algn="l">
               <a:lnSpc>
                 <a:spcPct val="104000"/>
               </a:lnSpc>
@@ -2315,13 +3834,13 @@
           </a:bodyPr>
           <a:lstStyle/>
           <a:p>
-            <a:pPr algn="l" marL="182880" indent="-182880">
+            <a:pPr marL="182880" indent="-182880" algn="l">
               <a:lnSpc>
                 <a:spcPct val="108000"/>
               </a:lnSpc>
               <a:buSzPct val="100000"/>
               <a:buFont typeface="+mj-lt"/>
-              <a:buAutoNum type="arabicPeriod" startAt="1"/>
+              <a:buAutoNum type="arabicPeriod"/>
             </a:pPr>
             <a:r>
               <a:rPr lang="en-US" sz="900" dirty="0">
@@ -2337,7 +3856,7 @@
             <a:endParaRPr lang="en-US" sz="900" dirty="0"/>
           </a:p>
           <a:p>
-            <a:pPr algn="l" marL="182880" indent="-182880">
+            <a:pPr marL="182880" indent="-182880" algn="l">
               <a:lnSpc>
                 <a:spcPct val="108000"/>
               </a:lnSpc>
@@ -2359,7 +3878,7 @@
             <a:endParaRPr lang="en-US" sz="900" dirty="0"/>
           </a:p>
           <a:p>
-            <a:pPr algn="l" marL="182880" indent="-182880">
+            <a:pPr marL="182880" indent="-182880" algn="l">
               <a:lnSpc>
                 <a:spcPct val="108000"/>
               </a:lnSpc>
@@ -2381,7 +3900,7 @@
             <a:endParaRPr lang="en-US" sz="900" dirty="0"/>
           </a:p>
           <a:p>
-            <a:pPr algn="l" marL="182880" indent="-182880">
+            <a:pPr marL="182880" indent="-182880" algn="l">
               <a:lnSpc>
                 <a:spcPct val="108000"/>
               </a:lnSpc>
@@ -2403,7 +3922,7 @@
             <a:endParaRPr lang="en-US" sz="900" dirty="0"/>
           </a:p>
           <a:p>
-            <a:pPr algn="l" marL="182880" indent="-182880">
+            <a:pPr marL="182880" indent="-182880" algn="l">
               <a:lnSpc>
                 <a:spcPct val="108000"/>
               </a:lnSpc>
@@ -2425,7 +3944,7 @@
             <a:endParaRPr lang="en-US" sz="900" dirty="0"/>
           </a:p>
           <a:p>
-            <a:pPr algn="l" marL="182880" indent="-182880">
+            <a:pPr marL="182880" indent="-182880" algn="l">
               <a:lnSpc>
                 <a:spcPct val="108000"/>
               </a:lnSpc>
@@ -2477,17 +3996,17 @@
       </p:sp>
       <p:pic>
         <p:nvPicPr>
-          <p:cNvPr id="8" name="Image 0" descr="preencoded.png">    </p:cNvPr>
+          <p:cNvPr id="8" name="Image 0" descr="preencoded.png"/>
           <p:cNvPicPr>
             <a:picLocks noChangeAspect="1"/>
           </p:cNvPicPr>
           <p:nvPr/>
         </p:nvPicPr>
         <p:blipFill>
-          <a:blip r:embed="rId1">
+          <a:blip r:embed="rId3">
             <a:extLst>
               <a:ext uri="{96DAC541-7B7A-43D3-8B79-37D633B846F1}">
-                <asvg:svgBlip xmlns:asvg="http://schemas.microsoft.com/office/drawing/2016/SVG/main" r:embed="rId2"/>
+                <asvg:svgBlip xmlns:asvg="http://schemas.microsoft.com/office/drawing/2016/SVG/main" xmlns="" r:embed="rId4"/>
               </a:ext>
             </a:extLst>
           </a:blip>
@@ -2526,7 +4045,7 @@
           <a:bodyPr wrap="none" lIns="0" tIns="0" rIns="0" bIns="0" rtlCol="0" anchor="t"/>
           <a:lstStyle/>
           <a:p>
-            <a:pPr algn="l" indent="0" marL="0">
+            <a:pPr marL="0" indent="0" algn="l">
               <a:lnSpc>
                 <a:spcPct val="104000"/>
               </a:lnSpc>
@@ -2576,17 +4095,17 @@
       </p:sp>
       <p:pic>
         <p:nvPicPr>
-          <p:cNvPr id="11" name="Image 1" descr="preencoded.png">    </p:cNvPr>
+          <p:cNvPr id="11" name="Image 1" descr="preencoded.png"/>
           <p:cNvPicPr>
             <a:picLocks noChangeAspect="1"/>
           </p:cNvPicPr>
           <p:nvPr/>
         </p:nvPicPr>
         <p:blipFill>
-          <a:blip r:embed="rId3">
+          <a:blip r:embed="rId5">
             <a:extLst>
               <a:ext uri="{96DAC541-7B7A-43D3-8B79-37D633B846F1}">
-                <asvg:svgBlip xmlns:asvg="http://schemas.microsoft.com/office/drawing/2016/SVG/main" r:embed="rId4"/>
+                <asvg:svgBlip xmlns:asvg="http://schemas.microsoft.com/office/drawing/2016/SVG/main" xmlns="" r:embed="rId6"/>
               </a:ext>
             </a:extLst>
           </a:blip>
@@ -2625,7 +4144,7 @@
           <a:bodyPr wrap="none" lIns="0" tIns="0" rIns="0" bIns="0" rtlCol="0" anchor="t"/>
           <a:lstStyle/>
           <a:p>
-            <a:pPr algn="l" indent="0" marL="0">
+            <a:pPr marL="0" indent="0" algn="l">
               <a:lnSpc>
                 <a:spcPct val="104000"/>
               </a:lnSpc>
@@ -2675,17 +4194,17 @@
       </p:sp>
       <p:pic>
         <p:nvPicPr>
-          <p:cNvPr id="14" name="Image 2" descr="preencoded.png">    </p:cNvPr>
+          <p:cNvPr id="14" name="Image 2" descr="preencoded.png"/>
           <p:cNvPicPr>
             <a:picLocks noChangeAspect="1"/>
           </p:cNvPicPr>
           <p:nvPr/>
         </p:nvPicPr>
         <p:blipFill>
-          <a:blip r:embed="rId5">
+          <a:blip r:embed="rId7">
             <a:extLst>
               <a:ext uri="{96DAC541-7B7A-43D3-8B79-37D633B846F1}">
-                <asvg:svgBlip xmlns:asvg="http://schemas.microsoft.com/office/drawing/2016/SVG/main" r:embed="rId6"/>
+                <asvg:svgBlip xmlns:asvg="http://schemas.microsoft.com/office/drawing/2016/SVG/main" xmlns="" r:embed="rId8"/>
               </a:ext>
             </a:extLst>
           </a:blip>
@@ -2724,7 +4243,7 @@
           <a:bodyPr wrap="none" lIns="0" tIns="0" rIns="0" bIns="0" rtlCol="0" anchor="t"/>
           <a:lstStyle/>
           <a:p>
-            <a:pPr algn="l" indent="0" marL="0">
+            <a:pPr marL="0" indent="0" algn="l">
               <a:lnSpc>
                 <a:spcPct val="104000"/>
               </a:lnSpc>
@@ -2774,17 +4293,17 @@
       </p:sp>
       <p:pic>
         <p:nvPicPr>
-          <p:cNvPr id="17" name="Image 3" descr="preencoded.png">    </p:cNvPr>
+          <p:cNvPr id="17" name="Image 3" descr="preencoded.png"/>
           <p:cNvPicPr>
             <a:picLocks noChangeAspect="1"/>
           </p:cNvPicPr>
           <p:nvPr/>
         </p:nvPicPr>
         <p:blipFill>
-          <a:blip r:embed="rId7">
+          <a:blip r:embed="rId9">
             <a:extLst>
               <a:ext uri="{96DAC541-7B7A-43D3-8B79-37D633B846F1}">
-                <asvg:svgBlip xmlns:asvg="http://schemas.microsoft.com/office/drawing/2016/SVG/main" r:embed="rId8"/>
+                <asvg:svgBlip xmlns:asvg="http://schemas.microsoft.com/office/drawing/2016/SVG/main" xmlns="" r:embed="rId10"/>
               </a:ext>
             </a:extLst>
           </a:blip>
@@ -2823,7 +4342,7 @@
           <a:bodyPr wrap="none" lIns="0" tIns="0" rIns="0" bIns="0" rtlCol="0" anchor="t"/>
           <a:lstStyle/>
           <a:p>
-            <a:pPr algn="l" indent="0" marL="0">
+            <a:pPr marL="0" indent="0" algn="l">
               <a:lnSpc>
                 <a:spcPct val="104000"/>
               </a:lnSpc>
@@ -2873,17 +4392,17 @@
       </p:sp>
       <p:pic>
         <p:nvPicPr>
-          <p:cNvPr id="20" name="Image 4" descr="preencoded.png">    </p:cNvPr>
+          <p:cNvPr id="20" name="Image 4" descr="preencoded.png"/>
           <p:cNvPicPr>
             <a:picLocks noChangeAspect="1"/>
           </p:cNvPicPr>
           <p:nvPr/>
         </p:nvPicPr>
         <p:blipFill>
-          <a:blip r:embed="rId9">
+          <a:blip r:embed="rId11">
             <a:extLst>
               <a:ext uri="{96DAC541-7B7A-43D3-8B79-37D633B846F1}">
-                <asvg:svgBlip xmlns:asvg="http://schemas.microsoft.com/office/drawing/2016/SVG/main" r:embed="rId10"/>
+                <asvg:svgBlip xmlns:asvg="http://schemas.microsoft.com/office/drawing/2016/SVG/main" xmlns="" r:embed="rId12"/>
               </a:ext>
             </a:extLst>
           </a:blip>
@@ -2922,7 +4441,7 @@
           <a:bodyPr wrap="none" lIns="0" tIns="0" rIns="0" bIns="0" rtlCol="0" anchor="t"/>
           <a:lstStyle/>
           <a:p>
-            <a:pPr algn="l" indent="0" marL="0">
+            <a:pPr marL="0" indent="0" algn="l">
               <a:lnSpc>
                 <a:spcPct val="104000"/>
               </a:lnSpc>
@@ -2989,7 +4508,7 @@
           <a:bodyPr wrap="none" lIns="0" tIns="0" rIns="0" bIns="0" rtlCol="0" anchor="t"/>
           <a:lstStyle/>
           <a:p>
-            <a:pPr algn="l" indent="0" marL="0">
+            <a:pPr marL="0" indent="0" algn="l">
               <a:lnSpc>
                 <a:spcPct val="104000"/>
               </a:lnSpc>
@@ -3012,14 +4531,14 @@
       </p:sp>
       <p:pic>
         <p:nvPicPr>
-          <p:cNvPr id="3" name="Image 0" descr="preencoded.png">    </p:cNvPr>
+          <p:cNvPr id="3" name="Image 0" descr="preencoded.png"/>
           <p:cNvPicPr>
             <a:picLocks noChangeAspect="1"/>
           </p:cNvPicPr>
           <p:nvPr/>
         </p:nvPicPr>
         <p:blipFill>
-          <a:blip r:embed="rId1"/>
+          <a:blip r:embed="rId3"/>
           <a:stretch>
             <a:fillRect/>
           </a:stretch>
@@ -3057,7 +4576,7 @@
           </a:bodyPr>
           <a:lstStyle/>
           <a:p>
-            <a:pPr algn="l" indent="0" marL="0">
+            <a:pPr marL="0" indent="0" algn="l">
               <a:lnSpc>
                 <a:spcPct val="131000"/>
               </a:lnSpc>
@@ -3123,7 +4642,7 @@
           </a:bodyPr>
           <a:lstStyle/>
           <a:p>
-            <a:pPr algn="l" indent="0" marL="0">
+            <a:pPr marL="0" indent="0" algn="l">
               <a:lnSpc>
                 <a:spcPct val="131000"/>
               </a:lnSpc>
@@ -3140,12 +4659,6 @@
               </a:rPr>
               <a:t>Інженерна галузь ґрунтується на принципах: </a:t>
             </a:r>
-            <a:pPr algn="l" indent="0" marL="0">
-              <a:lnSpc>
-                <a:spcPct val="131000"/>
-              </a:lnSpc>
-              <a:buNone/>
-            </a:pPr>
             <a:r>
               <a:rPr lang="en-US" sz="1400" b="1" dirty="0">
                 <a:solidFill>
@@ -3157,12 +4670,6 @@
               </a:rPr>
               <a:t>ефективність</a:t>
             </a:r>
-            <a:pPr algn="l" indent="0" marL="0">
-              <a:lnSpc>
-                <a:spcPct val="131000"/>
-              </a:lnSpc>
-              <a:buNone/>
-            </a:pPr>
             <a:r>
               <a:rPr lang="en-US" sz="1400" dirty="0">
                 <a:solidFill>
@@ -3174,12 +4681,6 @@
               </a:rPr>
               <a:t>, </a:t>
             </a:r>
-            <a:pPr algn="l" indent="0" marL="0">
-              <a:lnSpc>
-                <a:spcPct val="131000"/>
-              </a:lnSpc>
-              <a:buNone/>
-            </a:pPr>
             <a:r>
               <a:rPr lang="en-US" sz="1400" b="1" dirty="0">
                 <a:solidFill>
@@ -3191,12 +4692,6 @@
               </a:rPr>
               <a:t>практичність</a:t>
             </a:r>
-            <a:pPr algn="l" indent="0" marL="0">
-              <a:lnSpc>
-                <a:spcPct val="131000"/>
-              </a:lnSpc>
-              <a:buNone/>
-            </a:pPr>
             <a:r>
               <a:rPr lang="en-US" sz="1400" dirty="0">
                 <a:solidFill>
@@ -3208,12 +4703,6 @@
               </a:rPr>
               <a:t>, </a:t>
             </a:r>
-            <a:pPr algn="l" indent="0" marL="0">
-              <a:lnSpc>
-                <a:spcPct val="131000"/>
-              </a:lnSpc>
-              <a:buNone/>
-            </a:pPr>
             <a:r>
               <a:rPr lang="en-US" sz="1400" b="1" dirty="0">
                 <a:solidFill>
@@ -3225,12 +4714,6 @@
               </a:rPr>
               <a:t>фундаментальність</a:t>
             </a:r>
-            <a:pPr algn="l" indent="0" marL="0">
-              <a:lnSpc>
-                <a:spcPct val="131000"/>
-              </a:lnSpc>
-              <a:buNone/>
-            </a:pPr>
             <a:r>
               <a:rPr lang="en-US" sz="1400" dirty="0">
                 <a:solidFill>
@@ -3242,12 +4725,6 @@
               </a:rPr>
               <a:t>, </a:t>
             </a:r>
-            <a:pPr algn="l" indent="0" marL="0">
-              <a:lnSpc>
-                <a:spcPct val="131000"/>
-              </a:lnSpc>
-              <a:buNone/>
-            </a:pPr>
             <a:r>
               <a:rPr lang="en-US" sz="1400" b="1" dirty="0">
                 <a:solidFill>
@@ -3259,12 +4736,6 @@
               </a:rPr>
               <a:t>успадкованість</a:t>
             </a:r>
-            <a:pPr algn="l" indent="0" marL="0">
-              <a:lnSpc>
-                <a:spcPct val="131000"/>
-              </a:lnSpc>
-              <a:buNone/>
-            </a:pPr>
             <a:r>
               <a:rPr lang="en-US" sz="1400" dirty="0">
                 <a:solidFill>
@@ -3276,12 +4747,6 @@
               </a:rPr>
               <a:t>, </a:t>
             </a:r>
-            <a:pPr algn="l" indent="0" marL="0">
-              <a:lnSpc>
-                <a:spcPct val="131000"/>
-              </a:lnSpc>
-              <a:buNone/>
-            </a:pPr>
             <a:r>
               <a:rPr lang="en-US" sz="1400" b="1" dirty="0">
                 <a:solidFill>
@@ -3293,12 +4758,6 @@
               </a:rPr>
               <a:t>відчутність</a:t>
             </a:r>
-            <a:pPr algn="l" indent="0" marL="0">
-              <a:lnSpc>
-                <a:spcPct val="131000"/>
-              </a:lnSpc>
-              <a:buNone/>
-            </a:pPr>
             <a:r>
               <a:rPr lang="en-US" sz="1400" dirty="0">
                 <a:solidFill>
@@ -3310,12 +4769,6 @@
               </a:rPr>
               <a:t> та </a:t>
             </a:r>
-            <a:pPr algn="l" indent="0" marL="0">
-              <a:lnSpc>
-                <a:spcPct val="131000"/>
-              </a:lnSpc>
-              <a:buNone/>
-            </a:pPr>
             <a:r>
               <a:rPr lang="en-US" sz="1400" b="1" dirty="0">
                 <a:solidFill>
@@ -3327,12 +4780,6 @@
               </a:rPr>
               <a:t>супроводження</a:t>
             </a:r>
-            <a:pPr algn="l" indent="0" marL="0">
-              <a:lnSpc>
-                <a:spcPct val="131000"/>
-              </a:lnSpc>
-              <a:buNone/>
-            </a:pPr>
             <a:r>
               <a:rPr lang="en-US" sz="1400" dirty="0">
                 <a:solidFill>
@@ -3375,14 +4822,14 @@
       </p:grpSpPr>
       <p:pic>
         <p:nvPicPr>
-          <p:cNvPr id="2" name="Image 0" descr="">    </p:cNvPr>
+          <p:cNvPr id="2" name="Image 0"/>
           <p:cNvPicPr>
             <a:picLocks noChangeAspect="1"/>
           </p:cNvPicPr>
           <p:nvPr/>
         </p:nvPicPr>
         <p:blipFill>
-          <a:blip r:embed="rId1"/>
+          <a:blip r:embed="rId3"/>
           <a:stretch>
             <a:fillRect/>
           </a:stretch>
@@ -3498,7 +4945,7 @@
           </a:bodyPr>
           <a:lstStyle/>
           <a:p>
-            <a:pPr algn="l" indent="0" marL="0">
+            <a:pPr marL="0" indent="0" algn="l">
               <a:lnSpc>
                 <a:spcPct val="104000"/>
               </a:lnSpc>
@@ -3567,7 +5014,7 @@
           <a:bodyPr wrap="none" lIns="0" tIns="0" rIns="0" bIns="0" rtlCol="0" anchor="t"/>
           <a:lstStyle/>
           <a:p>
-            <a:pPr algn="l" indent="0" marL="0">
+            <a:pPr marL="0" indent="0" algn="l">
               <a:lnSpc>
                 <a:spcPct val="104000"/>
               </a:lnSpc>
@@ -3611,7 +5058,7 @@
           </a:bodyPr>
           <a:lstStyle/>
           <a:p>
-            <a:pPr algn="l" indent="0" marL="0">
+            <a:pPr marL="0" indent="0" algn="l">
               <a:lnSpc>
                 <a:spcPct val="133000"/>
               </a:lnSpc>
@@ -3680,7 +5127,7 @@
           <a:bodyPr wrap="none" lIns="0" tIns="0" rIns="0" bIns="0" rtlCol="0" anchor="t"/>
           <a:lstStyle/>
           <a:p>
-            <a:pPr algn="l" indent="0" marL="0">
+            <a:pPr marL="0" indent="0" algn="l">
               <a:lnSpc>
                 <a:spcPct val="104000"/>
               </a:lnSpc>
@@ -3724,7 +5171,7 @@
           </a:bodyPr>
           <a:lstStyle/>
           <a:p>
-            <a:pPr algn="l" indent="0" marL="0">
+            <a:pPr marL="0" indent="0" algn="l">
               <a:lnSpc>
                 <a:spcPct val="133000"/>
               </a:lnSpc>
@@ -3793,7 +5240,7 @@
           <a:bodyPr wrap="none" lIns="0" tIns="0" rIns="0" bIns="0" rtlCol="0" anchor="t"/>
           <a:lstStyle/>
           <a:p>
-            <a:pPr algn="l" indent="0" marL="0">
+            <a:pPr marL="0" indent="0" algn="l">
               <a:lnSpc>
                 <a:spcPct val="104000"/>
               </a:lnSpc>
@@ -3837,7 +5284,7 @@
           </a:bodyPr>
           <a:lstStyle/>
           <a:p>
-            <a:pPr algn="l" indent="0" marL="0">
+            <a:pPr marL="0" indent="0" algn="l">
               <a:lnSpc>
                 <a:spcPct val="133000"/>
               </a:lnSpc>
@@ -3867,6 +5314,1622 @@
 </file>
 
 <file path=ppt/slides/slide4.xml><?xml version="1.0" encoding="utf-8"?>
+<p:sld xmlns:a="http://schemas.openxmlformats.org/drawingml/2006/main" xmlns:r="http://schemas.openxmlformats.org/officeDocument/2006/relationships" xmlns:p="http://schemas.openxmlformats.org/presentationml/2006/main">
+  <p:cSld>
+    <p:spTree>
+      <p:nvGrpSpPr>
+        <p:cNvPr id="1" name=""/>
+        <p:cNvGrpSpPr/>
+        <p:nvPr/>
+      </p:nvGrpSpPr>
+      <p:grpSpPr>
+        <a:xfrm>
+          <a:off x="0" y="0"/>
+          <a:ext cx="0" cy="0"/>
+          <a:chOff x="0" y="0"/>
+          <a:chExt cx="0" cy="0"/>
+        </a:xfrm>
+      </p:grpSpPr>
+      <p:sp>
+        <p:nvSpPr>
+          <p:cNvPr id="5" name="Google Shape;121;p15"/>
+          <p:cNvSpPr txBox="1"/>
+          <p:nvPr/>
+        </p:nvSpPr>
+        <p:spPr>
+          <a:xfrm>
+            <a:off x="648070" y="476250"/>
+            <a:ext cx="6418555" cy="470898"/>
+          </a:xfrm>
+          <a:prstGeom prst="rect">
+            <a:avLst/>
+          </a:prstGeom>
+          <a:noFill/>
+          <a:ln>
+            <a:noFill/>
+          </a:ln>
+        </p:spPr>
+        <p:txBody>
+          <a:bodyPr spcFirstLastPara="1" wrap="square" lIns="0" tIns="0" rIns="0" bIns="0" anchor="t" anchorCtr="0">
+            <a:spAutoFit/>
+          </a:bodyPr>
+          <a:lstStyle/>
+          <a:p>
+            <a:pPr marL="0" marR="0" lvl="0" indent="0" algn="l" rtl="0">
+              <a:lnSpc>
+                <a:spcPct val="120000"/>
+              </a:lnSpc>
+              <a:spcBef>
+                <a:spcPts val="0"/>
+              </a:spcBef>
+              <a:spcAft>
+                <a:spcPts val="0"/>
+              </a:spcAft>
+              <a:buNone/>
+            </a:pPr>
+            <a:r>
+              <a:rPr lang="en-US" sz="2550" b="1" i="0" u="none" strike="noStrike" cap="none" dirty="0" err="1">
+                <a:solidFill>
+                  <a:srgbClr val="0F172A"/>
+                </a:solidFill>
+                <a:latin typeface="Plus Jakarta Sans"/>
+                <a:ea typeface="Plus Jakarta Sans"/>
+                <a:cs typeface="Plus Jakarta Sans"/>
+                <a:sym typeface="Plus Jakarta Sans"/>
+              </a:rPr>
+              <a:t>Фундаментальні</a:t>
+            </a:r>
+            <a:r>
+              <a:rPr lang="en-US" sz="2550" b="1" i="0" u="none" strike="noStrike" cap="none" dirty="0">
+                <a:solidFill>
+                  <a:srgbClr val="0F172A"/>
+                </a:solidFill>
+                <a:latin typeface="Plus Jakarta Sans"/>
+                <a:ea typeface="Plus Jakarta Sans"/>
+                <a:cs typeface="Plus Jakarta Sans"/>
+                <a:sym typeface="Plus Jakarta Sans"/>
+              </a:rPr>
+              <a:t> </a:t>
+            </a:r>
+            <a:r>
+              <a:rPr lang="en-US" sz="2550" b="1" i="0" u="none" strike="noStrike" cap="none" dirty="0" err="1">
+                <a:solidFill>
+                  <a:srgbClr val="0F172A"/>
+                </a:solidFill>
+                <a:latin typeface="Plus Jakarta Sans"/>
+                <a:ea typeface="Plus Jakarta Sans"/>
+                <a:cs typeface="Plus Jakarta Sans"/>
+                <a:sym typeface="Plus Jakarta Sans"/>
+              </a:rPr>
+              <a:t>принципи</a:t>
+            </a:r>
+            <a:r>
+              <a:rPr lang="en-US" sz="2550" b="1" i="0" u="none" strike="noStrike" cap="none" dirty="0">
+                <a:solidFill>
+                  <a:srgbClr val="0F172A"/>
+                </a:solidFill>
+                <a:latin typeface="Plus Jakarta Sans"/>
+                <a:ea typeface="Plus Jakarta Sans"/>
+                <a:cs typeface="Plus Jakarta Sans"/>
+                <a:sym typeface="Plus Jakarta Sans"/>
+              </a:rPr>
+              <a:t> </a:t>
+            </a:r>
+            <a:r>
+              <a:rPr lang="en-US" sz="2550" b="1" i="0" u="none" strike="noStrike" cap="none" dirty="0" err="1">
+                <a:solidFill>
+                  <a:srgbClr val="0F172A"/>
+                </a:solidFill>
+                <a:latin typeface="Plus Jakarta Sans"/>
+                <a:ea typeface="Plus Jakarta Sans"/>
+                <a:cs typeface="Plus Jakarta Sans"/>
+                <a:sym typeface="Plus Jakarta Sans"/>
+              </a:rPr>
+              <a:t>інженерії</a:t>
+            </a:r>
+            <a:endParaRPr dirty="0"/>
+          </a:p>
+        </p:txBody>
+      </p:sp>
+      <p:sp>
+        <p:nvSpPr>
+          <p:cNvPr id="6" name="Google Shape;110;p15"/>
+          <p:cNvSpPr txBox="1"/>
+          <p:nvPr/>
+        </p:nvSpPr>
+        <p:spPr>
+          <a:xfrm>
+            <a:off x="710214" y="1446763"/>
+            <a:ext cx="3207119" cy="544710"/>
+          </a:xfrm>
+          <a:prstGeom prst="rect">
+            <a:avLst/>
+          </a:prstGeom>
+          <a:noFill/>
+          <a:ln>
+            <a:noFill/>
+          </a:ln>
+        </p:spPr>
+        <p:txBody>
+          <a:bodyPr spcFirstLastPara="1" wrap="square" lIns="0" tIns="0" rIns="0" bIns="0" anchor="t" anchorCtr="0">
+            <a:spAutoFit/>
+          </a:bodyPr>
+          <a:lstStyle/>
+          <a:p>
+            <a:pPr marL="0" marR="0" lvl="0" indent="0" algn="l" rtl="0">
+              <a:lnSpc>
+                <a:spcPct val="130000"/>
+              </a:lnSpc>
+              <a:spcBef>
+                <a:spcPts val="0"/>
+              </a:spcBef>
+              <a:spcAft>
+                <a:spcPts val="0"/>
+              </a:spcAft>
+              <a:buNone/>
+            </a:pPr>
+            <a:r>
+              <a:rPr lang="en-US" sz="1650" b="1" i="0" u="none" strike="noStrike" cap="none" dirty="0" err="1">
+                <a:solidFill>
+                  <a:srgbClr val="1E293B"/>
+                </a:solidFill>
+                <a:latin typeface="Plus Jakarta Sans"/>
+                <a:ea typeface="Plus Jakarta Sans"/>
+                <a:cs typeface="Plus Jakarta Sans"/>
+                <a:sym typeface="Plus Jakarta Sans"/>
+              </a:rPr>
+              <a:t>Ефективність</a:t>
+            </a:r>
+            <a:r>
+              <a:rPr lang="en-US" sz="1650" b="1" i="0" u="none" strike="noStrike" cap="none" dirty="0">
+                <a:solidFill>
+                  <a:srgbClr val="1E293B"/>
+                </a:solidFill>
+                <a:latin typeface="Plus Jakarta Sans"/>
+                <a:ea typeface="Plus Jakarta Sans"/>
+                <a:cs typeface="Plus Jakarta Sans"/>
+                <a:sym typeface="Plus Jakarta Sans"/>
+              </a:rPr>
+              <a:t> </a:t>
+            </a:r>
+            <a:r>
+              <a:rPr lang="en-US" sz="1650" b="1" i="0" u="none" strike="noStrike" cap="none" dirty="0" err="1">
+                <a:solidFill>
+                  <a:srgbClr val="1E293B"/>
+                </a:solidFill>
+                <a:latin typeface="Plus Jakarta Sans"/>
+                <a:ea typeface="Plus Jakarta Sans"/>
+                <a:cs typeface="Plus Jakarta Sans"/>
+                <a:sym typeface="Plus Jakarta Sans"/>
+              </a:rPr>
+              <a:t>та</a:t>
+            </a:r>
+            <a:r>
+              <a:rPr lang="en-US" sz="1650" b="1" i="0" u="none" strike="noStrike" cap="none" dirty="0">
+                <a:solidFill>
+                  <a:srgbClr val="1E293B"/>
+                </a:solidFill>
+                <a:latin typeface="Plus Jakarta Sans"/>
+                <a:ea typeface="Plus Jakarta Sans"/>
+                <a:cs typeface="Plus Jakarta Sans"/>
+                <a:sym typeface="Plus Jakarta Sans"/>
+              </a:rPr>
+              <a:t> </a:t>
+            </a:r>
+            <a:r>
+              <a:rPr lang="en-US" sz="1650" b="1" i="0" u="none" strike="noStrike" cap="none" dirty="0" err="1">
+                <a:solidFill>
+                  <a:srgbClr val="1E293B"/>
+                </a:solidFill>
+                <a:latin typeface="Plus Jakarta Sans"/>
+                <a:ea typeface="Plus Jakarta Sans"/>
+                <a:cs typeface="Plus Jakarta Sans"/>
+                <a:sym typeface="Plus Jakarta Sans"/>
+              </a:rPr>
+              <a:t>практичність</a:t>
+            </a:r>
+            <a:endParaRPr dirty="0"/>
+          </a:p>
+        </p:txBody>
+      </p:sp>
+      <p:sp>
+        <p:nvSpPr>
+          <p:cNvPr id="7" name="Google Shape;111;p15"/>
+          <p:cNvSpPr txBox="1"/>
+          <p:nvPr/>
+        </p:nvSpPr>
+        <p:spPr>
+          <a:xfrm>
+            <a:off x="728012" y="2194602"/>
+            <a:ext cx="3189321" cy="1846659"/>
+          </a:xfrm>
+          <a:prstGeom prst="rect">
+            <a:avLst/>
+          </a:prstGeom>
+          <a:noFill/>
+          <a:ln>
+            <a:noFill/>
+          </a:ln>
+        </p:spPr>
+        <p:txBody>
+          <a:bodyPr spcFirstLastPara="1" wrap="square" lIns="0" tIns="0" rIns="0" bIns="0" anchor="t" anchorCtr="0">
+            <a:spAutoFit/>
+          </a:bodyPr>
+          <a:lstStyle/>
+          <a:p>
+            <a:pPr marL="0" marR="0" lvl="0" indent="0" algn="l" rtl="0">
+              <a:lnSpc>
+                <a:spcPct val="150000"/>
+              </a:lnSpc>
+              <a:spcBef>
+                <a:spcPts val="0"/>
+              </a:spcBef>
+              <a:spcAft>
+                <a:spcPts val="0"/>
+              </a:spcAft>
+              <a:buNone/>
+            </a:pPr>
+            <a:r>
+              <a:rPr lang="en-US" sz="1600" b="0" i="0" u="none" strike="noStrike" cap="none" dirty="0" err="1">
+                <a:solidFill>
+                  <a:srgbClr val="334155"/>
+                </a:solidFill>
+                <a:latin typeface="Inter"/>
+                <a:ea typeface="Inter"/>
+                <a:cs typeface="Inter"/>
+                <a:sym typeface="Inter"/>
+              </a:rPr>
+              <a:t>Результати</a:t>
+            </a:r>
+            <a:r>
+              <a:rPr lang="en-US" sz="1600" b="0" i="0" u="none" strike="noStrike" cap="none" dirty="0">
+                <a:solidFill>
+                  <a:srgbClr val="334155"/>
+                </a:solidFill>
+                <a:latin typeface="Inter"/>
+                <a:ea typeface="Inter"/>
+                <a:cs typeface="Inter"/>
+                <a:sym typeface="Inter"/>
+              </a:rPr>
+              <a:t> </a:t>
+            </a:r>
+            <a:r>
+              <a:rPr lang="en-US" sz="1600" b="0" i="0" u="none" strike="noStrike" cap="none" dirty="0" err="1">
+                <a:solidFill>
+                  <a:srgbClr val="334155"/>
+                </a:solidFill>
+                <a:latin typeface="Inter"/>
+                <a:ea typeface="Inter"/>
+                <a:cs typeface="Inter"/>
+                <a:sym typeface="Inter"/>
+              </a:rPr>
+              <a:t>отримують</a:t>
+            </a:r>
+            <a:r>
+              <a:rPr lang="en-US" sz="1600" b="0" i="0" u="none" strike="noStrike" cap="none" dirty="0">
+                <a:solidFill>
+                  <a:srgbClr val="334155"/>
+                </a:solidFill>
+                <a:latin typeface="Inter"/>
+                <a:ea typeface="Inter"/>
+                <a:cs typeface="Inter"/>
+                <a:sym typeface="Inter"/>
+              </a:rPr>
+              <a:t> </a:t>
+            </a:r>
+            <a:r>
+              <a:rPr lang="en-US" sz="1600" b="0" i="0" u="none" strike="noStrike" cap="none" dirty="0" err="1">
+                <a:solidFill>
+                  <a:srgbClr val="334155"/>
+                </a:solidFill>
+                <a:latin typeface="Inter"/>
+                <a:ea typeface="Inter"/>
+                <a:cs typeface="Inter"/>
+                <a:sym typeface="Inter"/>
+              </a:rPr>
+              <a:t>за</a:t>
+            </a:r>
+            <a:r>
+              <a:rPr lang="en-US" sz="1600" b="0" i="0" u="none" strike="noStrike" cap="none" dirty="0">
+                <a:solidFill>
+                  <a:srgbClr val="334155"/>
+                </a:solidFill>
+                <a:latin typeface="Inter"/>
+                <a:ea typeface="Inter"/>
+                <a:cs typeface="Inter"/>
+                <a:sym typeface="Inter"/>
+              </a:rPr>
+              <a:t> </a:t>
+            </a:r>
+            <a:r>
+              <a:rPr lang="en-US" sz="1600" b="0" i="0" u="none" strike="noStrike" cap="none" dirty="0" err="1">
+                <a:solidFill>
+                  <a:srgbClr val="334155"/>
+                </a:solidFill>
+                <a:latin typeface="Inter"/>
+                <a:ea typeface="Inter"/>
+                <a:cs typeface="Inter"/>
+                <a:sym typeface="Inter"/>
+              </a:rPr>
+              <a:t>допомогою</a:t>
+            </a:r>
+            <a:r>
+              <a:rPr lang="en-US" sz="1600" b="0" i="0" u="none" strike="noStrike" cap="none" dirty="0">
+                <a:solidFill>
+                  <a:srgbClr val="334155"/>
+                </a:solidFill>
+                <a:latin typeface="Inter"/>
+                <a:ea typeface="Inter"/>
+                <a:cs typeface="Inter"/>
+                <a:sym typeface="Inter"/>
+              </a:rPr>
+              <a:t> </a:t>
+            </a:r>
+            <a:r>
+              <a:rPr lang="en-US" sz="1600" b="0" i="0" u="none" strike="noStrike" cap="none" dirty="0" err="1">
+                <a:solidFill>
+                  <a:srgbClr val="334155"/>
+                </a:solidFill>
+                <a:latin typeface="Inter"/>
+                <a:ea typeface="Inter"/>
+                <a:cs typeface="Inter"/>
+                <a:sym typeface="Inter"/>
+              </a:rPr>
+              <a:t>заданих</a:t>
+            </a:r>
+            <a:r>
+              <a:rPr lang="en-US" sz="1600" b="0" i="0" u="none" strike="noStrike" cap="none" dirty="0">
+                <a:solidFill>
+                  <a:srgbClr val="334155"/>
+                </a:solidFill>
+                <a:latin typeface="Inter"/>
+                <a:ea typeface="Inter"/>
+                <a:cs typeface="Inter"/>
+                <a:sym typeface="Inter"/>
+              </a:rPr>
+              <a:t> </a:t>
+            </a:r>
+            <a:r>
+              <a:rPr lang="en-US" sz="1600" b="0" i="0" u="none" strike="noStrike" cap="none" dirty="0" err="1">
+                <a:solidFill>
+                  <a:srgbClr val="334155"/>
+                </a:solidFill>
+                <a:latin typeface="Inter"/>
+                <a:ea typeface="Inter"/>
+                <a:cs typeface="Inter"/>
+                <a:sym typeface="Inter"/>
+              </a:rPr>
+              <a:t>ресурсів</a:t>
+            </a:r>
+            <a:r>
+              <a:rPr lang="en-US" sz="1600" b="0" i="0" u="none" strike="noStrike" cap="none" dirty="0">
+                <a:solidFill>
+                  <a:srgbClr val="334155"/>
+                </a:solidFill>
+                <a:latin typeface="Inter"/>
+                <a:ea typeface="Inter"/>
+                <a:cs typeface="Inter"/>
+                <a:sym typeface="Inter"/>
+              </a:rPr>
+              <a:t>, </a:t>
+            </a:r>
+            <a:r>
+              <a:rPr lang="en-US" sz="1600" b="0" i="0" u="none" strike="noStrike" cap="none" dirty="0" err="1">
+                <a:solidFill>
+                  <a:srgbClr val="334155"/>
+                </a:solidFill>
+                <a:latin typeface="Inter"/>
+                <a:ea typeface="Inter"/>
+                <a:cs typeface="Inter"/>
+                <a:sym typeface="Inter"/>
+              </a:rPr>
+              <a:t>що</a:t>
+            </a:r>
+            <a:r>
+              <a:rPr lang="en-US" sz="1600" b="0" i="0" u="none" strike="noStrike" cap="none" dirty="0">
+                <a:solidFill>
+                  <a:srgbClr val="334155"/>
+                </a:solidFill>
+                <a:latin typeface="Inter"/>
+                <a:ea typeface="Inter"/>
+                <a:cs typeface="Inter"/>
+                <a:sym typeface="Inter"/>
+              </a:rPr>
+              <a:t> </a:t>
+            </a:r>
+            <a:r>
+              <a:rPr lang="en-US" sz="1600" b="0" i="0" u="none" strike="noStrike" cap="none" dirty="0" err="1">
+                <a:solidFill>
+                  <a:srgbClr val="334155"/>
+                </a:solidFill>
+                <a:latin typeface="Inter"/>
+                <a:ea typeface="Inter"/>
+                <a:cs typeface="Inter"/>
+                <a:sym typeface="Inter"/>
+              </a:rPr>
+              <a:t>відповідають</a:t>
+            </a:r>
+            <a:r>
+              <a:rPr lang="en-US" sz="1600" b="0" i="0" u="none" strike="noStrike" cap="none" dirty="0">
+                <a:solidFill>
+                  <a:srgbClr val="334155"/>
+                </a:solidFill>
+                <a:latin typeface="Inter"/>
+                <a:ea typeface="Inter"/>
+                <a:cs typeface="Inter"/>
+                <a:sym typeface="Inter"/>
+              </a:rPr>
+              <a:t> </a:t>
+            </a:r>
+            <a:r>
+              <a:rPr lang="en-US" sz="1600" b="0" i="0" u="none" strike="noStrike" cap="none" dirty="0" err="1">
+                <a:solidFill>
+                  <a:srgbClr val="334155"/>
+                </a:solidFill>
+                <a:latin typeface="Inter"/>
+                <a:ea typeface="Inter"/>
+                <a:cs typeface="Inter"/>
+                <a:sym typeface="Inter"/>
+              </a:rPr>
+              <a:t>вимогам</a:t>
+            </a:r>
+            <a:r>
+              <a:rPr lang="en-US" sz="1600" b="0" i="0" u="none" strike="noStrike" cap="none" dirty="0">
+                <a:solidFill>
+                  <a:srgbClr val="334155"/>
+                </a:solidFill>
+                <a:latin typeface="Inter"/>
+                <a:ea typeface="Inter"/>
+                <a:cs typeface="Inter"/>
+                <a:sym typeface="Inter"/>
+              </a:rPr>
+              <a:t>, </a:t>
+            </a:r>
+            <a:r>
+              <a:rPr lang="en-US" sz="1600" b="0" i="0" u="none" strike="noStrike" cap="none" dirty="0" err="1">
+                <a:solidFill>
+                  <a:srgbClr val="334155"/>
+                </a:solidFill>
+                <a:latin typeface="Inter"/>
+                <a:ea typeface="Inter"/>
+                <a:cs typeface="Inter"/>
+                <a:sym typeface="Inter"/>
+              </a:rPr>
+              <a:t>стандартизовані</a:t>
+            </a:r>
+            <a:r>
+              <a:rPr lang="en-US" sz="1600" b="0" i="0" u="none" strike="noStrike" cap="none" dirty="0">
+                <a:solidFill>
+                  <a:srgbClr val="334155"/>
+                </a:solidFill>
+                <a:latin typeface="Inter"/>
+                <a:ea typeface="Inter"/>
+                <a:cs typeface="Inter"/>
+                <a:sym typeface="Inter"/>
+              </a:rPr>
+              <a:t> </a:t>
+            </a:r>
+            <a:r>
+              <a:rPr lang="en-US" sz="1600" b="0" i="0" u="none" strike="noStrike" cap="none" dirty="0" err="1">
+                <a:solidFill>
+                  <a:srgbClr val="334155"/>
+                </a:solidFill>
+                <a:latin typeface="Inter"/>
+                <a:ea typeface="Inter"/>
+                <a:cs typeface="Inter"/>
+                <a:sym typeface="Inter"/>
+              </a:rPr>
+              <a:t>та</a:t>
+            </a:r>
+            <a:r>
+              <a:rPr lang="en-US" sz="1600" b="0" i="0" u="none" strike="noStrike" cap="none" dirty="0">
+                <a:solidFill>
+                  <a:srgbClr val="334155"/>
+                </a:solidFill>
+                <a:latin typeface="Inter"/>
+                <a:ea typeface="Inter"/>
+                <a:cs typeface="Inter"/>
+                <a:sym typeface="Inter"/>
+              </a:rPr>
+              <a:t> </a:t>
+            </a:r>
+            <a:r>
+              <a:rPr lang="en-US" sz="1600" b="0" i="0" u="none" strike="noStrike" cap="none" dirty="0" err="1">
+                <a:solidFill>
+                  <a:srgbClr val="334155"/>
+                </a:solidFill>
+                <a:latin typeface="Inter"/>
+                <a:ea typeface="Inter"/>
+                <a:cs typeface="Inter"/>
+                <a:sym typeface="Inter"/>
+              </a:rPr>
+              <a:t>мають</a:t>
+            </a:r>
+            <a:r>
+              <a:rPr lang="en-US" sz="1600" b="0" i="0" u="none" strike="noStrike" cap="none" dirty="0">
+                <a:solidFill>
+                  <a:srgbClr val="334155"/>
+                </a:solidFill>
+                <a:latin typeface="Inter"/>
+                <a:ea typeface="Inter"/>
+                <a:cs typeface="Inter"/>
+                <a:sym typeface="Inter"/>
+              </a:rPr>
+              <a:t> </a:t>
+            </a:r>
+            <a:r>
+              <a:rPr lang="en-US" sz="1600" b="0" i="0" u="none" strike="noStrike" cap="none" dirty="0" err="1">
+                <a:solidFill>
+                  <a:srgbClr val="334155"/>
+                </a:solidFill>
+                <a:latin typeface="Inter"/>
+                <a:ea typeface="Inter"/>
+                <a:cs typeface="Inter"/>
+                <a:sym typeface="Inter"/>
+              </a:rPr>
+              <a:t>конкретних</a:t>
+            </a:r>
+            <a:r>
+              <a:rPr lang="en-US" sz="1600" b="0" i="0" u="none" strike="noStrike" cap="none" dirty="0">
+                <a:solidFill>
+                  <a:srgbClr val="334155"/>
+                </a:solidFill>
+                <a:latin typeface="Inter"/>
+                <a:ea typeface="Inter"/>
+                <a:cs typeface="Inter"/>
+                <a:sym typeface="Inter"/>
+              </a:rPr>
+              <a:t> </a:t>
+            </a:r>
+            <a:r>
+              <a:rPr lang="en-US" sz="1600" b="0" i="0" u="none" strike="noStrike" cap="none" dirty="0" err="1">
+                <a:solidFill>
+                  <a:srgbClr val="334155"/>
+                </a:solidFill>
+                <a:latin typeface="Inter"/>
+                <a:ea typeface="Inter"/>
+                <a:cs typeface="Inter"/>
+                <a:sym typeface="Inter"/>
+              </a:rPr>
+              <a:t>замовників</a:t>
+            </a:r>
+            <a:r>
+              <a:rPr lang="en-US" sz="1600" b="0" i="0" u="none" strike="noStrike" cap="none" dirty="0">
+                <a:solidFill>
+                  <a:srgbClr val="334155"/>
+                </a:solidFill>
+                <a:latin typeface="Inter"/>
+                <a:ea typeface="Inter"/>
+                <a:cs typeface="Inter"/>
+                <a:sym typeface="Inter"/>
+              </a:rPr>
+              <a:t>.</a:t>
+            </a:r>
+            <a:endParaRPr sz="1600" dirty="0"/>
+          </a:p>
+        </p:txBody>
+      </p:sp>
+      <p:sp>
+        <p:nvSpPr>
+          <p:cNvPr id="8" name="Google Shape;113;p15"/>
+          <p:cNvSpPr txBox="1"/>
+          <p:nvPr/>
+        </p:nvSpPr>
+        <p:spPr>
+          <a:xfrm>
+            <a:off x="4355810" y="1446763"/>
+            <a:ext cx="3207119" cy="272355"/>
+          </a:xfrm>
+          <a:prstGeom prst="rect">
+            <a:avLst/>
+          </a:prstGeom>
+          <a:noFill/>
+          <a:ln>
+            <a:noFill/>
+          </a:ln>
+        </p:spPr>
+        <p:txBody>
+          <a:bodyPr spcFirstLastPara="1" wrap="square" lIns="0" tIns="0" rIns="0" bIns="0" anchor="t" anchorCtr="0">
+            <a:spAutoFit/>
+          </a:bodyPr>
+          <a:lstStyle/>
+          <a:p>
+            <a:pPr marL="0" marR="0" lvl="0" indent="0" algn="l" rtl="0">
+              <a:lnSpc>
+                <a:spcPct val="130000"/>
+              </a:lnSpc>
+              <a:spcBef>
+                <a:spcPts val="0"/>
+              </a:spcBef>
+              <a:spcAft>
+                <a:spcPts val="0"/>
+              </a:spcAft>
+              <a:buNone/>
+            </a:pPr>
+            <a:r>
+              <a:rPr lang="en-US" sz="1650" b="1" i="0" u="none" strike="noStrike" cap="none" dirty="0" err="1">
+                <a:solidFill>
+                  <a:srgbClr val="1E293B"/>
+                </a:solidFill>
+                <a:latin typeface="Plus Jakarta Sans"/>
+                <a:ea typeface="Plus Jakarta Sans"/>
+                <a:cs typeface="Plus Jakarta Sans"/>
+                <a:sym typeface="Plus Jakarta Sans"/>
+              </a:rPr>
+              <a:t>Науковість</a:t>
+            </a:r>
+            <a:r>
+              <a:rPr lang="en-US" sz="1650" b="1" i="0" u="none" strike="noStrike" cap="none" dirty="0">
+                <a:solidFill>
+                  <a:srgbClr val="1E293B"/>
+                </a:solidFill>
+                <a:latin typeface="Plus Jakarta Sans"/>
+                <a:ea typeface="Plus Jakarta Sans"/>
+                <a:cs typeface="Plus Jakarta Sans"/>
+                <a:sym typeface="Plus Jakarta Sans"/>
+              </a:rPr>
+              <a:t> </a:t>
+            </a:r>
+            <a:r>
+              <a:rPr lang="en-US" sz="1650" b="1" i="0" u="none" strike="noStrike" cap="none" dirty="0" err="1">
+                <a:solidFill>
+                  <a:srgbClr val="1E293B"/>
+                </a:solidFill>
+                <a:latin typeface="Plus Jakarta Sans"/>
+                <a:ea typeface="Plus Jakarta Sans"/>
+                <a:cs typeface="Plus Jakarta Sans"/>
+                <a:sym typeface="Plus Jakarta Sans"/>
+              </a:rPr>
+              <a:t>та</a:t>
+            </a:r>
+            <a:r>
+              <a:rPr lang="en-US" sz="1650" b="1" i="0" u="none" strike="noStrike" cap="none" dirty="0">
+                <a:solidFill>
+                  <a:srgbClr val="1E293B"/>
+                </a:solidFill>
+                <a:latin typeface="Plus Jakarta Sans"/>
+                <a:ea typeface="Plus Jakarta Sans"/>
+                <a:cs typeface="Plus Jakarta Sans"/>
+                <a:sym typeface="Plus Jakarta Sans"/>
+              </a:rPr>
+              <a:t> </a:t>
+            </a:r>
+            <a:r>
+              <a:rPr lang="en-US" sz="1650" b="1" i="0" u="none" strike="noStrike" cap="none" dirty="0" err="1">
+                <a:solidFill>
+                  <a:srgbClr val="1E293B"/>
+                </a:solidFill>
+                <a:latin typeface="Plus Jakarta Sans"/>
+                <a:ea typeface="Plus Jakarta Sans"/>
+                <a:cs typeface="Plus Jakarta Sans"/>
+                <a:sym typeface="Plus Jakarta Sans"/>
+              </a:rPr>
+              <a:t>успадкованість</a:t>
+            </a:r>
+            <a:endParaRPr dirty="0"/>
+          </a:p>
+        </p:txBody>
+      </p:sp>
+      <p:sp>
+        <p:nvSpPr>
+          <p:cNvPr id="9" name="Google Shape;114;p15"/>
+          <p:cNvSpPr txBox="1"/>
+          <p:nvPr/>
+        </p:nvSpPr>
+        <p:spPr>
+          <a:xfrm>
+            <a:off x="4508530" y="2218733"/>
+            <a:ext cx="3054399" cy="1846659"/>
+          </a:xfrm>
+          <a:prstGeom prst="rect">
+            <a:avLst/>
+          </a:prstGeom>
+          <a:noFill/>
+          <a:ln>
+            <a:noFill/>
+          </a:ln>
+        </p:spPr>
+        <p:txBody>
+          <a:bodyPr spcFirstLastPara="1" wrap="square" lIns="0" tIns="0" rIns="0" bIns="0" anchor="t" anchorCtr="0">
+            <a:spAutoFit/>
+          </a:bodyPr>
+          <a:lstStyle/>
+          <a:p>
+            <a:pPr marL="0" marR="0" lvl="0" indent="0" algn="l" rtl="0">
+              <a:lnSpc>
+                <a:spcPct val="150000"/>
+              </a:lnSpc>
+              <a:spcBef>
+                <a:spcPts val="0"/>
+              </a:spcBef>
+              <a:spcAft>
+                <a:spcPts val="0"/>
+              </a:spcAft>
+              <a:buNone/>
+            </a:pPr>
+            <a:r>
+              <a:rPr lang="en-US" sz="1600" b="0" i="0" u="none" strike="noStrike" cap="none" dirty="0" err="1">
+                <a:solidFill>
+                  <a:srgbClr val="334155"/>
+                </a:solidFill>
+                <a:latin typeface="Inter"/>
+                <a:ea typeface="Inter"/>
+                <a:cs typeface="Inter"/>
+                <a:sym typeface="Inter"/>
+              </a:rPr>
+              <a:t>Ґрунтується</a:t>
+            </a:r>
+            <a:r>
+              <a:rPr lang="en-US" sz="1600" b="0" i="0" u="none" strike="noStrike" cap="none" dirty="0">
+                <a:solidFill>
+                  <a:srgbClr val="334155"/>
+                </a:solidFill>
+                <a:latin typeface="Inter"/>
+                <a:ea typeface="Inter"/>
+                <a:cs typeface="Inter"/>
+                <a:sym typeface="Inter"/>
+              </a:rPr>
+              <a:t> </a:t>
+            </a:r>
+            <a:r>
+              <a:rPr lang="en-US" sz="1600" b="0" i="0" u="none" strike="noStrike" cap="none" dirty="0" err="1">
+                <a:solidFill>
+                  <a:srgbClr val="334155"/>
+                </a:solidFill>
+                <a:latin typeface="Inter"/>
+                <a:ea typeface="Inter"/>
+                <a:cs typeface="Inter"/>
+                <a:sym typeface="Inter"/>
+              </a:rPr>
+              <a:t>на</a:t>
+            </a:r>
+            <a:r>
+              <a:rPr lang="en-US" sz="1600" b="0" i="0" u="none" strike="noStrike" cap="none" dirty="0">
+                <a:solidFill>
+                  <a:srgbClr val="334155"/>
+                </a:solidFill>
+                <a:latin typeface="Inter"/>
+                <a:ea typeface="Inter"/>
+                <a:cs typeface="Inter"/>
+                <a:sym typeface="Inter"/>
+              </a:rPr>
+              <a:t> </a:t>
+            </a:r>
+            <a:r>
+              <a:rPr lang="en-US" sz="1600" b="0" i="0" u="none" strike="noStrike" cap="none" dirty="0" err="1">
+                <a:solidFill>
+                  <a:srgbClr val="334155"/>
+                </a:solidFill>
+                <a:latin typeface="Inter"/>
+                <a:ea typeface="Inter"/>
+                <a:cs typeface="Inter"/>
+                <a:sym typeface="Inter"/>
+              </a:rPr>
+              <a:t>фундаментальних</a:t>
+            </a:r>
+            <a:r>
+              <a:rPr lang="en-US" sz="1600" b="0" i="0" u="none" strike="noStrike" cap="none" dirty="0">
+                <a:solidFill>
+                  <a:srgbClr val="334155"/>
+                </a:solidFill>
+                <a:latin typeface="Inter"/>
+                <a:ea typeface="Inter"/>
+                <a:cs typeface="Inter"/>
+                <a:sym typeface="Inter"/>
+              </a:rPr>
+              <a:t> </a:t>
+            </a:r>
+            <a:r>
+              <a:rPr lang="en-US" sz="1600" b="0" i="0" u="none" strike="noStrike" cap="none" dirty="0" err="1">
+                <a:solidFill>
+                  <a:srgbClr val="334155"/>
+                </a:solidFill>
+                <a:latin typeface="Inter"/>
+                <a:ea typeface="Inter"/>
+                <a:cs typeface="Inter"/>
+                <a:sym typeface="Inter"/>
+              </a:rPr>
+              <a:t>науках</a:t>
+            </a:r>
+            <a:r>
+              <a:rPr lang="en-US" sz="1600" b="0" i="0" u="none" strike="noStrike" cap="none" dirty="0">
+                <a:solidFill>
+                  <a:srgbClr val="334155"/>
+                </a:solidFill>
+                <a:latin typeface="Inter"/>
+                <a:ea typeface="Inter"/>
+                <a:cs typeface="Inter"/>
+                <a:sym typeface="Inter"/>
+              </a:rPr>
+              <a:t> і </a:t>
+            </a:r>
+            <a:r>
+              <a:rPr lang="en-US" sz="1600" b="0" i="0" u="none" strike="noStrike" cap="none" dirty="0" err="1">
+                <a:solidFill>
+                  <a:srgbClr val="334155"/>
+                </a:solidFill>
+                <a:latin typeface="Inter"/>
+                <a:ea typeface="Inter"/>
+                <a:cs typeface="Inter"/>
+                <a:sym typeface="Inter"/>
+              </a:rPr>
+              <a:t>накопиченому</a:t>
+            </a:r>
+            <a:r>
+              <a:rPr lang="en-US" sz="1600" b="0" i="0" u="none" strike="noStrike" cap="none" dirty="0">
+                <a:solidFill>
+                  <a:srgbClr val="334155"/>
+                </a:solidFill>
+                <a:latin typeface="Inter"/>
+                <a:ea typeface="Inter"/>
+                <a:cs typeface="Inter"/>
+                <a:sym typeface="Inter"/>
+              </a:rPr>
+              <a:t> </a:t>
+            </a:r>
+            <a:r>
+              <a:rPr lang="en-US" sz="1600" b="0" i="0" u="none" strike="noStrike" cap="none" dirty="0" err="1">
+                <a:solidFill>
+                  <a:srgbClr val="334155"/>
+                </a:solidFill>
+                <a:latin typeface="Inter"/>
+                <a:ea typeface="Inter"/>
+                <a:cs typeface="Inter"/>
+                <a:sym typeface="Inter"/>
+              </a:rPr>
+              <a:t>практичному</a:t>
+            </a:r>
+            <a:r>
+              <a:rPr lang="en-US" sz="1600" b="0" i="0" u="none" strike="noStrike" cap="none" dirty="0">
+                <a:solidFill>
+                  <a:srgbClr val="334155"/>
+                </a:solidFill>
+                <a:latin typeface="Inter"/>
+                <a:ea typeface="Inter"/>
+                <a:cs typeface="Inter"/>
+                <a:sym typeface="Inter"/>
+              </a:rPr>
+              <a:t> </a:t>
+            </a:r>
+            <a:r>
+              <a:rPr lang="en-US" sz="1600" b="0" i="0" u="none" strike="noStrike" cap="none" dirty="0" err="1">
+                <a:solidFill>
+                  <a:srgbClr val="334155"/>
+                </a:solidFill>
+                <a:latin typeface="Inter"/>
+                <a:ea typeface="Inter"/>
+                <a:cs typeface="Inter"/>
+                <a:sym typeface="Inter"/>
+              </a:rPr>
+              <a:t>досвіді</a:t>
+            </a:r>
+            <a:r>
+              <a:rPr lang="en-US" sz="1600" b="0" i="0" u="none" strike="noStrike" cap="none" dirty="0">
+                <a:solidFill>
+                  <a:srgbClr val="334155"/>
+                </a:solidFill>
+                <a:latin typeface="Inter"/>
+                <a:ea typeface="Inter"/>
+                <a:cs typeface="Inter"/>
+                <a:sym typeface="Inter"/>
+              </a:rPr>
+              <a:t>, </a:t>
+            </a:r>
+            <a:r>
+              <a:rPr lang="en-US" sz="1600" b="0" i="0" u="none" strike="noStrike" cap="none" dirty="0" err="1">
+                <a:solidFill>
+                  <a:srgbClr val="334155"/>
+                </a:solidFill>
+                <a:latin typeface="Inter"/>
+                <a:ea typeface="Inter"/>
+                <a:cs typeface="Inter"/>
+                <a:sym typeface="Inter"/>
+              </a:rPr>
+              <a:t>виключаючи</a:t>
+            </a:r>
+            <a:r>
+              <a:rPr lang="en-US" sz="1600" b="0" i="0" u="none" strike="noStrike" cap="none" dirty="0">
+                <a:solidFill>
+                  <a:srgbClr val="334155"/>
+                </a:solidFill>
+                <a:latin typeface="Inter"/>
+                <a:ea typeface="Inter"/>
+                <a:cs typeface="Inter"/>
+                <a:sym typeface="Inter"/>
+              </a:rPr>
+              <a:t> </a:t>
+            </a:r>
+            <a:r>
+              <a:rPr lang="en-US" sz="1600" b="0" i="0" u="none" strike="noStrike" cap="none" dirty="0" err="1">
+                <a:solidFill>
+                  <a:srgbClr val="334155"/>
+                </a:solidFill>
+                <a:latin typeface="Inter"/>
+                <a:ea typeface="Inter"/>
+                <a:cs typeface="Inter"/>
+                <a:sym typeface="Inter"/>
+              </a:rPr>
+              <a:t>розробку</a:t>
+            </a:r>
+            <a:r>
+              <a:rPr lang="en-US" sz="1600" b="0" i="0" u="none" strike="noStrike" cap="none" dirty="0">
+                <a:solidFill>
+                  <a:srgbClr val="334155"/>
+                </a:solidFill>
+                <a:latin typeface="Inter"/>
+                <a:ea typeface="Inter"/>
+                <a:cs typeface="Inter"/>
+                <a:sym typeface="Inter"/>
+              </a:rPr>
+              <a:t> «з </a:t>
+            </a:r>
+            <a:r>
+              <a:rPr lang="en-US" sz="1600" b="0" i="0" u="none" strike="noStrike" cap="none" dirty="0" err="1">
+                <a:solidFill>
+                  <a:srgbClr val="334155"/>
+                </a:solidFill>
+                <a:latin typeface="Inter"/>
+                <a:ea typeface="Inter"/>
+                <a:cs typeface="Inter"/>
+                <a:sym typeface="Inter"/>
+              </a:rPr>
+              <a:t>нуля</a:t>
+            </a:r>
+            <a:r>
+              <a:rPr lang="en-US" sz="1600" b="0" i="0" u="none" strike="noStrike" cap="none" dirty="0">
+                <a:solidFill>
+                  <a:srgbClr val="334155"/>
+                </a:solidFill>
+                <a:latin typeface="Inter"/>
+                <a:ea typeface="Inter"/>
+                <a:cs typeface="Inter"/>
+                <a:sym typeface="Inter"/>
+              </a:rPr>
+              <a:t>».</a:t>
+            </a:r>
+            <a:endParaRPr sz="1600" dirty="0"/>
+          </a:p>
+        </p:txBody>
+      </p:sp>
+      <p:sp>
+        <p:nvSpPr>
+          <p:cNvPr id="10" name="Google Shape;116;p15"/>
+          <p:cNvSpPr txBox="1"/>
+          <p:nvPr/>
+        </p:nvSpPr>
+        <p:spPr>
+          <a:xfrm>
+            <a:off x="8331431" y="1472200"/>
+            <a:ext cx="3207119" cy="272355"/>
+          </a:xfrm>
+          <a:prstGeom prst="rect">
+            <a:avLst/>
+          </a:prstGeom>
+          <a:noFill/>
+          <a:ln>
+            <a:noFill/>
+          </a:ln>
+        </p:spPr>
+        <p:txBody>
+          <a:bodyPr spcFirstLastPara="1" wrap="square" lIns="0" tIns="0" rIns="0" bIns="0" anchor="t" anchorCtr="0">
+            <a:spAutoFit/>
+          </a:bodyPr>
+          <a:lstStyle/>
+          <a:p>
+            <a:pPr marL="0" marR="0" lvl="0" indent="0" algn="l" rtl="0">
+              <a:lnSpc>
+                <a:spcPct val="130000"/>
+              </a:lnSpc>
+              <a:spcBef>
+                <a:spcPts val="0"/>
+              </a:spcBef>
+              <a:spcAft>
+                <a:spcPts val="0"/>
+              </a:spcAft>
+              <a:buNone/>
+            </a:pPr>
+            <a:r>
+              <a:rPr lang="en-US" sz="1650" b="1" i="0" u="none" strike="noStrike" cap="none" dirty="0" err="1">
+                <a:solidFill>
+                  <a:srgbClr val="1E293B"/>
+                </a:solidFill>
+                <a:latin typeface="Plus Jakarta Sans"/>
+                <a:ea typeface="Plus Jakarta Sans"/>
+                <a:cs typeface="Plus Jakarta Sans"/>
+                <a:sym typeface="Plus Jakarta Sans"/>
+              </a:rPr>
+              <a:t>Відчутність</a:t>
+            </a:r>
+            <a:r>
+              <a:rPr lang="en-US" sz="1650" b="1" i="0" u="none" strike="noStrike" cap="none" dirty="0">
+                <a:solidFill>
+                  <a:srgbClr val="1E293B"/>
+                </a:solidFill>
+                <a:latin typeface="Plus Jakarta Sans"/>
+                <a:ea typeface="Plus Jakarta Sans"/>
+                <a:cs typeface="Plus Jakarta Sans"/>
+                <a:sym typeface="Plus Jakarta Sans"/>
+              </a:rPr>
+              <a:t> </a:t>
+            </a:r>
+            <a:r>
+              <a:rPr lang="en-US" sz="1650" b="1" i="0" u="none" strike="noStrike" cap="none" dirty="0" err="1">
+                <a:solidFill>
+                  <a:srgbClr val="1E293B"/>
+                </a:solidFill>
+                <a:latin typeface="Plus Jakarta Sans"/>
+                <a:ea typeface="Plus Jakarta Sans"/>
+                <a:cs typeface="Plus Jakarta Sans"/>
+                <a:sym typeface="Plus Jakarta Sans"/>
+              </a:rPr>
+              <a:t>та</a:t>
+            </a:r>
+            <a:r>
+              <a:rPr lang="en-US" sz="1650" b="1" i="0" u="none" strike="noStrike" cap="none" dirty="0">
+                <a:solidFill>
+                  <a:srgbClr val="1E293B"/>
+                </a:solidFill>
+                <a:latin typeface="Plus Jakarta Sans"/>
+                <a:ea typeface="Plus Jakarta Sans"/>
+                <a:cs typeface="Plus Jakarta Sans"/>
+                <a:sym typeface="Plus Jakarta Sans"/>
+              </a:rPr>
+              <a:t> </a:t>
+            </a:r>
+            <a:r>
+              <a:rPr lang="en-US" sz="1650" b="1" i="0" u="none" strike="noStrike" cap="none" dirty="0" err="1">
+                <a:solidFill>
+                  <a:srgbClr val="1E293B"/>
+                </a:solidFill>
+                <a:latin typeface="Plus Jakarta Sans"/>
+                <a:ea typeface="Plus Jakarta Sans"/>
+                <a:cs typeface="Plus Jakarta Sans"/>
+                <a:sym typeface="Plus Jakarta Sans"/>
+              </a:rPr>
+              <a:t>супровід</a:t>
+            </a:r>
+            <a:endParaRPr dirty="0"/>
+          </a:p>
+        </p:txBody>
+      </p:sp>
+      <p:sp>
+        <p:nvSpPr>
+          <p:cNvPr id="11" name="Google Shape;117;p15"/>
+          <p:cNvSpPr txBox="1"/>
+          <p:nvPr/>
+        </p:nvSpPr>
+        <p:spPr>
+          <a:xfrm>
+            <a:off x="8451949" y="2150821"/>
+            <a:ext cx="2966085" cy="2215991"/>
+          </a:xfrm>
+          <a:prstGeom prst="rect">
+            <a:avLst/>
+          </a:prstGeom>
+          <a:noFill/>
+          <a:ln>
+            <a:noFill/>
+          </a:ln>
+        </p:spPr>
+        <p:txBody>
+          <a:bodyPr spcFirstLastPara="1" wrap="square" lIns="0" tIns="0" rIns="0" bIns="0" anchor="t" anchorCtr="0">
+            <a:spAutoFit/>
+          </a:bodyPr>
+          <a:lstStyle/>
+          <a:p>
+            <a:pPr marL="0" marR="0" lvl="0" indent="0" algn="l" rtl="0">
+              <a:lnSpc>
+                <a:spcPct val="150000"/>
+              </a:lnSpc>
+              <a:spcBef>
+                <a:spcPts val="0"/>
+              </a:spcBef>
+              <a:spcAft>
+                <a:spcPts val="0"/>
+              </a:spcAft>
+              <a:buNone/>
+            </a:pPr>
+            <a:r>
+              <a:rPr lang="en-US" sz="1600" b="0" i="0" u="none" strike="noStrike" cap="none" dirty="0" err="1">
+                <a:solidFill>
+                  <a:srgbClr val="334155"/>
+                </a:solidFill>
+                <a:latin typeface="Inter"/>
+                <a:ea typeface="Inter"/>
+                <a:cs typeface="Inter"/>
+                <a:sym typeface="Inter"/>
+              </a:rPr>
+              <a:t>Створення</a:t>
+            </a:r>
+            <a:r>
+              <a:rPr lang="en-US" sz="1600" b="0" i="0" u="none" strike="noStrike" cap="none" dirty="0">
+                <a:solidFill>
+                  <a:srgbClr val="334155"/>
+                </a:solidFill>
+                <a:latin typeface="Inter"/>
+                <a:ea typeface="Inter"/>
+                <a:cs typeface="Inter"/>
+                <a:sym typeface="Inter"/>
+              </a:rPr>
+              <a:t> </a:t>
+            </a:r>
+            <a:r>
+              <a:rPr lang="en-US" sz="1600" b="0" i="0" u="none" strike="noStrike" cap="none" dirty="0" err="1">
+                <a:solidFill>
+                  <a:srgbClr val="334155"/>
+                </a:solidFill>
+                <a:latin typeface="Inter"/>
+                <a:ea typeface="Inter"/>
+                <a:cs typeface="Inter"/>
+                <a:sym typeface="Inter"/>
+              </a:rPr>
+              <a:t>реальних</a:t>
+            </a:r>
+            <a:r>
+              <a:rPr lang="en-US" sz="1600" b="0" i="0" u="none" strike="noStrike" cap="none" dirty="0">
+                <a:solidFill>
+                  <a:srgbClr val="334155"/>
+                </a:solidFill>
+                <a:latin typeface="Inter"/>
+                <a:ea typeface="Inter"/>
+                <a:cs typeface="Inter"/>
+                <a:sym typeface="Inter"/>
+              </a:rPr>
+              <a:t> </a:t>
+            </a:r>
+            <a:r>
+              <a:rPr lang="en-US" sz="1600" b="0" i="0" u="none" strike="noStrike" cap="none" dirty="0" err="1">
+                <a:solidFill>
+                  <a:srgbClr val="334155"/>
+                </a:solidFill>
+                <a:latin typeface="Inter"/>
+                <a:ea typeface="Inter"/>
+                <a:cs typeface="Inter"/>
+                <a:sym typeface="Inter"/>
+              </a:rPr>
+              <a:t>продуктів</a:t>
+            </a:r>
+            <a:r>
+              <a:rPr lang="en-US" sz="1600" b="0" i="0" u="none" strike="noStrike" cap="none" dirty="0">
+                <a:solidFill>
+                  <a:srgbClr val="334155"/>
+                </a:solidFill>
+                <a:latin typeface="Inter"/>
+                <a:ea typeface="Inter"/>
+                <a:cs typeface="Inter"/>
+                <a:sym typeface="Inter"/>
+              </a:rPr>
+              <a:t>, </a:t>
+            </a:r>
+            <a:r>
+              <a:rPr lang="en-US" sz="1600" b="0" i="0" u="none" strike="noStrike" cap="none" dirty="0" err="1">
+                <a:solidFill>
+                  <a:srgbClr val="334155"/>
+                </a:solidFill>
+                <a:latin typeface="Inter"/>
+                <a:ea typeface="Inter"/>
+                <a:cs typeface="Inter"/>
+                <a:sym typeface="Inter"/>
+              </a:rPr>
+              <a:t>які</a:t>
+            </a:r>
+            <a:r>
+              <a:rPr lang="en-US" sz="1600" b="0" i="0" u="none" strike="noStrike" cap="none" dirty="0">
+                <a:solidFill>
+                  <a:srgbClr val="334155"/>
+                </a:solidFill>
+                <a:latin typeface="Inter"/>
+                <a:ea typeface="Inter"/>
+                <a:cs typeface="Inter"/>
+                <a:sym typeface="Inter"/>
+              </a:rPr>
+              <a:t> </a:t>
+            </a:r>
+            <a:r>
+              <a:rPr lang="en-US" sz="1600" b="0" i="0" u="none" strike="noStrike" cap="none" dirty="0" err="1">
+                <a:solidFill>
+                  <a:srgbClr val="334155"/>
+                </a:solidFill>
+                <a:latin typeface="Inter"/>
+                <a:ea typeface="Inter"/>
+                <a:cs typeface="Inter"/>
+                <a:sym typeface="Inter"/>
+              </a:rPr>
+              <a:t>піддаються</a:t>
+            </a:r>
+            <a:r>
+              <a:rPr lang="en-US" sz="1600" b="0" i="0" u="none" strike="noStrike" cap="none" dirty="0">
+                <a:solidFill>
+                  <a:srgbClr val="334155"/>
+                </a:solidFill>
+                <a:latin typeface="Inter"/>
+                <a:ea typeface="Inter"/>
+                <a:cs typeface="Inter"/>
+                <a:sym typeface="Inter"/>
+              </a:rPr>
+              <a:t> </a:t>
+            </a:r>
+            <a:r>
+              <a:rPr lang="en-US" sz="1600" b="0" i="0" u="none" strike="noStrike" cap="none" dirty="0" err="1">
+                <a:solidFill>
+                  <a:srgbClr val="334155"/>
+                </a:solidFill>
+                <a:latin typeface="Inter"/>
+                <a:ea typeface="Inter"/>
+                <a:cs typeface="Inter"/>
+                <a:sym typeface="Inter"/>
+              </a:rPr>
+              <a:t>емпіричним</a:t>
+            </a:r>
+            <a:r>
+              <a:rPr lang="en-US" sz="1600" b="0" i="0" u="none" strike="noStrike" cap="none" dirty="0">
+                <a:solidFill>
+                  <a:srgbClr val="334155"/>
+                </a:solidFill>
+                <a:latin typeface="Inter"/>
+                <a:ea typeface="Inter"/>
+                <a:cs typeface="Inter"/>
+                <a:sym typeface="Inter"/>
+              </a:rPr>
+              <a:t> </a:t>
+            </a:r>
+            <a:r>
+              <a:rPr lang="en-US" sz="1600" b="0" i="0" u="none" strike="noStrike" cap="none" dirty="0" err="1">
+                <a:solidFill>
+                  <a:srgbClr val="334155"/>
+                </a:solidFill>
+                <a:latin typeface="Inter"/>
+                <a:ea typeface="Inter"/>
+                <a:cs typeface="Inter"/>
+                <a:sym typeface="Inter"/>
+              </a:rPr>
+              <a:t>дослідженням</a:t>
+            </a:r>
+            <a:r>
+              <a:rPr lang="en-US" sz="1600" b="0" i="0" u="none" strike="noStrike" cap="none" dirty="0">
+                <a:solidFill>
+                  <a:srgbClr val="334155"/>
+                </a:solidFill>
+                <a:latin typeface="Inter"/>
+                <a:ea typeface="Inter"/>
+                <a:cs typeface="Inter"/>
+                <a:sym typeface="Inter"/>
+              </a:rPr>
+              <a:t> </a:t>
+            </a:r>
+            <a:r>
+              <a:rPr lang="en-US" sz="1600" b="0" i="0" u="none" strike="noStrike" cap="none" dirty="0" err="1">
+                <a:solidFill>
+                  <a:srgbClr val="334155"/>
+                </a:solidFill>
+                <a:latin typeface="Inter"/>
+                <a:ea typeface="Inter"/>
+                <a:cs typeface="Inter"/>
+                <a:sym typeface="Inter"/>
+              </a:rPr>
+              <a:t>та</a:t>
+            </a:r>
+            <a:r>
+              <a:rPr lang="en-US" sz="1600" b="0" i="0" u="none" strike="noStrike" cap="none" dirty="0">
+                <a:solidFill>
+                  <a:srgbClr val="334155"/>
+                </a:solidFill>
+                <a:latin typeface="Inter"/>
+                <a:ea typeface="Inter"/>
+                <a:cs typeface="Inter"/>
+                <a:sym typeface="Inter"/>
+              </a:rPr>
+              <a:t> </a:t>
+            </a:r>
+            <a:r>
+              <a:rPr lang="en-US" sz="1600" b="0" i="0" u="none" strike="noStrike" cap="none" dirty="0" err="1">
+                <a:solidFill>
+                  <a:srgbClr val="334155"/>
+                </a:solidFill>
+                <a:latin typeface="Inter"/>
+                <a:ea typeface="Inter"/>
+                <a:cs typeface="Inter"/>
+                <a:sym typeface="Inter"/>
+              </a:rPr>
+              <a:t>обов'язково</a:t>
+            </a:r>
+            <a:r>
+              <a:rPr lang="en-US" sz="1600" b="0" i="0" u="none" strike="noStrike" cap="none" dirty="0">
+                <a:solidFill>
+                  <a:srgbClr val="334155"/>
+                </a:solidFill>
+                <a:latin typeface="Inter"/>
+                <a:ea typeface="Inter"/>
+                <a:cs typeface="Inter"/>
+                <a:sym typeface="Inter"/>
+              </a:rPr>
+              <a:t> </a:t>
+            </a:r>
+            <a:r>
+              <a:rPr lang="en-US" sz="1600" b="0" i="0" u="none" strike="noStrike" cap="none" dirty="0" err="1">
+                <a:solidFill>
+                  <a:srgbClr val="334155"/>
+                </a:solidFill>
+                <a:latin typeface="Inter"/>
+                <a:ea typeface="Inter"/>
+                <a:cs typeface="Inter"/>
+                <a:sym typeface="Inter"/>
+              </a:rPr>
+              <a:t>обслуговуються</a:t>
+            </a:r>
+            <a:r>
+              <a:rPr lang="en-US" sz="1600" b="0" i="0" u="none" strike="noStrike" cap="none" dirty="0">
+                <a:solidFill>
+                  <a:srgbClr val="334155"/>
+                </a:solidFill>
+                <a:latin typeface="Inter"/>
+                <a:ea typeface="Inter"/>
+                <a:cs typeface="Inter"/>
+                <a:sym typeface="Inter"/>
+              </a:rPr>
+              <a:t> </a:t>
+            </a:r>
+            <a:r>
+              <a:rPr lang="en-US" sz="1600" b="0" i="0" u="none" strike="noStrike" cap="none" dirty="0" err="1">
+                <a:solidFill>
+                  <a:srgbClr val="334155"/>
+                </a:solidFill>
+                <a:latin typeface="Inter"/>
+                <a:ea typeface="Inter"/>
+                <a:cs typeface="Inter"/>
+                <a:sym typeface="Inter"/>
+              </a:rPr>
+              <a:t>під</a:t>
+            </a:r>
+            <a:r>
+              <a:rPr lang="en-US" sz="1600" b="0" i="0" u="none" strike="noStrike" cap="none" dirty="0">
+                <a:solidFill>
+                  <a:srgbClr val="334155"/>
+                </a:solidFill>
+                <a:latin typeface="Inter"/>
+                <a:ea typeface="Inter"/>
+                <a:cs typeface="Inter"/>
+                <a:sym typeface="Inter"/>
+              </a:rPr>
+              <a:t> </a:t>
+            </a:r>
+            <a:r>
+              <a:rPr lang="en-US" sz="1600" b="0" i="0" u="none" strike="noStrike" cap="none" dirty="0" err="1">
+                <a:solidFill>
+                  <a:srgbClr val="334155"/>
+                </a:solidFill>
+                <a:latin typeface="Inter"/>
+                <a:ea typeface="Inter"/>
+                <a:cs typeface="Inter"/>
+                <a:sym typeface="Inter"/>
+              </a:rPr>
+              <a:t>час</a:t>
+            </a:r>
+            <a:r>
+              <a:rPr lang="en-US" sz="1600" b="0" i="0" u="none" strike="noStrike" cap="none" dirty="0">
+                <a:solidFill>
+                  <a:srgbClr val="334155"/>
+                </a:solidFill>
+                <a:latin typeface="Inter"/>
+                <a:ea typeface="Inter"/>
+                <a:cs typeface="Inter"/>
+                <a:sym typeface="Inter"/>
+              </a:rPr>
+              <a:t> </a:t>
+            </a:r>
+            <a:r>
+              <a:rPr lang="en-US" sz="1600" b="0" i="0" u="none" strike="noStrike" cap="none" dirty="0" err="1">
+                <a:solidFill>
+                  <a:srgbClr val="334155"/>
+                </a:solidFill>
+                <a:latin typeface="Inter"/>
+                <a:ea typeface="Inter"/>
+                <a:cs typeface="Inter"/>
+                <a:sym typeface="Inter"/>
+              </a:rPr>
+              <a:t>експлуатації</a:t>
+            </a:r>
+            <a:r>
+              <a:rPr lang="en-US" sz="1600" b="0" i="0" u="none" strike="noStrike" cap="none" dirty="0">
+                <a:solidFill>
+                  <a:srgbClr val="334155"/>
+                </a:solidFill>
+                <a:latin typeface="Inter"/>
+                <a:ea typeface="Inter"/>
+                <a:cs typeface="Inter"/>
+                <a:sym typeface="Inter"/>
+              </a:rPr>
+              <a:t>.</a:t>
+            </a:r>
+            <a:endParaRPr sz="1600" dirty="0"/>
+          </a:p>
+        </p:txBody>
+      </p:sp>
+    </p:spTree>
+    <p:extLst>
+      <p:ext uri="{BB962C8B-B14F-4D97-AF65-F5344CB8AC3E}">
+        <p14:creationId xmlns:p14="http://schemas.microsoft.com/office/powerpoint/2010/main" val="1994771468"/>
+      </p:ext>
+    </p:extLst>
+  </p:cSld>
+  <p:clrMapOvr>
+    <a:masterClrMapping/>
+  </p:clrMapOvr>
+</p:sld>
+</file>
+
+<file path=ppt/slides/slide5.xml><?xml version="1.0" encoding="utf-8"?>
+<p:sld xmlns:a="http://schemas.openxmlformats.org/drawingml/2006/main" xmlns:r="http://schemas.openxmlformats.org/officeDocument/2006/relationships" xmlns:p="http://schemas.openxmlformats.org/presentationml/2006/main">
+  <p:cSld>
+    <p:spTree>
+      <p:nvGrpSpPr>
+        <p:cNvPr id="1" name=""/>
+        <p:cNvGrpSpPr/>
+        <p:nvPr/>
+      </p:nvGrpSpPr>
+      <p:grpSpPr>
+        <a:xfrm>
+          <a:off x="0" y="0"/>
+          <a:ext cx="0" cy="0"/>
+          <a:chOff x="0" y="0"/>
+          <a:chExt cx="0" cy="0"/>
+        </a:xfrm>
+      </p:grpSpPr>
+      <p:sp>
+        <p:nvSpPr>
+          <p:cNvPr id="2" name="Прямоугольник 1"/>
+          <p:cNvSpPr/>
+          <p:nvPr/>
+        </p:nvSpPr>
+        <p:spPr>
+          <a:xfrm>
+            <a:off x="2587162" y="162715"/>
+            <a:ext cx="5242141" cy="424732"/>
+          </a:xfrm>
+          <a:prstGeom prst="rect">
+            <a:avLst/>
+          </a:prstGeom>
+        </p:spPr>
+        <p:txBody>
+          <a:bodyPr wrap="none">
+            <a:spAutoFit/>
+          </a:bodyPr>
+          <a:lstStyle/>
+          <a:p>
+            <a:pPr lvl="0">
+              <a:lnSpc>
+                <a:spcPct val="120000"/>
+              </a:lnSpc>
+            </a:pPr>
+            <a:r>
+              <a:rPr lang="ru-RU" b="1" dirty="0" err="1">
+                <a:solidFill>
+                  <a:srgbClr val="0F172A"/>
+                </a:solidFill>
+                <a:latin typeface="Plus Jakarta Sans"/>
+                <a:ea typeface="Plus Jakarta Sans"/>
+                <a:cs typeface="Plus Jakarta Sans"/>
+                <a:sym typeface="Plus Jakarta Sans"/>
+              </a:rPr>
+              <a:t>Інженерна</a:t>
+            </a:r>
+            <a:r>
+              <a:rPr lang="ru-RU" b="1" dirty="0">
+                <a:solidFill>
+                  <a:srgbClr val="0F172A"/>
+                </a:solidFill>
+                <a:latin typeface="Plus Jakarta Sans"/>
+                <a:ea typeface="Plus Jakarta Sans"/>
+                <a:cs typeface="Plus Jakarta Sans"/>
+                <a:sym typeface="Plus Jakarta Sans"/>
+              </a:rPr>
+              <a:t> </a:t>
+            </a:r>
+            <a:r>
+              <a:rPr lang="ru-RU" b="1" dirty="0" err="1">
+                <a:solidFill>
+                  <a:srgbClr val="0F172A"/>
+                </a:solidFill>
+                <a:latin typeface="Plus Jakarta Sans"/>
+                <a:ea typeface="Plus Jakarta Sans"/>
+                <a:cs typeface="Plus Jakarta Sans"/>
+                <a:sym typeface="Plus Jakarta Sans"/>
+              </a:rPr>
+              <a:t>діяльність</a:t>
+            </a:r>
+            <a:r>
+              <a:rPr lang="ru-RU" b="1" dirty="0">
+                <a:solidFill>
+                  <a:srgbClr val="0F172A"/>
+                </a:solidFill>
+                <a:latin typeface="Plus Jakarta Sans"/>
+                <a:ea typeface="Plus Jakarta Sans"/>
+                <a:cs typeface="Plus Jakarta Sans"/>
+                <a:sym typeface="Plus Jakarta Sans"/>
+              </a:rPr>
+              <a:t> у </a:t>
+            </a:r>
+            <a:r>
+              <a:rPr lang="ru-RU" b="1" dirty="0" err="1">
+                <a:solidFill>
+                  <a:srgbClr val="0F172A"/>
+                </a:solidFill>
+                <a:latin typeface="Plus Jakarta Sans"/>
+                <a:ea typeface="Plus Jakarta Sans"/>
+                <a:cs typeface="Plus Jakarta Sans"/>
+                <a:sym typeface="Plus Jakarta Sans"/>
+              </a:rPr>
+              <a:t>контексті</a:t>
+            </a:r>
+            <a:r>
+              <a:rPr lang="ru-RU" b="1" dirty="0">
+                <a:solidFill>
+                  <a:srgbClr val="0F172A"/>
+                </a:solidFill>
+                <a:latin typeface="Plus Jakarta Sans"/>
+                <a:ea typeface="Plus Jakarta Sans"/>
+                <a:cs typeface="Plus Jakarta Sans"/>
+                <a:sym typeface="Plus Jakarta Sans"/>
+              </a:rPr>
+              <a:t> </a:t>
+            </a:r>
+            <a:r>
+              <a:rPr lang="ru-RU" b="1" dirty="0" err="1">
+                <a:solidFill>
+                  <a:srgbClr val="0F172A"/>
+                </a:solidFill>
+                <a:latin typeface="Plus Jakarta Sans"/>
+                <a:ea typeface="Plus Jakarta Sans"/>
+                <a:cs typeface="Plus Jakarta Sans"/>
+                <a:sym typeface="Plus Jakarta Sans"/>
+              </a:rPr>
+              <a:t>технологій</a:t>
+            </a:r>
+            <a:endParaRPr lang="ru-RU" dirty="0"/>
+          </a:p>
+        </p:txBody>
+      </p:sp>
+      <p:pic>
+        <p:nvPicPr>
+          <p:cNvPr id="3" name="Google Shape;136;p16" descr="image.png"/>
+          <p:cNvPicPr preferRelativeResize="0"/>
+          <p:nvPr/>
+        </p:nvPicPr>
+        <p:blipFill rotWithShape="1">
+          <a:blip r:embed="rId2">
+            <a:alphaModFix/>
+          </a:blip>
+          <a:srcRect/>
+          <a:stretch/>
+        </p:blipFill>
+        <p:spPr>
+          <a:xfrm>
+            <a:off x="1259797" y="751572"/>
+            <a:ext cx="9588715" cy="5039628"/>
+          </a:xfrm>
+          <a:prstGeom prst="rect">
+            <a:avLst/>
+          </a:prstGeom>
+          <a:noFill/>
+          <a:ln>
+            <a:noFill/>
+          </a:ln>
+        </p:spPr>
+      </p:pic>
+    </p:spTree>
+    <p:extLst>
+      <p:ext uri="{BB962C8B-B14F-4D97-AF65-F5344CB8AC3E}">
+        <p14:creationId xmlns:p14="http://schemas.microsoft.com/office/powerpoint/2010/main" val="3837752466"/>
+      </p:ext>
+    </p:extLst>
+  </p:cSld>
+  <p:clrMapOvr>
+    <a:masterClrMapping/>
+  </p:clrMapOvr>
+</p:sld>
+</file>
+
+<file path=ppt/slides/slide6.xml><?xml version="1.0" encoding="utf-8"?>
 <p:sld xmlns:a="http://schemas.openxmlformats.org/drawingml/2006/main" xmlns:r="http://schemas.openxmlformats.org/officeDocument/2006/relationships" xmlns:p="http://schemas.openxmlformats.org/presentationml/2006/main">
   <p:cSld name="Slide 4">
     <p:spTree>
@@ -3904,7 +6967,7 @@
           <a:bodyPr wrap="none" lIns="0" tIns="0" rIns="0" bIns="0" rtlCol="0" anchor="t"/>
           <a:lstStyle/>
           <a:p>
-            <a:pPr algn="l" indent="0" marL="0">
+            <a:pPr marL="0" indent="0" algn="l">
               <a:lnSpc>
                 <a:spcPct val="104000"/>
               </a:lnSpc>
@@ -3927,14 +6990,14 @@
       </p:sp>
       <p:pic>
         <p:nvPicPr>
-          <p:cNvPr id="3" name="Image 0" descr="preencoded.png">    </p:cNvPr>
+          <p:cNvPr id="3" name="Image 0" descr="preencoded.png"/>
           <p:cNvPicPr>
             <a:picLocks noChangeAspect="1"/>
           </p:cNvPicPr>
           <p:nvPr/>
         </p:nvPicPr>
         <p:blipFill>
-          <a:blip r:embed="rId1"/>
+          <a:blip r:embed="rId3"/>
           <a:stretch>
             <a:fillRect/>
           </a:stretch>
@@ -3970,7 +7033,7 @@
           <a:bodyPr wrap="none" lIns="0" tIns="0" rIns="0" bIns="0" rtlCol="0" anchor="t"/>
           <a:lstStyle/>
           <a:p>
-            <a:pPr algn="ctr" indent="0" marL="0">
+            <a:pPr marL="0" indent="0" algn="ctr">
               <a:lnSpc>
                 <a:spcPct val="104000"/>
               </a:lnSpc>
@@ -4012,7 +7075,7 @@
           <a:bodyPr wrap="none" lIns="0" tIns="0" rIns="0" bIns="0" rtlCol="0" anchor="t"/>
           <a:lstStyle/>
           <a:p>
-            <a:pPr algn="ctr" indent="0" marL="0">
+            <a:pPr marL="0" indent="0" algn="ctr">
               <a:lnSpc>
                 <a:spcPct val="104000"/>
               </a:lnSpc>
@@ -4056,7 +7119,7 @@
           </a:bodyPr>
           <a:lstStyle/>
           <a:p>
-            <a:pPr algn="ctr" indent="0" marL="0">
+            <a:pPr marL="0" indent="0" algn="ctr">
               <a:lnSpc>
                 <a:spcPct val="104000"/>
               </a:lnSpc>
@@ -4098,7 +7161,7 @@
           <a:bodyPr wrap="none" lIns="0" tIns="0" rIns="0" bIns="0" rtlCol="0" anchor="t"/>
           <a:lstStyle/>
           <a:p>
-            <a:pPr algn="ctr" indent="0" marL="0">
+            <a:pPr marL="0" indent="0" algn="ctr">
               <a:lnSpc>
                 <a:spcPct val="104000"/>
               </a:lnSpc>
@@ -4127,8 +7190,8 @@
         </p:nvSpPr>
         <p:spPr>
           <a:xfrm>
-            <a:off x="661475" y="5478562"/>
-            <a:ext cx="10868745" cy="763786"/>
+            <a:off x="692458" y="4696968"/>
+            <a:ext cx="10837762" cy="1545379"/>
           </a:xfrm>
           <a:prstGeom prst="rect">
             <a:avLst/>
@@ -4138,35 +7201,392 @@
         </p:spPr>
         <p:txBody>
           <a:bodyPr wrap="square" lIns="0" tIns="0" rIns="0" bIns="0" rtlCol="0" anchor="t">
-            <a:normAutofit/>
+            <a:noAutofit/>
           </a:bodyPr>
           <a:lstStyle/>
           <a:p>
-            <a:pPr algn="l" indent="0" marL="0">
+            <a:pPr marL="0" indent="0" algn="l">
               <a:lnSpc>
                 <a:spcPct val="126000"/>
               </a:lnSpc>
               <a:buNone/>
             </a:pPr>
             <a:r>
-              <a:rPr lang="en-US" sz="1300" dirty="0">
-                <a:solidFill>
-                  <a:srgbClr val="2C2926"/>
-                </a:solidFill>
-                <a:latin typeface="Inter" pitchFamily="34" charset="0"/>
-                <a:ea typeface="Inter" pitchFamily="34" charset="-122"/>
-                <a:cs typeface="Inter" pitchFamily="34" charset="-120"/>
-              </a:rPr>
-              <a:t>Проектування включає експертні методи оцінки рішень, валідацію гіпотез, теорію абстрагування та керування ресурсами. Базисом сучасної інженерії стали </a:t>
-            </a:r>
-            <a:pPr algn="l" indent="0" marL="0">
-              <a:lnSpc>
-                <a:spcPct val="126000"/>
-              </a:lnSpc>
-              <a:buNone/>
-            </a:pPr>
-            <a:r>
-              <a:rPr lang="en-US" sz="1300" dirty="0">
+              <a:rPr lang="en-US" sz="1600" dirty="0" err="1" smtClean="0">
+                <a:solidFill>
+                  <a:srgbClr val="2C2926"/>
+                </a:solidFill>
+                <a:latin typeface="Inter" pitchFamily="34" charset="0"/>
+                <a:ea typeface="Inter" pitchFamily="34" charset="-122"/>
+                <a:cs typeface="Inter" pitchFamily="34" charset="-120"/>
+              </a:rPr>
+              <a:t>Проектування</a:t>
+            </a:r>
+            <a:r>
+              <a:rPr lang="en-US" sz="1600" dirty="0" smtClean="0">
+                <a:solidFill>
+                  <a:srgbClr val="2C2926"/>
+                </a:solidFill>
+                <a:latin typeface="Inter" pitchFamily="34" charset="0"/>
+                <a:ea typeface="Inter" pitchFamily="34" charset="-122"/>
+                <a:cs typeface="Inter" pitchFamily="34" charset="-120"/>
+              </a:rPr>
+              <a:t> </a:t>
+            </a:r>
+            <a:r>
+              <a:rPr lang="en-US" sz="1600" dirty="0" err="1" smtClean="0">
+                <a:solidFill>
+                  <a:srgbClr val="2C2926"/>
+                </a:solidFill>
+                <a:latin typeface="Inter" pitchFamily="34" charset="0"/>
+                <a:ea typeface="Inter" pitchFamily="34" charset="-122"/>
+                <a:cs typeface="Inter" pitchFamily="34" charset="-120"/>
+              </a:rPr>
+              <a:t>включає</a:t>
+            </a:r>
+            <a:r>
+              <a:rPr lang="en-US" sz="1600" dirty="0" smtClean="0">
+                <a:solidFill>
+                  <a:srgbClr val="2C2926"/>
+                </a:solidFill>
+                <a:latin typeface="Inter" pitchFamily="34" charset="0"/>
+                <a:ea typeface="Inter" pitchFamily="34" charset="-122"/>
+                <a:cs typeface="Inter" pitchFamily="34" charset="-120"/>
+              </a:rPr>
+              <a:t> </a:t>
+            </a:r>
+            <a:r>
+              <a:rPr lang="en-US" sz="1600" dirty="0" err="1" smtClean="0">
+                <a:solidFill>
+                  <a:srgbClr val="2C2926"/>
+                </a:solidFill>
+                <a:latin typeface="Inter" pitchFamily="34" charset="0"/>
+                <a:ea typeface="Inter" pitchFamily="34" charset="-122"/>
+                <a:cs typeface="Inter" pitchFamily="34" charset="-120"/>
+              </a:rPr>
+              <a:t>експертні</a:t>
+            </a:r>
+            <a:r>
+              <a:rPr lang="en-US" sz="1600" dirty="0" smtClean="0">
+                <a:solidFill>
+                  <a:srgbClr val="2C2926"/>
+                </a:solidFill>
+                <a:latin typeface="Inter" pitchFamily="34" charset="0"/>
+                <a:ea typeface="Inter" pitchFamily="34" charset="-122"/>
+                <a:cs typeface="Inter" pitchFamily="34" charset="-120"/>
+              </a:rPr>
+              <a:t> </a:t>
+            </a:r>
+            <a:r>
+              <a:rPr lang="en-US" sz="1600" dirty="0" err="1" smtClean="0">
+                <a:solidFill>
+                  <a:srgbClr val="2C2926"/>
+                </a:solidFill>
+                <a:latin typeface="Inter" pitchFamily="34" charset="0"/>
+                <a:ea typeface="Inter" pitchFamily="34" charset="-122"/>
+                <a:cs typeface="Inter" pitchFamily="34" charset="-120"/>
+              </a:rPr>
+              <a:t>методи</a:t>
+            </a:r>
+            <a:r>
+              <a:rPr lang="en-US" sz="1600" dirty="0" smtClean="0">
+                <a:solidFill>
+                  <a:srgbClr val="2C2926"/>
+                </a:solidFill>
+                <a:latin typeface="Inter" pitchFamily="34" charset="0"/>
+                <a:ea typeface="Inter" pitchFamily="34" charset="-122"/>
+                <a:cs typeface="Inter" pitchFamily="34" charset="-120"/>
+              </a:rPr>
+              <a:t> </a:t>
+            </a:r>
+            <a:r>
+              <a:rPr lang="en-US" sz="1600" dirty="0" err="1" smtClean="0">
+                <a:solidFill>
+                  <a:srgbClr val="2C2926"/>
+                </a:solidFill>
+                <a:latin typeface="Inter" pitchFamily="34" charset="0"/>
+                <a:ea typeface="Inter" pitchFamily="34" charset="-122"/>
+                <a:cs typeface="Inter" pitchFamily="34" charset="-120"/>
+              </a:rPr>
+              <a:t>оцінки</a:t>
+            </a:r>
+            <a:r>
+              <a:rPr lang="en-US" sz="1600" dirty="0" smtClean="0">
+                <a:solidFill>
+                  <a:srgbClr val="2C2926"/>
+                </a:solidFill>
+                <a:latin typeface="Inter" pitchFamily="34" charset="0"/>
+                <a:ea typeface="Inter" pitchFamily="34" charset="-122"/>
+                <a:cs typeface="Inter" pitchFamily="34" charset="-120"/>
+              </a:rPr>
+              <a:t> </a:t>
+            </a:r>
+            <a:r>
+              <a:rPr lang="en-US" sz="1600" dirty="0" err="1" smtClean="0">
+                <a:solidFill>
+                  <a:srgbClr val="2C2926"/>
+                </a:solidFill>
+                <a:latin typeface="Inter" pitchFamily="34" charset="0"/>
+                <a:ea typeface="Inter" pitchFamily="34" charset="-122"/>
+                <a:cs typeface="Inter" pitchFamily="34" charset="-120"/>
+              </a:rPr>
+              <a:t>рішень</a:t>
+            </a:r>
+            <a:r>
+              <a:rPr lang="en-US" sz="1600" dirty="0" smtClean="0">
+                <a:solidFill>
+                  <a:srgbClr val="2C2926"/>
+                </a:solidFill>
+                <a:latin typeface="Inter" pitchFamily="34" charset="0"/>
+                <a:ea typeface="Inter" pitchFamily="34" charset="-122"/>
+                <a:cs typeface="Inter" pitchFamily="34" charset="-120"/>
+              </a:rPr>
+              <a:t>, </a:t>
+            </a:r>
+            <a:r>
+              <a:rPr lang="en-US" sz="1600" dirty="0" err="1" smtClean="0">
+                <a:solidFill>
+                  <a:srgbClr val="2C2926"/>
+                </a:solidFill>
+                <a:latin typeface="Inter" pitchFamily="34" charset="0"/>
+                <a:ea typeface="Inter" pitchFamily="34" charset="-122"/>
+                <a:cs typeface="Inter" pitchFamily="34" charset="-120"/>
+              </a:rPr>
+              <a:t>валідацію</a:t>
+            </a:r>
+            <a:r>
+              <a:rPr lang="en-US" sz="1600" dirty="0" smtClean="0">
+                <a:solidFill>
+                  <a:srgbClr val="2C2926"/>
+                </a:solidFill>
+                <a:latin typeface="Inter" pitchFamily="34" charset="0"/>
+                <a:ea typeface="Inter" pitchFamily="34" charset="-122"/>
+                <a:cs typeface="Inter" pitchFamily="34" charset="-120"/>
+              </a:rPr>
+              <a:t> </a:t>
+            </a:r>
+            <a:r>
+              <a:rPr lang="en-US" sz="1600" dirty="0" err="1" smtClean="0">
+                <a:solidFill>
+                  <a:srgbClr val="2C2926"/>
+                </a:solidFill>
+                <a:latin typeface="Inter" pitchFamily="34" charset="0"/>
+                <a:ea typeface="Inter" pitchFamily="34" charset="-122"/>
+                <a:cs typeface="Inter" pitchFamily="34" charset="-120"/>
+              </a:rPr>
+              <a:t>гіпотез</a:t>
+            </a:r>
+            <a:r>
+              <a:rPr lang="en-US" sz="1600" dirty="0" smtClean="0">
+                <a:solidFill>
+                  <a:srgbClr val="2C2926"/>
+                </a:solidFill>
+                <a:latin typeface="Inter" pitchFamily="34" charset="0"/>
+                <a:ea typeface="Inter" pitchFamily="34" charset="-122"/>
+                <a:cs typeface="Inter" pitchFamily="34" charset="-120"/>
+              </a:rPr>
+              <a:t>, </a:t>
+            </a:r>
+            <a:r>
+              <a:rPr lang="en-US" sz="1600" dirty="0" err="1" smtClean="0">
+                <a:solidFill>
+                  <a:srgbClr val="2C2926"/>
+                </a:solidFill>
+                <a:latin typeface="Inter" pitchFamily="34" charset="0"/>
+                <a:ea typeface="Inter" pitchFamily="34" charset="-122"/>
+                <a:cs typeface="Inter" pitchFamily="34" charset="-120"/>
+              </a:rPr>
+              <a:t>теорію</a:t>
+            </a:r>
+            <a:r>
+              <a:rPr lang="en-US" sz="1600" dirty="0" smtClean="0">
+                <a:solidFill>
+                  <a:srgbClr val="2C2926"/>
+                </a:solidFill>
+                <a:latin typeface="Inter" pitchFamily="34" charset="0"/>
+                <a:ea typeface="Inter" pitchFamily="34" charset="-122"/>
+                <a:cs typeface="Inter" pitchFamily="34" charset="-120"/>
+              </a:rPr>
+              <a:t> </a:t>
+            </a:r>
+            <a:r>
+              <a:rPr lang="en-US" sz="1600" dirty="0" err="1" smtClean="0">
+                <a:solidFill>
+                  <a:srgbClr val="2C2926"/>
+                </a:solidFill>
+                <a:latin typeface="Inter" pitchFamily="34" charset="0"/>
+                <a:ea typeface="Inter" pitchFamily="34" charset="-122"/>
+                <a:cs typeface="Inter" pitchFamily="34" charset="-120"/>
+              </a:rPr>
+              <a:t>абстрагування</a:t>
+            </a:r>
+            <a:r>
+              <a:rPr lang="en-US" sz="1600" dirty="0" smtClean="0">
+                <a:solidFill>
+                  <a:srgbClr val="2C2926"/>
+                </a:solidFill>
+                <a:latin typeface="Inter" pitchFamily="34" charset="0"/>
+                <a:ea typeface="Inter" pitchFamily="34" charset="-122"/>
+                <a:cs typeface="Inter" pitchFamily="34" charset="-120"/>
+              </a:rPr>
+              <a:t> </a:t>
+            </a:r>
+            <a:r>
+              <a:rPr lang="en-US" sz="1600" dirty="0" err="1" smtClean="0">
+                <a:solidFill>
+                  <a:srgbClr val="2C2926"/>
+                </a:solidFill>
+                <a:latin typeface="Inter" pitchFamily="34" charset="0"/>
+                <a:ea typeface="Inter" pitchFamily="34" charset="-122"/>
+                <a:cs typeface="Inter" pitchFamily="34" charset="-120"/>
+              </a:rPr>
+              <a:t>та</a:t>
+            </a:r>
+            <a:r>
+              <a:rPr lang="en-US" sz="1600" dirty="0" smtClean="0">
+                <a:solidFill>
+                  <a:srgbClr val="2C2926"/>
+                </a:solidFill>
+                <a:latin typeface="Inter" pitchFamily="34" charset="0"/>
+                <a:ea typeface="Inter" pitchFamily="34" charset="-122"/>
+                <a:cs typeface="Inter" pitchFamily="34" charset="-120"/>
+              </a:rPr>
+              <a:t> </a:t>
+            </a:r>
+            <a:r>
+              <a:rPr lang="en-US" sz="1600" dirty="0" err="1" smtClean="0">
+                <a:solidFill>
+                  <a:srgbClr val="2C2926"/>
+                </a:solidFill>
+                <a:latin typeface="Inter" pitchFamily="34" charset="0"/>
+                <a:ea typeface="Inter" pitchFamily="34" charset="-122"/>
+                <a:cs typeface="Inter" pitchFamily="34" charset="-120"/>
+              </a:rPr>
+              <a:t>керування</a:t>
+            </a:r>
+            <a:r>
+              <a:rPr lang="en-US" sz="1600" dirty="0" smtClean="0">
+                <a:solidFill>
+                  <a:srgbClr val="2C2926"/>
+                </a:solidFill>
+                <a:latin typeface="Inter" pitchFamily="34" charset="0"/>
+                <a:ea typeface="Inter" pitchFamily="34" charset="-122"/>
+                <a:cs typeface="Inter" pitchFamily="34" charset="-120"/>
+              </a:rPr>
+              <a:t> </a:t>
+            </a:r>
+            <a:r>
+              <a:rPr lang="en-US" sz="1600" dirty="0" err="1" smtClean="0">
+                <a:solidFill>
+                  <a:srgbClr val="2C2926"/>
+                </a:solidFill>
+                <a:latin typeface="Inter" pitchFamily="34" charset="0"/>
+                <a:ea typeface="Inter" pitchFamily="34" charset="-122"/>
+                <a:cs typeface="Inter" pitchFamily="34" charset="-120"/>
+              </a:rPr>
+              <a:t>ресурсами</a:t>
+            </a:r>
+            <a:r>
+              <a:rPr lang="en-US" sz="1600" dirty="0" smtClean="0">
+                <a:solidFill>
+                  <a:srgbClr val="2C2926"/>
+                </a:solidFill>
+                <a:latin typeface="Inter" pitchFamily="34" charset="0"/>
+                <a:ea typeface="Inter" pitchFamily="34" charset="-122"/>
+                <a:cs typeface="Inter" pitchFamily="34" charset="-120"/>
+              </a:rPr>
+              <a:t>. </a:t>
+            </a:r>
+            <a:r>
+              <a:rPr lang="en-US" sz="1600" dirty="0" err="1" smtClean="0">
+                <a:solidFill>
+                  <a:srgbClr val="2C2926"/>
+                </a:solidFill>
+                <a:latin typeface="Inter" pitchFamily="34" charset="0"/>
+                <a:ea typeface="Inter" pitchFamily="34" charset="-122"/>
+                <a:cs typeface="Inter" pitchFamily="34" charset="-120"/>
+              </a:rPr>
+              <a:t>Базисом</a:t>
+            </a:r>
+            <a:r>
+              <a:rPr lang="en-US" sz="1600" dirty="0" smtClean="0">
+                <a:solidFill>
+                  <a:srgbClr val="2C2926"/>
+                </a:solidFill>
+                <a:latin typeface="Inter" pitchFamily="34" charset="0"/>
+                <a:ea typeface="Inter" pitchFamily="34" charset="-122"/>
+                <a:cs typeface="Inter" pitchFamily="34" charset="-120"/>
+              </a:rPr>
+              <a:t> </a:t>
+            </a:r>
+            <a:r>
+              <a:rPr lang="en-US" sz="1600" dirty="0" err="1" smtClean="0">
+                <a:solidFill>
+                  <a:srgbClr val="2C2926"/>
+                </a:solidFill>
+                <a:latin typeface="Inter" pitchFamily="34" charset="0"/>
+                <a:ea typeface="Inter" pitchFamily="34" charset="-122"/>
+                <a:cs typeface="Inter" pitchFamily="34" charset="-120"/>
+              </a:rPr>
+              <a:t>сучасної</a:t>
+            </a:r>
+            <a:r>
+              <a:rPr lang="en-US" sz="1600" dirty="0" smtClean="0">
+                <a:solidFill>
+                  <a:srgbClr val="2C2926"/>
+                </a:solidFill>
+                <a:latin typeface="Inter" pitchFamily="34" charset="0"/>
+                <a:ea typeface="Inter" pitchFamily="34" charset="-122"/>
+                <a:cs typeface="Inter" pitchFamily="34" charset="-120"/>
+              </a:rPr>
+              <a:t> </a:t>
+            </a:r>
+            <a:r>
+              <a:rPr lang="en-US" sz="1600" dirty="0" err="1" smtClean="0">
+                <a:solidFill>
+                  <a:srgbClr val="2C2926"/>
+                </a:solidFill>
+                <a:latin typeface="Inter" pitchFamily="34" charset="0"/>
+                <a:ea typeface="Inter" pitchFamily="34" charset="-122"/>
+                <a:cs typeface="Inter" pitchFamily="34" charset="-120"/>
+              </a:rPr>
+              <a:t>інженерії</a:t>
+            </a:r>
+            <a:r>
+              <a:rPr lang="en-US" sz="1600" dirty="0" smtClean="0">
+                <a:solidFill>
+                  <a:srgbClr val="2C2926"/>
+                </a:solidFill>
+                <a:latin typeface="Inter" pitchFamily="34" charset="0"/>
+                <a:ea typeface="Inter" pitchFamily="34" charset="-122"/>
+                <a:cs typeface="Inter" pitchFamily="34" charset="-120"/>
+              </a:rPr>
+              <a:t> </a:t>
+            </a:r>
+            <a:r>
+              <a:rPr lang="en-US" sz="1600" dirty="0" err="1" smtClean="0">
+                <a:solidFill>
+                  <a:srgbClr val="2C2926"/>
+                </a:solidFill>
+                <a:latin typeface="Inter" pitchFamily="34" charset="0"/>
+                <a:ea typeface="Inter" pitchFamily="34" charset="-122"/>
+                <a:cs typeface="Inter" pitchFamily="34" charset="-120"/>
+              </a:rPr>
+              <a:t>стали</a:t>
+            </a:r>
+            <a:r>
+              <a:rPr lang="en-US" sz="1600" dirty="0" smtClean="0">
+                <a:solidFill>
+                  <a:srgbClr val="2C2926"/>
+                </a:solidFill>
+                <a:latin typeface="Inter" pitchFamily="34" charset="0"/>
+                <a:ea typeface="Inter" pitchFamily="34" charset="-122"/>
+                <a:cs typeface="Inter" pitchFamily="34" charset="-120"/>
+              </a:rPr>
+              <a:t> </a:t>
+            </a:r>
+            <a:r>
+              <a:rPr lang="en-US" sz="1600" dirty="0" err="1" smtClean="0">
                 <a:solidFill>
                   <a:srgbClr val="E7BF6A"/>
                 </a:solidFill>
@@ -4174,26 +7594,405 @@
                 <a:ea typeface="Inter" pitchFamily="34" charset="-122"/>
                 <a:cs typeface="Inter" pitchFamily="34" charset="-120"/>
               </a:rPr>
-              <a:t>компоненти повторного використання (reuse)</a:t>
-            </a:r>
-            <a:pPr algn="l" indent="0" marL="0">
-              <a:lnSpc>
-                <a:spcPct val="126000"/>
-              </a:lnSpc>
-              <a:buNone/>
-            </a:pPr>
-            <a:r>
-              <a:rPr lang="en-US" sz="1300" dirty="0">
-                <a:solidFill>
-                  <a:srgbClr val="2C2926"/>
-                </a:solidFill>
-                <a:latin typeface="Inter" pitchFamily="34" charset="0"/>
-                <a:ea typeface="Inter" pitchFamily="34" charset="-122"/>
-                <a:cs typeface="Inter" pitchFamily="34" charset="-120"/>
-              </a:rPr>
-              <a:t> — аналогічно готовим деталям у промисловості. Характерна ознака — поява нових фахівців: менеджерів, тестувальників, технологів, контролерів проміжних результатів.</a:t>
-            </a:r>
-            <a:endParaRPr lang="en-US" sz="1300" dirty="0"/>
+              <a:t>компоненти</a:t>
+            </a:r>
+            <a:r>
+              <a:rPr lang="en-US" sz="1600" dirty="0" smtClean="0">
+                <a:solidFill>
+                  <a:srgbClr val="E7BF6A"/>
+                </a:solidFill>
+                <a:latin typeface="Inter" pitchFamily="34" charset="0"/>
+                <a:ea typeface="Inter" pitchFamily="34" charset="-122"/>
+                <a:cs typeface="Inter" pitchFamily="34" charset="-120"/>
+              </a:rPr>
+              <a:t> </a:t>
+            </a:r>
+            <a:r>
+              <a:rPr lang="en-US" sz="1600" dirty="0" err="1" smtClean="0">
+                <a:solidFill>
+                  <a:srgbClr val="E7BF6A"/>
+                </a:solidFill>
+                <a:latin typeface="Inter" pitchFamily="34" charset="0"/>
+                <a:ea typeface="Inter" pitchFamily="34" charset="-122"/>
+                <a:cs typeface="Inter" pitchFamily="34" charset="-120"/>
+              </a:rPr>
+              <a:t>повторного</a:t>
+            </a:r>
+            <a:r>
+              <a:rPr lang="en-US" sz="1600" dirty="0" smtClean="0">
+                <a:solidFill>
+                  <a:srgbClr val="E7BF6A"/>
+                </a:solidFill>
+                <a:latin typeface="Inter" pitchFamily="34" charset="0"/>
+                <a:ea typeface="Inter" pitchFamily="34" charset="-122"/>
+                <a:cs typeface="Inter" pitchFamily="34" charset="-120"/>
+              </a:rPr>
+              <a:t> </a:t>
+            </a:r>
+            <a:r>
+              <a:rPr lang="en-US" sz="1600" dirty="0" err="1" smtClean="0">
+                <a:solidFill>
+                  <a:srgbClr val="E7BF6A"/>
+                </a:solidFill>
+                <a:latin typeface="Inter" pitchFamily="34" charset="0"/>
+                <a:ea typeface="Inter" pitchFamily="34" charset="-122"/>
+                <a:cs typeface="Inter" pitchFamily="34" charset="-120"/>
+              </a:rPr>
+              <a:t>використання</a:t>
+            </a:r>
+            <a:r>
+              <a:rPr lang="en-US" sz="1600" dirty="0" smtClean="0">
+                <a:solidFill>
+                  <a:srgbClr val="E7BF6A"/>
+                </a:solidFill>
+                <a:latin typeface="Inter" pitchFamily="34" charset="0"/>
+                <a:ea typeface="Inter" pitchFamily="34" charset="-122"/>
+                <a:cs typeface="Inter" pitchFamily="34" charset="-120"/>
+              </a:rPr>
+              <a:t> (reuse)</a:t>
+            </a:r>
+            <a:r>
+              <a:rPr lang="en-US" sz="1600" dirty="0" smtClean="0">
+                <a:solidFill>
+                  <a:srgbClr val="2C2926"/>
+                </a:solidFill>
+                <a:latin typeface="Inter" pitchFamily="34" charset="0"/>
+                <a:ea typeface="Inter" pitchFamily="34" charset="-122"/>
+                <a:cs typeface="Inter" pitchFamily="34" charset="-120"/>
+              </a:rPr>
+              <a:t> — </a:t>
+            </a:r>
+            <a:r>
+              <a:rPr lang="en-US" sz="1600" dirty="0" err="1" smtClean="0">
+                <a:solidFill>
+                  <a:srgbClr val="2C2926"/>
+                </a:solidFill>
+                <a:latin typeface="Inter" pitchFamily="34" charset="0"/>
+                <a:ea typeface="Inter" pitchFamily="34" charset="-122"/>
+                <a:cs typeface="Inter" pitchFamily="34" charset="-120"/>
+              </a:rPr>
+              <a:t>аналогічно</a:t>
+            </a:r>
+            <a:r>
+              <a:rPr lang="en-US" sz="1600" dirty="0" smtClean="0">
+                <a:solidFill>
+                  <a:srgbClr val="2C2926"/>
+                </a:solidFill>
+                <a:latin typeface="Inter" pitchFamily="34" charset="0"/>
+                <a:ea typeface="Inter" pitchFamily="34" charset="-122"/>
+                <a:cs typeface="Inter" pitchFamily="34" charset="-120"/>
+              </a:rPr>
+              <a:t> </a:t>
+            </a:r>
+            <a:r>
+              <a:rPr lang="en-US" sz="1600" dirty="0" err="1" smtClean="0">
+                <a:solidFill>
+                  <a:srgbClr val="2C2926"/>
+                </a:solidFill>
+                <a:latin typeface="Inter" pitchFamily="34" charset="0"/>
+                <a:ea typeface="Inter" pitchFamily="34" charset="-122"/>
+                <a:cs typeface="Inter" pitchFamily="34" charset="-120"/>
+              </a:rPr>
+              <a:t>готовим</a:t>
+            </a:r>
+            <a:r>
+              <a:rPr lang="en-US" sz="1600" dirty="0" smtClean="0">
+                <a:solidFill>
+                  <a:srgbClr val="2C2926"/>
+                </a:solidFill>
+                <a:latin typeface="Inter" pitchFamily="34" charset="0"/>
+                <a:ea typeface="Inter" pitchFamily="34" charset="-122"/>
+                <a:cs typeface="Inter" pitchFamily="34" charset="-120"/>
+              </a:rPr>
+              <a:t> </a:t>
+            </a:r>
+            <a:r>
+              <a:rPr lang="en-US" sz="1600" dirty="0" err="1" smtClean="0">
+                <a:solidFill>
+                  <a:srgbClr val="2C2926"/>
+                </a:solidFill>
+                <a:latin typeface="Inter" pitchFamily="34" charset="0"/>
+                <a:ea typeface="Inter" pitchFamily="34" charset="-122"/>
+                <a:cs typeface="Inter" pitchFamily="34" charset="-120"/>
+              </a:rPr>
+              <a:t>деталям</a:t>
+            </a:r>
+            <a:r>
+              <a:rPr lang="en-US" sz="1600" dirty="0" smtClean="0">
+                <a:solidFill>
+                  <a:srgbClr val="2C2926"/>
+                </a:solidFill>
+                <a:latin typeface="Inter" pitchFamily="34" charset="0"/>
+                <a:ea typeface="Inter" pitchFamily="34" charset="-122"/>
+                <a:cs typeface="Inter" pitchFamily="34" charset="-120"/>
+              </a:rPr>
+              <a:t> у </a:t>
+            </a:r>
+            <a:r>
+              <a:rPr lang="en-US" sz="1600" dirty="0" err="1" smtClean="0">
+                <a:solidFill>
+                  <a:srgbClr val="2C2926"/>
+                </a:solidFill>
+                <a:latin typeface="Inter" pitchFamily="34" charset="0"/>
+                <a:ea typeface="Inter" pitchFamily="34" charset="-122"/>
+                <a:cs typeface="Inter" pitchFamily="34" charset="-120"/>
+              </a:rPr>
+              <a:t>промисловості</a:t>
+            </a:r>
+            <a:r>
+              <a:rPr lang="en-US" sz="1600" dirty="0" smtClean="0">
+                <a:solidFill>
+                  <a:srgbClr val="2C2926"/>
+                </a:solidFill>
+                <a:latin typeface="Inter" pitchFamily="34" charset="0"/>
+                <a:ea typeface="Inter" pitchFamily="34" charset="-122"/>
+                <a:cs typeface="Inter" pitchFamily="34" charset="-120"/>
+              </a:rPr>
+              <a:t>. </a:t>
+            </a:r>
+            <a:r>
+              <a:rPr lang="en-US" sz="1600" dirty="0" err="1" smtClean="0">
+                <a:solidFill>
+                  <a:srgbClr val="2C2926"/>
+                </a:solidFill>
+                <a:latin typeface="Inter" pitchFamily="34" charset="0"/>
+                <a:ea typeface="Inter" pitchFamily="34" charset="-122"/>
+                <a:cs typeface="Inter" pitchFamily="34" charset="-120"/>
+              </a:rPr>
+              <a:t>Характерна</a:t>
+            </a:r>
+            <a:r>
+              <a:rPr lang="en-US" sz="1600" dirty="0" smtClean="0">
+                <a:solidFill>
+                  <a:srgbClr val="2C2926"/>
+                </a:solidFill>
+                <a:latin typeface="Inter" pitchFamily="34" charset="0"/>
+                <a:ea typeface="Inter" pitchFamily="34" charset="-122"/>
+                <a:cs typeface="Inter" pitchFamily="34" charset="-120"/>
+              </a:rPr>
+              <a:t> </a:t>
+            </a:r>
+            <a:r>
+              <a:rPr lang="en-US" sz="1600" dirty="0" err="1" smtClean="0">
+                <a:solidFill>
+                  <a:srgbClr val="2C2926"/>
+                </a:solidFill>
+                <a:latin typeface="Inter" pitchFamily="34" charset="0"/>
+                <a:ea typeface="Inter" pitchFamily="34" charset="-122"/>
+                <a:cs typeface="Inter" pitchFamily="34" charset="-120"/>
+              </a:rPr>
+              <a:t>ознака</a:t>
+            </a:r>
+            <a:r>
+              <a:rPr lang="en-US" sz="1600" dirty="0" smtClean="0">
+                <a:solidFill>
+                  <a:srgbClr val="2C2926"/>
+                </a:solidFill>
+                <a:latin typeface="Inter" pitchFamily="34" charset="0"/>
+                <a:ea typeface="Inter" pitchFamily="34" charset="-122"/>
+                <a:cs typeface="Inter" pitchFamily="34" charset="-120"/>
+              </a:rPr>
+              <a:t> — </a:t>
+            </a:r>
+            <a:r>
+              <a:rPr lang="en-US" sz="1600" dirty="0" err="1" smtClean="0">
+                <a:solidFill>
+                  <a:srgbClr val="2C2926"/>
+                </a:solidFill>
+                <a:latin typeface="Inter" pitchFamily="34" charset="0"/>
+                <a:ea typeface="Inter" pitchFamily="34" charset="-122"/>
+                <a:cs typeface="Inter" pitchFamily="34" charset="-120"/>
+              </a:rPr>
+              <a:t>поява</a:t>
+            </a:r>
+            <a:r>
+              <a:rPr lang="en-US" sz="1600" dirty="0" smtClean="0">
+                <a:solidFill>
+                  <a:srgbClr val="2C2926"/>
+                </a:solidFill>
+                <a:latin typeface="Inter" pitchFamily="34" charset="0"/>
+                <a:ea typeface="Inter" pitchFamily="34" charset="-122"/>
+                <a:cs typeface="Inter" pitchFamily="34" charset="-120"/>
+              </a:rPr>
+              <a:t> </a:t>
+            </a:r>
+            <a:r>
+              <a:rPr lang="en-US" sz="1600" dirty="0" err="1" smtClean="0">
+                <a:solidFill>
+                  <a:srgbClr val="2C2926"/>
+                </a:solidFill>
+                <a:latin typeface="Inter" pitchFamily="34" charset="0"/>
+                <a:ea typeface="Inter" pitchFamily="34" charset="-122"/>
+                <a:cs typeface="Inter" pitchFamily="34" charset="-120"/>
+              </a:rPr>
+              <a:t>нових</a:t>
+            </a:r>
+            <a:r>
+              <a:rPr lang="en-US" sz="1600" dirty="0" smtClean="0">
+                <a:solidFill>
+                  <a:srgbClr val="2C2926"/>
+                </a:solidFill>
+                <a:latin typeface="Inter" pitchFamily="34" charset="0"/>
+                <a:ea typeface="Inter" pitchFamily="34" charset="-122"/>
+                <a:cs typeface="Inter" pitchFamily="34" charset="-120"/>
+              </a:rPr>
+              <a:t> </a:t>
+            </a:r>
+            <a:r>
+              <a:rPr lang="en-US" sz="1600" dirty="0" err="1" smtClean="0">
+                <a:solidFill>
+                  <a:srgbClr val="2C2926"/>
+                </a:solidFill>
+                <a:latin typeface="Inter" pitchFamily="34" charset="0"/>
+                <a:ea typeface="Inter" pitchFamily="34" charset="-122"/>
+                <a:cs typeface="Inter" pitchFamily="34" charset="-120"/>
+              </a:rPr>
+              <a:t>фахівців</a:t>
+            </a:r>
+            <a:r>
+              <a:rPr lang="en-US" sz="1600" dirty="0" smtClean="0">
+                <a:solidFill>
+                  <a:srgbClr val="2C2926"/>
+                </a:solidFill>
+                <a:latin typeface="Inter" pitchFamily="34" charset="0"/>
+                <a:ea typeface="Inter" pitchFamily="34" charset="-122"/>
+                <a:cs typeface="Inter" pitchFamily="34" charset="-120"/>
+              </a:rPr>
+              <a:t>: </a:t>
+            </a:r>
+            <a:r>
+              <a:rPr lang="en-US" sz="1600" dirty="0" err="1" smtClean="0">
+                <a:solidFill>
+                  <a:srgbClr val="2C2926"/>
+                </a:solidFill>
+                <a:latin typeface="Inter" pitchFamily="34" charset="0"/>
+                <a:ea typeface="Inter" pitchFamily="34" charset="-122"/>
+                <a:cs typeface="Inter" pitchFamily="34" charset="-120"/>
+              </a:rPr>
+              <a:t>менеджерів</a:t>
+            </a:r>
+            <a:r>
+              <a:rPr lang="en-US" sz="1600" dirty="0" smtClean="0">
+                <a:solidFill>
+                  <a:srgbClr val="2C2926"/>
+                </a:solidFill>
+                <a:latin typeface="Inter" pitchFamily="34" charset="0"/>
+                <a:ea typeface="Inter" pitchFamily="34" charset="-122"/>
+                <a:cs typeface="Inter" pitchFamily="34" charset="-120"/>
+              </a:rPr>
+              <a:t>, </a:t>
+            </a:r>
+            <a:r>
+              <a:rPr lang="en-US" sz="1600" dirty="0" err="1" smtClean="0">
+                <a:solidFill>
+                  <a:srgbClr val="2C2926"/>
+                </a:solidFill>
+                <a:latin typeface="Inter" pitchFamily="34" charset="0"/>
+                <a:ea typeface="Inter" pitchFamily="34" charset="-122"/>
+                <a:cs typeface="Inter" pitchFamily="34" charset="-120"/>
+              </a:rPr>
+              <a:t>тестувальників</a:t>
+            </a:r>
+            <a:r>
+              <a:rPr lang="en-US" sz="1600" dirty="0" smtClean="0">
+                <a:solidFill>
+                  <a:srgbClr val="2C2926"/>
+                </a:solidFill>
+                <a:latin typeface="Inter" pitchFamily="34" charset="0"/>
+                <a:ea typeface="Inter" pitchFamily="34" charset="-122"/>
+                <a:cs typeface="Inter" pitchFamily="34" charset="-120"/>
+              </a:rPr>
+              <a:t>, </a:t>
+            </a:r>
+            <a:r>
+              <a:rPr lang="en-US" sz="1600" dirty="0" err="1" smtClean="0">
+                <a:solidFill>
+                  <a:srgbClr val="2C2926"/>
+                </a:solidFill>
+                <a:latin typeface="Inter" pitchFamily="34" charset="0"/>
+                <a:ea typeface="Inter" pitchFamily="34" charset="-122"/>
+                <a:cs typeface="Inter" pitchFamily="34" charset="-120"/>
+              </a:rPr>
+              <a:t>технологів</a:t>
+            </a:r>
+            <a:r>
+              <a:rPr lang="en-US" sz="1600" dirty="0" smtClean="0">
+                <a:solidFill>
+                  <a:srgbClr val="2C2926"/>
+                </a:solidFill>
+                <a:latin typeface="Inter" pitchFamily="34" charset="0"/>
+                <a:ea typeface="Inter" pitchFamily="34" charset="-122"/>
+                <a:cs typeface="Inter" pitchFamily="34" charset="-120"/>
+              </a:rPr>
+              <a:t>, </a:t>
+            </a:r>
+            <a:r>
+              <a:rPr lang="en-US" sz="1600" dirty="0" err="1" smtClean="0">
+                <a:solidFill>
+                  <a:srgbClr val="2C2926"/>
+                </a:solidFill>
+                <a:latin typeface="Inter" pitchFamily="34" charset="0"/>
+                <a:ea typeface="Inter" pitchFamily="34" charset="-122"/>
+                <a:cs typeface="Inter" pitchFamily="34" charset="-120"/>
+              </a:rPr>
+              <a:t>контролерів</a:t>
+            </a:r>
+            <a:r>
+              <a:rPr lang="en-US" sz="1600" dirty="0" smtClean="0">
+                <a:solidFill>
+                  <a:srgbClr val="2C2926"/>
+                </a:solidFill>
+                <a:latin typeface="Inter" pitchFamily="34" charset="0"/>
+                <a:ea typeface="Inter" pitchFamily="34" charset="-122"/>
+                <a:cs typeface="Inter" pitchFamily="34" charset="-120"/>
+              </a:rPr>
+              <a:t> </a:t>
+            </a:r>
+            <a:r>
+              <a:rPr lang="en-US" sz="1600" dirty="0" err="1" smtClean="0">
+                <a:solidFill>
+                  <a:srgbClr val="2C2926"/>
+                </a:solidFill>
+                <a:latin typeface="Inter" pitchFamily="34" charset="0"/>
+                <a:ea typeface="Inter" pitchFamily="34" charset="-122"/>
+                <a:cs typeface="Inter" pitchFamily="34" charset="-120"/>
+              </a:rPr>
+              <a:t>проміжних</a:t>
+            </a:r>
+            <a:r>
+              <a:rPr lang="en-US" sz="1600" dirty="0" smtClean="0">
+                <a:solidFill>
+                  <a:srgbClr val="2C2926"/>
+                </a:solidFill>
+                <a:latin typeface="Inter" pitchFamily="34" charset="0"/>
+                <a:ea typeface="Inter" pitchFamily="34" charset="-122"/>
+                <a:cs typeface="Inter" pitchFamily="34" charset="-120"/>
+              </a:rPr>
+              <a:t> </a:t>
+            </a:r>
+            <a:r>
+              <a:rPr lang="en-US" sz="1600" dirty="0" err="1" smtClean="0">
+                <a:solidFill>
+                  <a:srgbClr val="2C2926"/>
+                </a:solidFill>
+                <a:latin typeface="Inter" pitchFamily="34" charset="0"/>
+                <a:ea typeface="Inter" pitchFamily="34" charset="-122"/>
+                <a:cs typeface="Inter" pitchFamily="34" charset="-120"/>
+              </a:rPr>
+              <a:t>результатів</a:t>
+            </a:r>
+            <a:r>
+              <a:rPr lang="en-US" sz="1600" dirty="0" smtClean="0">
+                <a:solidFill>
+                  <a:srgbClr val="2C2926"/>
+                </a:solidFill>
+                <a:latin typeface="Inter" pitchFamily="34" charset="0"/>
+                <a:ea typeface="Inter" pitchFamily="34" charset="-122"/>
+                <a:cs typeface="Inter" pitchFamily="34" charset="-120"/>
+              </a:rPr>
+              <a:t>.</a:t>
+            </a:r>
+            <a:endParaRPr lang="en-US" sz="1600" dirty="0"/>
           </a:p>
         </p:txBody>
       </p:sp>
@@ -4205,7 +8004,7 @@
 </p:sld>
 </file>
 
-<file path=ppt/slides/slide5.xml><?xml version="1.0" encoding="utf-8"?>
+<file path=ppt/slides/slide7.xml><?xml version="1.0" encoding="utf-8"?>
 <p:sld xmlns:a="http://schemas.openxmlformats.org/drawingml/2006/main" xmlns:r="http://schemas.openxmlformats.org/officeDocument/2006/relationships" xmlns:p="http://schemas.openxmlformats.org/presentationml/2006/main">
   <p:cSld name="Slide 5">
     <p:spTree>
@@ -4243,7 +8042,7 @@
           <a:bodyPr wrap="none" lIns="0" tIns="0" rIns="0" bIns="0" rtlCol="0" anchor="t"/>
           <a:lstStyle/>
           <a:p>
-            <a:pPr algn="l" indent="0" marL="0">
+            <a:pPr marL="0" indent="0" algn="l">
               <a:lnSpc>
                 <a:spcPct val="104000"/>
               </a:lnSpc>
@@ -4266,17 +8065,17 @@
       </p:sp>
       <p:pic>
         <p:nvPicPr>
-          <p:cNvPr id="3" name="Image 0" descr="preencoded.png">    </p:cNvPr>
+          <p:cNvPr id="3" name="Image 0" descr="preencoded.png"/>
           <p:cNvPicPr>
             <a:picLocks noChangeAspect="1"/>
           </p:cNvPicPr>
           <p:nvPr/>
         </p:nvPicPr>
         <p:blipFill>
-          <a:blip r:embed="rId1">
+          <a:blip r:embed="rId3">
             <a:extLst>
               <a:ext uri="{96DAC541-7B7A-43D3-8B79-37D633B846F1}">
-                <asvg:svgBlip xmlns:asvg="http://schemas.microsoft.com/office/drawing/2016/SVG/main" r:embed="rId2"/>
+                <asvg:svgBlip xmlns:asvg="http://schemas.microsoft.com/office/drawing/2016/SVG/main" xmlns="" r:embed="rId4"/>
               </a:ext>
             </a:extLst>
           </a:blip>
@@ -4296,17 +8095,17 @@
       </p:pic>
       <p:pic>
         <p:nvPicPr>
-          <p:cNvPr id="4" name="Image 1" descr="preencoded.png">    </p:cNvPr>
+          <p:cNvPr id="4" name="Image 1" descr="preencoded.png"/>
           <p:cNvPicPr>
             <a:picLocks noChangeAspect="1"/>
           </p:cNvPicPr>
           <p:nvPr/>
         </p:nvPicPr>
         <p:blipFill>
-          <a:blip r:embed="rId3">
+          <a:blip r:embed="rId5">
             <a:extLst>
               <a:ext uri="{96DAC541-7B7A-43D3-8B79-37D633B846F1}">
-                <asvg:svgBlip xmlns:asvg="http://schemas.microsoft.com/office/drawing/2016/SVG/main" r:embed="rId4"/>
+                <asvg:svgBlip xmlns:asvg="http://schemas.microsoft.com/office/drawing/2016/SVG/main" xmlns="" r:embed="rId6"/>
               </a:ext>
             </a:extLst>
           </a:blip>
@@ -4345,7 +8144,7 @@
           <a:bodyPr wrap="none" lIns="0" tIns="0" rIns="0" bIns="0" rtlCol="0" anchor="t"/>
           <a:lstStyle/>
           <a:p>
-            <a:pPr algn="l" indent="0" marL="0">
+            <a:pPr marL="0" indent="0" algn="l">
               <a:lnSpc>
                 <a:spcPct val="104000"/>
               </a:lnSpc>
@@ -4387,7 +8186,7 @@
           <a:bodyPr wrap="none" lIns="0" tIns="0" rIns="0" bIns="0" rtlCol="0" anchor="t"/>
           <a:lstStyle/>
           <a:p>
-            <a:pPr algn="l" indent="0" marL="0">
+            <a:pPr marL="0" indent="0" algn="l">
               <a:lnSpc>
                 <a:spcPct val="120000"/>
               </a:lnSpc>
@@ -4410,17 +8209,17 @@
       </p:sp>
       <p:pic>
         <p:nvPicPr>
-          <p:cNvPr id="7" name="Image 2" descr="preencoded.png">    </p:cNvPr>
+          <p:cNvPr id="7" name="Image 2" descr="preencoded.png"/>
           <p:cNvPicPr>
             <a:picLocks noChangeAspect="1"/>
           </p:cNvPicPr>
           <p:nvPr/>
         </p:nvPicPr>
         <p:blipFill>
-          <a:blip r:embed="rId5">
+          <a:blip r:embed="rId3">
             <a:extLst>
               <a:ext uri="{96DAC541-7B7A-43D3-8B79-37D633B846F1}">
-                <asvg:svgBlip xmlns:asvg="http://schemas.microsoft.com/office/drawing/2016/SVG/main" r:embed="rId6"/>
+                <asvg:svgBlip xmlns:asvg="http://schemas.microsoft.com/office/drawing/2016/SVG/main" xmlns="" r:embed="rId7"/>
               </a:ext>
             </a:extLst>
           </a:blip>
@@ -4440,17 +8239,17 @@
       </p:pic>
       <p:pic>
         <p:nvPicPr>
-          <p:cNvPr id="8" name="Image 3" descr="preencoded.png">    </p:cNvPr>
+          <p:cNvPr id="8" name="Image 3" descr="preencoded.png"/>
           <p:cNvPicPr>
             <a:picLocks noChangeAspect="1"/>
           </p:cNvPicPr>
           <p:nvPr/>
         </p:nvPicPr>
         <p:blipFill>
-          <a:blip r:embed="rId7">
+          <a:blip r:embed="rId8">
             <a:extLst>
               <a:ext uri="{96DAC541-7B7A-43D3-8B79-37D633B846F1}">
-                <asvg:svgBlip xmlns:asvg="http://schemas.microsoft.com/office/drawing/2016/SVG/main" r:embed="rId8"/>
+                <asvg:svgBlip xmlns:asvg="http://schemas.microsoft.com/office/drawing/2016/SVG/main" xmlns="" r:embed="rId9"/>
               </a:ext>
             </a:extLst>
           </a:blip>
@@ -4489,7 +8288,7 @@
           <a:bodyPr wrap="none" lIns="0" tIns="0" rIns="0" bIns="0" rtlCol="0" anchor="t"/>
           <a:lstStyle/>
           <a:p>
-            <a:pPr algn="l" indent="0" marL="0">
+            <a:pPr marL="0" indent="0" algn="l">
               <a:lnSpc>
                 <a:spcPct val="104000"/>
               </a:lnSpc>
@@ -4531,7 +8330,7 @@
           <a:bodyPr wrap="none" lIns="0" tIns="0" rIns="0" bIns="0" rtlCol="0" anchor="t"/>
           <a:lstStyle/>
           <a:p>
-            <a:pPr algn="l" indent="0" marL="0">
+            <a:pPr marL="0" indent="0" algn="l">
               <a:lnSpc>
                 <a:spcPct val="120000"/>
               </a:lnSpc>
@@ -4554,17 +8353,17 @@
       </p:sp>
       <p:pic>
         <p:nvPicPr>
-          <p:cNvPr id="11" name="Image 4" descr="preencoded.png">    </p:cNvPr>
+          <p:cNvPr id="11" name="Image 4" descr="preencoded.png"/>
           <p:cNvPicPr>
             <a:picLocks noChangeAspect="1"/>
           </p:cNvPicPr>
           <p:nvPr/>
         </p:nvPicPr>
         <p:blipFill>
-          <a:blip r:embed="rId9">
+          <a:blip r:embed="rId3">
             <a:extLst>
               <a:ext uri="{96DAC541-7B7A-43D3-8B79-37D633B846F1}">
-                <asvg:svgBlip xmlns:asvg="http://schemas.microsoft.com/office/drawing/2016/SVG/main" r:embed="rId10"/>
+                <asvg:svgBlip xmlns:asvg="http://schemas.microsoft.com/office/drawing/2016/SVG/main" xmlns="" r:embed="rId10"/>
               </a:ext>
             </a:extLst>
           </a:blip>
@@ -4584,7 +8383,7 @@
       </p:pic>
       <p:pic>
         <p:nvPicPr>
-          <p:cNvPr id="12" name="Image 5" descr="preencoded.png">    </p:cNvPr>
+          <p:cNvPr id="12" name="Image 5" descr="preencoded.png"/>
           <p:cNvPicPr>
             <a:picLocks noChangeAspect="1"/>
           </p:cNvPicPr>
@@ -4594,7 +8393,7 @@
           <a:blip r:embed="rId11">
             <a:extLst>
               <a:ext uri="{96DAC541-7B7A-43D3-8B79-37D633B846F1}">
-                <asvg:svgBlip xmlns:asvg="http://schemas.microsoft.com/office/drawing/2016/SVG/main" r:embed="rId12"/>
+                <asvg:svgBlip xmlns:asvg="http://schemas.microsoft.com/office/drawing/2016/SVG/main" xmlns="" r:embed="rId12"/>
               </a:ext>
             </a:extLst>
           </a:blip>
@@ -4633,7 +8432,7 @@
           <a:bodyPr wrap="none" lIns="0" tIns="0" rIns="0" bIns="0" rtlCol="0" anchor="t"/>
           <a:lstStyle/>
           <a:p>
-            <a:pPr algn="l" indent="0" marL="0">
+            <a:pPr marL="0" indent="0" algn="l">
               <a:lnSpc>
                 <a:spcPct val="104000"/>
               </a:lnSpc>
@@ -4675,7 +8474,7 @@
           <a:bodyPr wrap="none" lIns="0" tIns="0" rIns="0" bIns="0" rtlCol="0" anchor="t"/>
           <a:lstStyle/>
           <a:p>
-            <a:pPr algn="l" indent="0" marL="0">
+            <a:pPr marL="0" indent="0" algn="l">
               <a:lnSpc>
                 <a:spcPct val="120000"/>
               </a:lnSpc>
@@ -4698,17 +8497,17 @@
       </p:sp>
       <p:pic>
         <p:nvPicPr>
-          <p:cNvPr id="15" name="Image 6" descr="preencoded.png">    </p:cNvPr>
+          <p:cNvPr id="15" name="Image 6" descr="preencoded.png"/>
           <p:cNvPicPr>
             <a:picLocks noChangeAspect="1"/>
           </p:cNvPicPr>
           <p:nvPr/>
         </p:nvPicPr>
         <p:blipFill>
-          <a:blip r:embed="rId13">
+          <a:blip r:embed="rId3">
             <a:extLst>
               <a:ext uri="{96DAC541-7B7A-43D3-8B79-37D633B846F1}">
-                <asvg:svgBlip xmlns:asvg="http://schemas.microsoft.com/office/drawing/2016/SVG/main" r:embed="rId14"/>
+                <asvg:svgBlip xmlns:asvg="http://schemas.microsoft.com/office/drawing/2016/SVG/main" xmlns="" r:embed="rId14"/>
               </a:ext>
             </a:extLst>
           </a:blip>
@@ -4728,7 +8527,7 @@
       </p:pic>
       <p:pic>
         <p:nvPicPr>
-          <p:cNvPr id="16" name="Image 7" descr="preencoded.png">    </p:cNvPr>
+          <p:cNvPr id="16" name="Image 7" descr="preencoded.png"/>
           <p:cNvPicPr>
             <a:picLocks noChangeAspect="1"/>
           </p:cNvPicPr>
@@ -4738,7 +8537,7 @@
           <a:blip r:embed="rId15">
             <a:extLst>
               <a:ext uri="{96DAC541-7B7A-43D3-8B79-37D633B846F1}">
-                <asvg:svgBlip xmlns:asvg="http://schemas.microsoft.com/office/drawing/2016/SVG/main" r:embed="rId16"/>
+                <asvg:svgBlip xmlns:asvg="http://schemas.microsoft.com/office/drawing/2016/SVG/main" xmlns="" r:embed="rId16"/>
               </a:ext>
             </a:extLst>
           </a:blip>
@@ -4777,7 +8576,7 @@
           <a:bodyPr wrap="none" lIns="0" tIns="0" rIns="0" bIns="0" rtlCol="0" anchor="t"/>
           <a:lstStyle/>
           <a:p>
-            <a:pPr algn="l" indent="0" marL="0">
+            <a:pPr marL="0" indent="0" algn="l">
               <a:lnSpc>
                 <a:spcPct val="104000"/>
               </a:lnSpc>
@@ -4819,7 +8618,7 @@
           <a:bodyPr wrap="none" lIns="0" tIns="0" rIns="0" bIns="0" rtlCol="0" anchor="t"/>
           <a:lstStyle/>
           <a:p>
-            <a:pPr algn="l" indent="0" marL="0">
+            <a:pPr marL="0" indent="0" algn="l">
               <a:lnSpc>
                 <a:spcPct val="120000"/>
               </a:lnSpc>
@@ -4842,17 +8641,17 @@
       </p:sp>
       <p:pic>
         <p:nvPicPr>
-          <p:cNvPr id="19" name="Image 8" descr="preencoded.png">    </p:cNvPr>
+          <p:cNvPr id="19" name="Image 8" descr="preencoded.png"/>
           <p:cNvPicPr>
             <a:picLocks noChangeAspect="1"/>
           </p:cNvPicPr>
           <p:nvPr/>
         </p:nvPicPr>
         <p:blipFill>
-          <a:blip r:embed="rId17">
+          <a:blip r:embed="rId3">
             <a:extLst>
               <a:ext uri="{96DAC541-7B7A-43D3-8B79-37D633B846F1}">
-                <asvg:svgBlip xmlns:asvg="http://schemas.microsoft.com/office/drawing/2016/SVG/main" r:embed="rId18"/>
+                <asvg:svgBlip xmlns:asvg="http://schemas.microsoft.com/office/drawing/2016/SVG/main" xmlns="" r:embed="rId18"/>
               </a:ext>
             </a:extLst>
           </a:blip>
@@ -4872,7 +8671,7 @@
       </p:pic>
       <p:pic>
         <p:nvPicPr>
-          <p:cNvPr id="20" name="Image 9" descr="preencoded.png">    </p:cNvPr>
+          <p:cNvPr id="20" name="Image 9" descr="preencoded.png"/>
           <p:cNvPicPr>
             <a:picLocks noChangeAspect="1"/>
           </p:cNvPicPr>
@@ -4882,7 +8681,7 @@
           <a:blip r:embed="rId19">
             <a:extLst>
               <a:ext uri="{96DAC541-7B7A-43D3-8B79-37D633B846F1}">
-                <asvg:svgBlip xmlns:asvg="http://schemas.microsoft.com/office/drawing/2016/SVG/main" r:embed="rId20"/>
+                <asvg:svgBlip xmlns:asvg="http://schemas.microsoft.com/office/drawing/2016/SVG/main" xmlns="" r:embed="rId20"/>
               </a:ext>
             </a:extLst>
           </a:blip>
@@ -4921,7 +8720,7 @@
           <a:bodyPr wrap="none" lIns="0" tIns="0" rIns="0" bIns="0" rtlCol="0" anchor="t"/>
           <a:lstStyle/>
           <a:p>
-            <a:pPr algn="l" indent="0" marL="0">
+            <a:pPr marL="0" indent="0" algn="l">
               <a:lnSpc>
                 <a:spcPct val="104000"/>
               </a:lnSpc>
@@ -4963,7 +8762,7 @@
           <a:bodyPr wrap="none" lIns="0" tIns="0" rIns="0" bIns="0" rtlCol="0" anchor="t"/>
           <a:lstStyle/>
           <a:p>
-            <a:pPr algn="l" indent="0" marL="0">
+            <a:pPr marL="0" indent="0" algn="l">
               <a:lnSpc>
                 <a:spcPct val="120000"/>
               </a:lnSpc>
@@ -4992,7 +8791,7 @@
 </p:sld>
 </file>
 
-<file path=ppt/slides/slide6.xml><?xml version="1.0" encoding="utf-8"?>
+<file path=ppt/slides/slide8.xml><?xml version="1.0" encoding="utf-8"?>
 <p:sld xmlns:a="http://schemas.openxmlformats.org/drawingml/2006/main" xmlns:r="http://schemas.openxmlformats.org/officeDocument/2006/relationships" xmlns:p="http://schemas.openxmlformats.org/presentationml/2006/main">
   <p:cSld name="Slide 6">
     <p:spTree>
@@ -5030,7 +8829,7 @@
           <a:bodyPr wrap="none" lIns="0" tIns="0" rIns="0" bIns="0" rtlCol="0" anchor="t"/>
           <a:lstStyle/>
           <a:p>
-            <a:pPr algn="l" indent="0" marL="0">
+            <a:pPr marL="0" indent="0" algn="l">
               <a:lnSpc>
                 <a:spcPct val="104000"/>
               </a:lnSpc>
@@ -5053,14 +8852,14 @@
       </p:sp>
       <p:pic>
         <p:nvPicPr>
-          <p:cNvPr id="3" name="Image 0" descr="preencoded.png">    </p:cNvPr>
+          <p:cNvPr id="3" name="Image 0" descr="preencoded.png"/>
           <p:cNvPicPr>
             <a:picLocks noChangeAspect="1"/>
           </p:cNvPicPr>
           <p:nvPr/>
         </p:nvPicPr>
         <p:blipFill>
-          <a:blip r:embed="rId1"/>
+          <a:blip r:embed="rId3"/>
           <a:stretch>
             <a:fillRect/>
           </a:stretch>
@@ -5096,7 +8895,7 @@
           <a:bodyPr wrap="none" lIns="0" tIns="0" rIns="0" bIns="0" rtlCol="0" anchor="t"/>
           <a:lstStyle/>
           <a:p>
-            <a:pPr algn="l" indent="0" marL="0">
+            <a:pPr marL="0" indent="0" algn="l">
               <a:lnSpc>
                 <a:spcPct val="104000"/>
               </a:lnSpc>
@@ -5140,7 +8939,7 @@
           </a:bodyPr>
           <a:lstStyle/>
           <a:p>
-            <a:pPr algn="l" marL="152400" indent="-152400">
+            <a:pPr marL="152400" indent="-152400" algn="l">
               <a:lnSpc>
                 <a:spcPct val="101000"/>
               </a:lnSpc>
@@ -5161,7 +8960,7 @@
             <a:endParaRPr lang="en-US" sz="750" dirty="0"/>
           </a:p>
           <a:p>
-            <a:pPr algn="l" marL="152400" indent="-152400">
+            <a:pPr marL="152400" indent="-152400" algn="l">
               <a:lnSpc>
                 <a:spcPct val="101000"/>
               </a:lnSpc>
@@ -5182,7 +8981,7 @@
             <a:endParaRPr lang="en-US" sz="750" dirty="0"/>
           </a:p>
           <a:p>
-            <a:pPr algn="l" marL="152400" indent="-152400">
+            <a:pPr marL="152400" indent="-152400" algn="l">
               <a:lnSpc>
                 <a:spcPct val="101000"/>
               </a:lnSpc>
@@ -5228,14 +9027,14 @@
       </p:sp>
       <p:pic>
         <p:nvPicPr>
-          <p:cNvPr id="7" name="Image 1" descr="preencoded.png">    </p:cNvPr>
+          <p:cNvPr id="7" name="Image 1" descr="preencoded.png"/>
           <p:cNvPicPr>
             <a:picLocks noChangeAspect="1"/>
           </p:cNvPicPr>
           <p:nvPr/>
         </p:nvPicPr>
         <p:blipFill>
-          <a:blip r:embed="rId2"/>
+          <a:blip r:embed="rId4"/>
           <a:stretch>
             <a:fillRect/>
           </a:stretch>
@@ -5271,7 +9070,7 @@
           <a:bodyPr wrap="none" lIns="0" tIns="0" rIns="0" bIns="0" rtlCol="0" anchor="t"/>
           <a:lstStyle/>
           <a:p>
-            <a:pPr algn="l" indent="0" marL="0">
+            <a:pPr marL="0" indent="0" algn="l">
               <a:lnSpc>
                 <a:spcPct val="101000"/>
               </a:lnSpc>
@@ -5300,7 +9099,7 @@
 </p:sld>
 </file>
 
-<file path=ppt/slides/slide7.xml><?xml version="1.0" encoding="utf-8"?>
+<file path=ppt/slides/slide9.xml><?xml version="1.0" encoding="utf-8"?>
 <p:sld xmlns:a="http://schemas.openxmlformats.org/drawingml/2006/main" xmlns:r="http://schemas.openxmlformats.org/officeDocument/2006/relationships" xmlns:p="http://schemas.openxmlformats.org/presentationml/2006/main">
   <p:cSld name="Slide 7">
     <p:spTree>
@@ -5338,7 +9137,7 @@
           <a:bodyPr wrap="none" lIns="0" tIns="0" rIns="0" bIns="0" rtlCol="0" anchor="t"/>
           <a:lstStyle/>
           <a:p>
-            <a:pPr algn="l" indent="0" marL="0">
+            <a:pPr marL="0" indent="0" algn="l">
               <a:lnSpc>
                 <a:spcPct val="104000"/>
               </a:lnSpc>
@@ -5408,17 +9207,17 @@
       </p:sp>
       <p:pic>
         <p:nvPicPr>
-          <p:cNvPr id="5" name="Image 0" descr="preencoded.png">    </p:cNvPr>
+          <p:cNvPr id="5" name="Image 0" descr="preencoded.png"/>
           <p:cNvPicPr>
             <a:picLocks noChangeAspect="1"/>
           </p:cNvPicPr>
           <p:nvPr/>
         </p:nvPicPr>
         <p:blipFill>
-          <a:blip r:embed="rId1">
+          <a:blip r:embed="rId3">
             <a:extLst>
               <a:ext uri="{96DAC541-7B7A-43D3-8B79-37D633B846F1}">
-                <asvg:svgBlip xmlns:asvg="http://schemas.microsoft.com/office/drawing/2016/SVG/main" r:embed="rId2"/>
+                <asvg:svgBlip xmlns:asvg="http://schemas.microsoft.com/office/drawing/2016/SVG/main" xmlns="" r:embed="rId4"/>
               </a:ext>
             </a:extLst>
           </a:blip>
@@ -5457,7 +9256,7 @@
           <a:bodyPr wrap="none" lIns="0" tIns="0" rIns="0" bIns="0" rtlCol="0" anchor="t"/>
           <a:lstStyle/>
           <a:p>
-            <a:pPr algn="l" indent="0" marL="0">
+            <a:pPr marL="0" indent="0" algn="l">
               <a:lnSpc>
                 <a:spcPct val="104000"/>
               </a:lnSpc>
@@ -5499,7 +9298,7 @@
           <a:bodyPr wrap="none" lIns="0" tIns="0" rIns="0" bIns="0" rtlCol="0" anchor="t"/>
           <a:lstStyle/>
           <a:p>
-            <a:pPr algn="l" indent="0" marL="0">
+            <a:pPr marL="0" indent="0" algn="l">
               <a:lnSpc>
                 <a:spcPct val="125000"/>
               </a:lnSpc>
@@ -5569,17 +9368,17 @@
       </p:sp>
       <p:pic>
         <p:nvPicPr>
-          <p:cNvPr id="10" name="Image 1" descr="preencoded.png">    </p:cNvPr>
+          <p:cNvPr id="10" name="Image 1" descr="preencoded.png"/>
           <p:cNvPicPr>
             <a:picLocks noChangeAspect="1"/>
           </p:cNvPicPr>
           <p:nvPr/>
         </p:nvPicPr>
         <p:blipFill>
-          <a:blip r:embed="rId3">
+          <a:blip r:embed="rId5">
             <a:extLst>
               <a:ext uri="{96DAC541-7B7A-43D3-8B79-37D633B846F1}">
-                <asvg:svgBlip xmlns:asvg="http://schemas.microsoft.com/office/drawing/2016/SVG/main" r:embed="rId4"/>
+                <asvg:svgBlip xmlns:asvg="http://schemas.microsoft.com/office/drawing/2016/SVG/main" xmlns="" r:embed="rId6"/>
               </a:ext>
             </a:extLst>
           </a:blip>
@@ -5618,7 +9417,7 @@
           <a:bodyPr wrap="none" lIns="0" tIns="0" rIns="0" bIns="0" rtlCol="0" anchor="t"/>
           <a:lstStyle/>
           <a:p>
-            <a:pPr algn="l" indent="0" marL="0">
+            <a:pPr marL="0" indent="0" algn="l">
               <a:lnSpc>
                 <a:spcPct val="104000"/>
               </a:lnSpc>
@@ -5660,7 +9459,7 @@
           <a:bodyPr wrap="none" lIns="0" tIns="0" rIns="0" bIns="0" rtlCol="0" anchor="t"/>
           <a:lstStyle/>
           <a:p>
-            <a:pPr algn="l" indent="0" marL="0">
+            <a:pPr marL="0" indent="0" algn="l">
               <a:lnSpc>
                 <a:spcPct val="125000"/>
               </a:lnSpc>
@@ -5730,17 +9529,17 @@
       </p:sp>
       <p:pic>
         <p:nvPicPr>
-          <p:cNvPr id="15" name="Image 2" descr="preencoded.png">    </p:cNvPr>
+          <p:cNvPr id="15" name="Image 2" descr="preencoded.png"/>
           <p:cNvPicPr>
             <a:picLocks noChangeAspect="1"/>
           </p:cNvPicPr>
           <p:nvPr/>
         </p:nvPicPr>
         <p:blipFill>
-          <a:blip r:embed="rId5">
+          <a:blip r:embed="rId7">
             <a:extLst>
               <a:ext uri="{96DAC541-7B7A-43D3-8B79-37D633B846F1}">
-                <asvg:svgBlip xmlns:asvg="http://schemas.microsoft.com/office/drawing/2016/SVG/main" r:embed="rId6"/>
+                <asvg:svgBlip xmlns:asvg="http://schemas.microsoft.com/office/drawing/2016/SVG/main" xmlns="" r:embed="rId8"/>
               </a:ext>
             </a:extLst>
           </a:blip>
@@ -5779,7 +9578,7 @@
           <a:bodyPr wrap="none" lIns="0" tIns="0" rIns="0" bIns="0" rtlCol="0" anchor="t"/>
           <a:lstStyle/>
           <a:p>
-            <a:pPr algn="l" indent="0" marL="0">
+            <a:pPr marL="0" indent="0" algn="l">
               <a:lnSpc>
                 <a:spcPct val="104000"/>
               </a:lnSpc>
@@ -5849,17 +9648,17 @@
       </p:sp>
       <p:pic>
         <p:nvPicPr>
-          <p:cNvPr id="19" name="Image 3" descr="preencoded.png">    </p:cNvPr>
+          <p:cNvPr id="19" name="Image 3" descr="preencoded.png"/>
           <p:cNvPicPr>
             <a:picLocks noChangeAspect="1"/>
           </p:cNvPicPr>
           <p:nvPr/>
         </p:nvPicPr>
         <p:blipFill>
-          <a:blip r:embed="rId7">
+          <a:blip r:embed="rId9">
             <a:extLst>
               <a:ext uri="{96DAC541-7B7A-43D3-8B79-37D633B846F1}">
-                <asvg:svgBlip xmlns:asvg="http://schemas.microsoft.com/office/drawing/2016/SVG/main" r:embed="rId8"/>
+                <asvg:svgBlip xmlns:asvg="http://schemas.microsoft.com/office/drawing/2016/SVG/main" xmlns="" r:embed="rId10"/>
               </a:ext>
             </a:extLst>
           </a:blip>
@@ -5898,7 +9697,7 @@
           <a:bodyPr wrap="none" lIns="0" tIns="0" rIns="0" bIns="0" rtlCol="0" anchor="t"/>
           <a:lstStyle/>
           <a:p>
-            <a:pPr algn="l" indent="0" marL="0">
+            <a:pPr marL="0" indent="0" algn="l">
               <a:lnSpc>
                 <a:spcPct val="104000"/>
               </a:lnSpc>
@@ -5968,17 +9767,17 @@
       </p:sp>
       <p:pic>
         <p:nvPicPr>
-          <p:cNvPr id="23" name="Image 4" descr="preencoded.png">    </p:cNvPr>
+          <p:cNvPr id="23" name="Image 4" descr="preencoded.png"/>
           <p:cNvPicPr>
             <a:picLocks noChangeAspect="1"/>
           </p:cNvPicPr>
           <p:nvPr/>
         </p:nvPicPr>
         <p:blipFill>
-          <a:blip r:embed="rId9">
+          <a:blip r:embed="rId11">
             <a:extLst>
               <a:ext uri="{96DAC541-7B7A-43D3-8B79-37D633B846F1}">
-                <asvg:svgBlip xmlns:asvg="http://schemas.microsoft.com/office/drawing/2016/SVG/main" r:embed="rId10"/>
+                <asvg:svgBlip xmlns:asvg="http://schemas.microsoft.com/office/drawing/2016/SVG/main" xmlns="" r:embed="rId12"/>
               </a:ext>
             </a:extLst>
           </a:blip>
@@ -6017,7 +9816,7 @@
           <a:bodyPr wrap="none" lIns="0" tIns="0" rIns="0" bIns="0" rtlCol="0" anchor="t"/>
           <a:lstStyle/>
           <a:p>
-            <a:pPr algn="l" indent="0" marL="0">
+            <a:pPr marL="0" indent="0" algn="l">
               <a:lnSpc>
                 <a:spcPct val="104000"/>
               </a:lnSpc>
@@ -6087,17 +9886,17 @@
       </p:sp>
       <p:pic>
         <p:nvPicPr>
-          <p:cNvPr id="27" name="Image 5" descr="preencoded.png">    </p:cNvPr>
+          <p:cNvPr id="27" name="Image 5" descr="preencoded.png"/>
           <p:cNvPicPr>
             <a:picLocks noChangeAspect="1"/>
           </p:cNvPicPr>
           <p:nvPr/>
         </p:nvPicPr>
         <p:blipFill>
-          <a:blip r:embed="rId11">
+          <a:blip r:embed="rId13">
             <a:extLst>
               <a:ext uri="{96DAC541-7B7A-43D3-8B79-37D633B846F1}">
-                <asvg:svgBlip xmlns:asvg="http://schemas.microsoft.com/office/drawing/2016/SVG/main" r:embed="rId12"/>
+                <asvg:svgBlip xmlns:asvg="http://schemas.microsoft.com/office/drawing/2016/SVG/main" xmlns="" r:embed="rId14"/>
               </a:ext>
             </a:extLst>
           </a:blip>
@@ -6136,7 +9935,7 @@
           <a:bodyPr wrap="none" lIns="0" tIns="0" rIns="0" bIns="0" rtlCol="0" anchor="t"/>
           <a:lstStyle/>
           <a:p>
-            <a:pPr algn="l" indent="0" marL="0">
+            <a:pPr marL="0" indent="0" algn="l">
               <a:lnSpc>
                 <a:spcPct val="104000"/>
               </a:lnSpc>
@@ -6180,7 +9979,7 @@
           </a:bodyPr>
           <a:lstStyle/>
           <a:p>
-            <a:pPr algn="l" indent="0" marL="0">
+            <a:pPr marL="0" indent="0" algn="l">
               <a:lnSpc>
                 <a:spcPct val="125000"/>
               </a:lnSpc>
@@ -6197,12 +9996,6 @@
               </a:rPr>
               <a:t>Типова статистика впровадження: </a:t>
             </a:r>
-            <a:pPr algn="l" indent="0" marL="0">
-              <a:lnSpc>
-                <a:spcPct val="125000"/>
-              </a:lnSpc>
-              <a:buNone/>
-            </a:pPr>
             <a:r>
               <a:rPr lang="en-US" sz="1300" b="1" dirty="0">
                 <a:solidFill>
@@ -6214,12 +10007,6 @@
               </a:rPr>
               <a:t>45%</a:t>
             </a:r>
-            <a:pPr algn="l" indent="0" marL="0">
-              <a:lnSpc>
-                <a:spcPct val="125000"/>
-              </a:lnSpc>
-              <a:buNone/>
-            </a:pPr>
             <a:r>
               <a:rPr lang="en-US" sz="1300" dirty="0">
                 <a:solidFill>
@@ -6231,12 +10018,6 @@
               </a:rPr>
               <a:t> систем поставляються, але не використовуються; </a:t>
             </a:r>
-            <a:pPr algn="l" indent="0" marL="0">
-              <a:lnSpc>
-                <a:spcPct val="125000"/>
-              </a:lnSpc>
-              <a:buNone/>
-            </a:pPr>
             <a:r>
               <a:rPr lang="en-US" sz="1300" b="1" dirty="0">
                 <a:solidFill>
@@ -6248,12 +10029,6 @@
               </a:rPr>
               <a:t>27%</a:t>
             </a:r>
-            <a:pPr algn="l" indent="0" marL="0">
-              <a:lnSpc>
-                <a:spcPct val="125000"/>
-              </a:lnSpc>
-              <a:buNone/>
-            </a:pPr>
             <a:r>
               <a:rPr lang="en-US" sz="1300" dirty="0">
                 <a:solidFill>
@@ -6265,12 +10040,6 @@
               </a:rPr>
               <a:t> — оплачено, але не поставлено; </a:t>
             </a:r>
-            <a:pPr algn="l" indent="0" marL="0">
-              <a:lnSpc>
-                <a:spcPct val="125000"/>
-              </a:lnSpc>
-              <a:buNone/>
-            </a:pPr>
             <a:r>
               <a:rPr lang="en-US" sz="1300" b="1" dirty="0">
                 <a:solidFill>
@@ -6282,12 +10051,6 @@
               </a:rPr>
               <a:t>17%</a:t>
             </a:r>
-            <a:pPr algn="l" indent="0" marL="0">
-              <a:lnSpc>
-                <a:spcPct val="125000"/>
-              </a:lnSpc>
-              <a:buNone/>
-            </a:pPr>
             <a:r>
               <a:rPr lang="en-US" sz="1300" dirty="0">
                 <a:solidFill>
@@ -6299,12 +10062,6 @@
               </a:rPr>
               <a:t> — відкинуто; лише </a:t>
             </a:r>
-            <a:pPr algn="l" indent="0" marL="0">
-              <a:lnSpc>
-                <a:spcPct val="125000"/>
-              </a:lnSpc>
-              <a:buNone/>
-            </a:pPr>
             <a:r>
               <a:rPr lang="en-US" sz="1300" b="1" dirty="0">
                 <a:solidFill>
@@ -6316,12 +10073,6 @@
               </a:rPr>
               <a:t>5%</a:t>
             </a:r>
-            <a:pPr algn="l" indent="0" marL="0">
-              <a:lnSpc>
-                <a:spcPct val="125000"/>
-              </a:lnSpc>
-              <a:buNone/>
-            </a:pPr>
             <a:r>
               <a:rPr lang="en-US" sz="1300" dirty="0">
                 <a:solidFill>
@@ -6333,12 +10084,6 @@
               </a:rPr>
               <a:t> використовуються як поставлено. Помилка Ariane 5 коштувала </a:t>
             </a:r>
-            <a:pPr algn="l" indent="0" marL="0">
-              <a:lnSpc>
-                <a:spcPct val="125000"/>
-              </a:lnSpc>
-              <a:buNone/>
-            </a:pPr>
             <a:r>
               <a:rPr lang="en-US" sz="1300" dirty="0">
                 <a:solidFill>
@@ -6350,12 +10095,6 @@
               </a:rPr>
               <a:t>500 млн доларів</a:t>
             </a:r>
-            <a:pPr algn="l" indent="0" marL="0">
-              <a:lnSpc>
-                <a:spcPct val="125000"/>
-              </a:lnSpc>
-              <a:buNone/>
-            </a:pPr>
             <a:r>
               <a:rPr lang="en-US" sz="1300" dirty="0">
                 <a:solidFill>
@@ -6368,1872 +10107,6 @@
               <a:t>.</a:t>
             </a:r>
             <a:endParaRPr lang="en-US" sz="1300" dirty="0"/>
-          </a:p>
-        </p:txBody>
-      </p:sp>
-    </p:spTree>
-  </p:cSld>
-  <p:clrMapOvr>
-    <a:masterClrMapping/>
-  </p:clrMapOvr>
-</p:sld>
-</file>
-
-<file path=ppt/slides/slide8.xml><?xml version="1.0" encoding="utf-8"?>
-<p:sld xmlns:a="http://schemas.openxmlformats.org/drawingml/2006/main" xmlns:r="http://schemas.openxmlformats.org/officeDocument/2006/relationships" xmlns:p="http://schemas.openxmlformats.org/presentationml/2006/main">
-  <p:cSld name="Slide 8">
-    <p:spTree>
-      <p:nvGrpSpPr>
-        <p:cNvPr id="1" name=""/>
-        <p:cNvGrpSpPr/>
-        <p:nvPr/>
-      </p:nvGrpSpPr>
-      <p:grpSpPr>
-        <a:xfrm>
-          <a:off x="0" y="0"/>
-          <a:ext cx="0" cy="0"/>
-          <a:chOff x="0" y="0"/>
-          <a:chExt cx="0" cy="0"/>
-        </a:xfrm>
-      </p:grpSpPr>
-      <p:sp>
-        <p:nvSpPr>
-          <p:cNvPr id="2" name="Text 0"/>
-          <p:cNvSpPr/>
-          <p:nvPr/>
-        </p:nvSpPr>
-        <p:spPr>
-          <a:xfrm>
-            <a:off x="661475" y="594122"/>
-            <a:ext cx="10868745" cy="544513"/>
-          </a:xfrm>
-          <a:prstGeom prst="rect">
-            <a:avLst/>
-          </a:prstGeom>
-          <a:noFill/>
-          <a:ln/>
-        </p:spPr>
-        <p:txBody>
-          <a:bodyPr wrap="none" lIns="0" tIns="0" rIns="0" bIns="0" rtlCol="0" anchor="t"/>
-          <a:lstStyle/>
-          <a:p>
-            <a:pPr algn="l" indent="0" marL="0">
-              <a:lnSpc>
-                <a:spcPct val="104000"/>
-              </a:lnSpc>
-              <a:buNone/>
-            </a:pPr>
-            <a:r>
-              <a:rPr lang="en-US" sz="3400" dirty="0">
-                <a:solidFill>
-                  <a:srgbClr val="2C2926"/>
-                </a:solidFill>
-                <a:latin typeface="Bricolage Grotesque SemiBold" pitchFamily="34" charset="0"/>
-                <a:ea typeface="Bricolage Grotesque SemiBold" pitchFamily="34" charset="-122"/>
-                <a:cs typeface="Bricolage Grotesque SemiBold" pitchFamily="34" charset="-120"/>
-              </a:rPr>
-              <a:t>Вимоги до програмного забезпечення</a:t>
-            </a:r>
-            <a:endParaRPr lang="en-US" sz="3400" dirty="0"/>
-          </a:p>
-        </p:txBody>
-      </p:sp>
-      <p:sp>
-        <p:nvSpPr>
-          <p:cNvPr id="3" name="Text 1"/>
-          <p:cNvSpPr/>
-          <p:nvPr/>
-        </p:nvSpPr>
-        <p:spPr>
-          <a:xfrm>
-            <a:off x="661475" y="1540173"/>
-            <a:ext cx="3527734" cy="272157"/>
-          </a:xfrm>
-          <a:prstGeom prst="rect">
-            <a:avLst/>
-          </a:prstGeom>
-          <a:noFill/>
-          <a:ln/>
-        </p:spPr>
-        <p:txBody>
-          <a:bodyPr wrap="none" lIns="0" tIns="0" rIns="0" bIns="0" rtlCol="0" anchor="t"/>
-          <a:lstStyle/>
-          <a:p>
-            <a:pPr algn="l" indent="0" marL="0">
-              <a:lnSpc>
-                <a:spcPct val="104000"/>
-              </a:lnSpc>
-              <a:buNone/>
-            </a:pPr>
-            <a:r>
-              <a:rPr lang="en-US" sz="1700" dirty="0">
-                <a:solidFill>
-                  <a:srgbClr val="2C2926"/>
-                </a:solidFill>
-                <a:latin typeface="Bricolage Grotesque SemiBold" pitchFamily="34" charset="0"/>
-                <a:ea typeface="Bricolage Grotesque SemiBold" pitchFamily="34" charset="-122"/>
-                <a:cs typeface="Bricolage Grotesque SemiBold" pitchFamily="34" charset="-120"/>
-              </a:rPr>
-              <a:t>Класифікація вимог</a:t>
-            </a:r>
-            <a:endParaRPr lang="en-US" sz="1700" dirty="0"/>
-          </a:p>
-        </p:txBody>
-      </p:sp>
-      <p:pic>
-        <p:nvPicPr>
-          <p:cNvPr id="4" name="Image 0" descr="preencoded.png">    </p:cNvPr>
-          <p:cNvPicPr>
-            <a:picLocks noChangeAspect="1"/>
-          </p:cNvPicPr>
-          <p:nvPr/>
-        </p:nvPicPr>
-        <p:blipFill>
-          <a:blip r:embed="rId1">
-            <a:extLst>
-              <a:ext uri="{96DAC541-7B7A-43D3-8B79-37D633B846F1}">
-                <asvg:svgBlip xmlns:asvg="http://schemas.microsoft.com/office/drawing/2016/SVG/main" r:embed="rId2"/>
-              </a:ext>
-            </a:extLst>
-          </a:blip>
-          <a:stretch>
-            <a:fillRect/>
-          </a:stretch>
-        </p:blipFill>
-        <p:spPr>
-          <a:xfrm>
-            <a:off x="726759" y="2001689"/>
-            <a:ext cx="261336" cy="261342"/>
-          </a:xfrm>
-          <a:prstGeom prst="rect">
-            <a:avLst/>
-          </a:prstGeom>
-        </p:spPr>
-      </p:pic>
-      <p:sp>
-        <p:nvSpPr>
-          <p:cNvPr id="5" name="Text 2"/>
-          <p:cNvSpPr/>
-          <p:nvPr/>
-        </p:nvSpPr>
-        <p:spPr>
-          <a:xfrm>
-            <a:off x="1227702" y="1993007"/>
-            <a:ext cx="2961506" cy="535583"/>
-          </a:xfrm>
-          <a:prstGeom prst="rect">
-            <a:avLst/>
-          </a:prstGeom>
-          <a:noFill/>
-          <a:ln/>
-        </p:spPr>
-        <p:txBody>
-          <a:bodyPr wrap="square" lIns="0" tIns="0" rIns="0" bIns="0" rtlCol="0" anchor="t">
-            <a:normAutofit/>
-          </a:bodyPr>
-          <a:lstStyle/>
-          <a:p>
-            <a:pPr algn="l" indent="0" marL="0">
-              <a:lnSpc>
-                <a:spcPct val="128000"/>
-              </a:lnSpc>
-              <a:buNone/>
-            </a:pPr>
-            <a:r>
-              <a:rPr lang="en-US" sz="1350" b="1" dirty="0">
-                <a:solidFill>
-                  <a:srgbClr val="2C2926"/>
-                </a:solidFill>
-                <a:latin typeface="Inter Bold" pitchFamily="34" charset="0"/>
-                <a:ea typeface="Inter Bold" pitchFamily="34" charset="-122"/>
-                <a:cs typeface="Inter Bold" pitchFamily="34" charset="-120"/>
-              </a:rPr>
-              <a:t>Вимоги користувачів</a:t>
-            </a:r>
-            <a:pPr algn="l" indent="0" marL="0">
-              <a:lnSpc>
-                <a:spcPct val="128000"/>
-              </a:lnSpc>
-              <a:buNone/>
-            </a:pPr>
-            <a:r>
-              <a:rPr lang="en-US" sz="1350" dirty="0">
-                <a:solidFill>
-                  <a:srgbClr val="2C2926"/>
-                </a:solidFill>
-                <a:latin typeface="Inter" pitchFamily="34" charset="0"/>
-                <a:ea typeface="Inter" pitchFamily="34" charset="-122"/>
-                <a:cs typeface="Inter" pitchFamily="34" charset="-120"/>
-              </a:rPr>
-              <a:t> — зовнішня поведінка системи, цілі та задачі</a:t>
-            </a:r>
-            <a:endParaRPr lang="en-US" sz="1350" dirty="0"/>
-          </a:p>
-        </p:txBody>
-      </p:sp>
-      <p:pic>
-        <p:nvPicPr>
-          <p:cNvPr id="6" name="Image 1" descr="preencoded.png">    </p:cNvPr>
-          <p:cNvPicPr>
-            <a:picLocks noChangeAspect="1"/>
-          </p:cNvPicPr>
-          <p:nvPr/>
-        </p:nvPicPr>
-        <p:blipFill>
-          <a:blip r:embed="rId3">
-            <a:extLst>
-              <a:ext uri="{96DAC541-7B7A-43D3-8B79-37D633B846F1}">
-                <asvg:svgBlip xmlns:asvg="http://schemas.microsoft.com/office/drawing/2016/SVG/main" r:embed="rId4"/>
-              </a:ext>
-            </a:extLst>
-          </a:blip>
-          <a:stretch>
-            <a:fillRect/>
-          </a:stretch>
-        </p:blipFill>
-        <p:spPr>
-          <a:xfrm>
-            <a:off x="726759" y="2858542"/>
-            <a:ext cx="261336" cy="261342"/>
-          </a:xfrm>
-          <a:prstGeom prst="rect">
-            <a:avLst/>
-          </a:prstGeom>
-        </p:spPr>
-      </p:pic>
-      <p:sp>
-        <p:nvSpPr>
-          <p:cNvPr id="7" name="Text 3"/>
-          <p:cNvSpPr/>
-          <p:nvPr/>
-        </p:nvSpPr>
-        <p:spPr>
-          <a:xfrm>
-            <a:off x="1227702" y="2849860"/>
-            <a:ext cx="2961506" cy="803374"/>
-          </a:xfrm>
-          <a:prstGeom prst="rect">
-            <a:avLst/>
-          </a:prstGeom>
-          <a:noFill/>
-          <a:ln/>
-        </p:spPr>
-        <p:txBody>
-          <a:bodyPr wrap="square" lIns="0" tIns="0" rIns="0" bIns="0" rtlCol="0" anchor="t">
-            <a:normAutofit/>
-          </a:bodyPr>
-          <a:lstStyle/>
-          <a:p>
-            <a:pPr algn="l" indent="0" marL="0">
-              <a:lnSpc>
-                <a:spcPct val="128000"/>
-              </a:lnSpc>
-              <a:buNone/>
-            </a:pPr>
-            <a:r>
-              <a:rPr lang="en-US" sz="1350" b="1" dirty="0">
-                <a:solidFill>
-                  <a:srgbClr val="2C2926"/>
-                </a:solidFill>
-                <a:latin typeface="Inter Bold" pitchFamily="34" charset="0"/>
-                <a:ea typeface="Inter Bold" pitchFamily="34" charset="-122"/>
-                <a:cs typeface="Inter Bold" pitchFamily="34" charset="-120"/>
-              </a:rPr>
-              <a:t>Системні вимоги</a:t>
-            </a:r>
-            <a:pPr algn="l" indent="0" marL="0">
-              <a:lnSpc>
-                <a:spcPct val="128000"/>
-              </a:lnSpc>
-              <a:buNone/>
-            </a:pPr>
-            <a:r>
-              <a:rPr lang="en-US" sz="1350" dirty="0">
-                <a:solidFill>
-                  <a:srgbClr val="2C2926"/>
-                </a:solidFill>
-                <a:latin typeface="Inter" pitchFamily="34" charset="0"/>
-                <a:ea typeface="Inter" pitchFamily="34" charset="-122"/>
-                <a:cs typeface="Inter" pitchFamily="34" charset="-120"/>
-              </a:rPr>
-              <a:t> — зовнішні умови виконання функцій і обмеження</a:t>
-            </a:r>
-            <a:endParaRPr lang="en-US" sz="1350" dirty="0"/>
-          </a:p>
-        </p:txBody>
-      </p:sp>
-      <p:pic>
-        <p:nvPicPr>
-          <p:cNvPr id="8" name="Image 2" descr="preencoded.png">    </p:cNvPr>
-          <p:cNvPicPr>
-            <a:picLocks noChangeAspect="1"/>
-          </p:cNvPicPr>
-          <p:nvPr/>
-        </p:nvPicPr>
-        <p:blipFill>
-          <a:blip r:embed="rId5">
-            <a:extLst>
-              <a:ext uri="{96DAC541-7B7A-43D3-8B79-37D633B846F1}">
-                <asvg:svgBlip xmlns:asvg="http://schemas.microsoft.com/office/drawing/2016/SVG/main" r:embed="rId6"/>
-              </a:ext>
-            </a:extLst>
-          </a:blip>
-          <a:stretch>
-            <a:fillRect/>
-          </a:stretch>
-        </p:blipFill>
-        <p:spPr>
-          <a:xfrm>
-            <a:off x="726759" y="3983186"/>
-            <a:ext cx="261336" cy="261342"/>
-          </a:xfrm>
-          <a:prstGeom prst="rect">
-            <a:avLst/>
-          </a:prstGeom>
-        </p:spPr>
-      </p:pic>
-      <p:sp>
-        <p:nvSpPr>
-          <p:cNvPr id="9" name="Text 4"/>
-          <p:cNvSpPr/>
-          <p:nvPr/>
-        </p:nvSpPr>
-        <p:spPr>
-          <a:xfrm>
-            <a:off x="1227702" y="3974505"/>
-            <a:ext cx="2961506" cy="535583"/>
-          </a:xfrm>
-          <a:prstGeom prst="rect">
-            <a:avLst/>
-          </a:prstGeom>
-          <a:noFill/>
-          <a:ln/>
-        </p:spPr>
-        <p:txBody>
-          <a:bodyPr wrap="square" lIns="0" tIns="0" rIns="0" bIns="0" rtlCol="0" anchor="t">
-            <a:normAutofit/>
-          </a:bodyPr>
-          <a:lstStyle/>
-          <a:p>
-            <a:pPr algn="l" indent="0" marL="0">
-              <a:lnSpc>
-                <a:spcPct val="128000"/>
-              </a:lnSpc>
-              <a:buNone/>
-            </a:pPr>
-            <a:r>
-              <a:rPr lang="en-US" sz="1350" b="1" dirty="0">
-                <a:solidFill>
-                  <a:srgbClr val="2C2926"/>
-                </a:solidFill>
-                <a:latin typeface="Inter Bold" pitchFamily="34" charset="0"/>
-                <a:ea typeface="Inter Bold" pitchFamily="34" charset="-122"/>
-                <a:cs typeface="Inter Bold" pitchFamily="34" charset="-120"/>
-              </a:rPr>
-              <a:t>Функціональні вимоги</a:t>
-            </a:r>
-            <a:pPr algn="l" indent="0" marL="0">
-              <a:lnSpc>
-                <a:spcPct val="128000"/>
-              </a:lnSpc>
-              <a:buNone/>
-            </a:pPr>
-            <a:r>
-              <a:rPr lang="en-US" sz="1350" dirty="0">
-                <a:solidFill>
-                  <a:srgbClr val="2C2926"/>
-                </a:solidFill>
-                <a:latin typeface="Inter" pitchFamily="34" charset="0"/>
-                <a:ea typeface="Inter" pitchFamily="34" charset="-122"/>
-                <a:cs typeface="Inter" pitchFamily="34" charset="-120"/>
-              </a:rPr>
-              <a:t> — перелік функцій та сервісів системи</a:t>
-            </a:r>
-            <a:endParaRPr lang="en-US" sz="1350" dirty="0"/>
-          </a:p>
-        </p:txBody>
-      </p:sp>
-      <p:pic>
-        <p:nvPicPr>
-          <p:cNvPr id="10" name="Image 3" descr="preencoded.png">    </p:cNvPr>
-          <p:cNvPicPr>
-            <a:picLocks noChangeAspect="1"/>
-          </p:cNvPicPr>
-          <p:nvPr/>
-        </p:nvPicPr>
-        <p:blipFill>
-          <a:blip r:embed="rId7">
-            <a:extLst>
-              <a:ext uri="{96DAC541-7B7A-43D3-8B79-37D633B846F1}">
-                <asvg:svgBlip xmlns:asvg="http://schemas.microsoft.com/office/drawing/2016/SVG/main" r:embed="rId8"/>
-              </a:ext>
-            </a:extLst>
-          </a:blip>
-          <a:stretch>
-            <a:fillRect/>
-          </a:stretch>
-        </p:blipFill>
-        <p:spPr>
-          <a:xfrm>
-            <a:off x="726759" y="4840039"/>
-            <a:ext cx="261336" cy="261342"/>
-          </a:xfrm>
-          <a:prstGeom prst="rect">
-            <a:avLst/>
-          </a:prstGeom>
-        </p:spPr>
-      </p:pic>
-      <p:sp>
-        <p:nvSpPr>
-          <p:cNvPr id="11" name="Text 5"/>
-          <p:cNvSpPr/>
-          <p:nvPr/>
-        </p:nvSpPr>
-        <p:spPr>
-          <a:xfrm>
-            <a:off x="1227702" y="4831358"/>
-            <a:ext cx="2961506" cy="803374"/>
-          </a:xfrm>
-          <a:prstGeom prst="rect">
-            <a:avLst/>
-          </a:prstGeom>
-          <a:noFill/>
-          <a:ln/>
-        </p:spPr>
-        <p:txBody>
-          <a:bodyPr wrap="square" lIns="0" tIns="0" rIns="0" bIns="0" rtlCol="0" anchor="t">
-            <a:normAutofit/>
-          </a:bodyPr>
-          <a:lstStyle/>
-          <a:p>
-            <a:pPr algn="l" indent="0" marL="0">
-              <a:lnSpc>
-                <a:spcPct val="128000"/>
-              </a:lnSpc>
-              <a:buNone/>
-            </a:pPr>
-            <a:r>
-              <a:rPr lang="en-US" sz="1350" b="1" dirty="0">
-                <a:solidFill>
-                  <a:srgbClr val="2C2926"/>
-                </a:solidFill>
-                <a:latin typeface="Inter Bold" pitchFamily="34" charset="0"/>
-                <a:ea typeface="Inter Bold" pitchFamily="34" charset="-122"/>
-                <a:cs typeface="Inter Bold" pitchFamily="34" charset="-120"/>
-              </a:rPr>
-              <a:t>Нефункціональні вимоги</a:t>
-            </a:r>
-            <a:pPr algn="l" indent="0" marL="0">
-              <a:lnSpc>
-                <a:spcPct val="128000"/>
-              </a:lnSpc>
-              <a:buNone/>
-            </a:pPr>
-            <a:r>
-              <a:rPr lang="en-US" sz="1350" dirty="0">
-                <a:solidFill>
-                  <a:srgbClr val="2C2926"/>
-                </a:solidFill>
-                <a:latin typeface="Inter" pitchFamily="34" charset="0"/>
-                <a:ea typeface="Inter" pitchFamily="34" charset="-122"/>
-                <a:cs typeface="Inter" pitchFamily="34" charset="-120"/>
-              </a:rPr>
-              <a:t> — умови виконання функцій (захист, аутентифікація)</a:t>
-            </a:r>
-            <a:endParaRPr lang="en-US" sz="1350" dirty="0"/>
-          </a:p>
-        </p:txBody>
-      </p:sp>
-      <p:pic>
-        <p:nvPicPr>
-          <p:cNvPr id="12" name="Image 4" descr="preencoded.png">    </p:cNvPr>
-          <p:cNvPicPr>
-            <a:picLocks noChangeAspect="1"/>
-          </p:cNvPicPr>
-          <p:nvPr/>
-        </p:nvPicPr>
-        <p:blipFill>
-          <a:blip r:embed="rId9"/>
-          <a:stretch>
-            <a:fillRect/>
-          </a:stretch>
-        </p:blipFill>
-        <p:spPr>
-          <a:xfrm>
-            <a:off x="4620601" y="1637903"/>
-            <a:ext cx="6915870" cy="3919041"/>
-          </a:xfrm>
-          <a:prstGeom prst="rect">
-            <a:avLst/>
-          </a:prstGeom>
-        </p:spPr>
-      </p:pic>
-      <p:sp>
-        <p:nvSpPr>
-          <p:cNvPr id="13" name="Text 6"/>
-          <p:cNvSpPr/>
-          <p:nvPr/>
-        </p:nvSpPr>
-        <p:spPr>
-          <a:xfrm>
-            <a:off x="661475" y="5996087"/>
-            <a:ext cx="11478330" cy="267791"/>
-          </a:xfrm>
-          <a:prstGeom prst="rect">
-            <a:avLst/>
-          </a:prstGeom>
-          <a:noFill/>
-          <a:ln/>
-        </p:spPr>
-        <p:txBody>
-          <a:bodyPr wrap="none" lIns="0" tIns="0" rIns="0" bIns="0" rtlCol="0" anchor="t"/>
-          <a:lstStyle/>
-          <a:p>
-            <a:pPr algn="l" indent="0" marL="0">
-              <a:lnSpc>
-                <a:spcPct val="128000"/>
-              </a:lnSpc>
-              <a:buNone/>
-            </a:pPr>
-            <a:r>
-              <a:rPr lang="en-US" sz="1350" dirty="0">
-                <a:solidFill>
-                  <a:srgbClr val="2C2926"/>
-                </a:solidFill>
-                <a:latin typeface="Inter" pitchFamily="34" charset="0"/>
-                <a:ea typeface="Inter" pitchFamily="34" charset="-122"/>
-                <a:cs typeface="Inter" pitchFamily="34" charset="-120"/>
-              </a:rPr>
-              <a:t>Вимоги задаються через </a:t>
-            </a:r>
-            <a:pPr algn="l" indent="0" marL="0">
-              <a:lnSpc>
-                <a:spcPct val="128000"/>
-              </a:lnSpc>
-              <a:buNone/>
-            </a:pPr>
-            <a:r>
-              <a:rPr lang="en-US" sz="1350" b="1" dirty="0">
-                <a:solidFill>
-                  <a:srgbClr val="2C2926"/>
-                </a:solidFill>
-                <a:latin typeface="Inter Bold" pitchFamily="34" charset="0"/>
-                <a:ea typeface="Inter Bold" pitchFamily="34" charset="-122"/>
-                <a:cs typeface="Inter Bold" pitchFamily="34" charset="-120"/>
-              </a:rPr>
-              <a:t>варіанти використання (use case)</a:t>
-            </a:r>
-            <a:pPr algn="l" indent="0" marL="0">
-              <a:lnSpc>
-                <a:spcPct val="128000"/>
-              </a:lnSpc>
-              <a:buNone/>
-            </a:pPr>
-            <a:r>
-              <a:rPr lang="en-US" sz="1350" dirty="0">
-                <a:solidFill>
-                  <a:srgbClr val="2C2926"/>
-                </a:solidFill>
-                <a:latin typeface="Inter" pitchFamily="34" charset="0"/>
-                <a:ea typeface="Inter" pitchFamily="34" charset="-122"/>
-                <a:cs typeface="Inter" pitchFamily="34" charset="-120"/>
-              </a:rPr>
-              <a:t>, сценарії або прецеденти з графічною нотацією UML.</a:t>
-            </a:r>
-            <a:endParaRPr lang="en-US" sz="1350" dirty="0"/>
-          </a:p>
-        </p:txBody>
-      </p:sp>
-    </p:spTree>
-  </p:cSld>
-  <p:clrMapOvr>
-    <a:masterClrMapping/>
-  </p:clrMapOvr>
-</p:sld>
-</file>
-
-<file path=ppt/slides/slide9.xml><?xml version="1.0" encoding="utf-8"?>
-<p:sld xmlns:a="http://schemas.openxmlformats.org/drawingml/2006/main" xmlns:r="http://schemas.openxmlformats.org/officeDocument/2006/relationships" xmlns:p="http://schemas.openxmlformats.org/presentationml/2006/main">
-  <p:cSld name="Slide 9">
-    <p:spTree>
-      <p:nvGrpSpPr>
-        <p:cNvPr id="1" name=""/>
-        <p:cNvGrpSpPr/>
-        <p:nvPr/>
-      </p:nvGrpSpPr>
-      <p:grpSpPr>
-        <a:xfrm>
-          <a:off x="0" y="0"/>
-          <a:ext cx="0" cy="0"/>
-          <a:chOff x="0" y="0"/>
-          <a:chExt cx="0" cy="0"/>
-        </a:xfrm>
-      </p:grpSpPr>
-      <p:sp>
-        <p:nvSpPr>
-          <p:cNvPr id="2" name="Text 0"/>
-          <p:cNvSpPr/>
-          <p:nvPr/>
-        </p:nvSpPr>
-        <p:spPr>
-          <a:xfrm>
-            <a:off x="661475" y="543719"/>
-            <a:ext cx="10868745" cy="498376"/>
-          </a:xfrm>
-          <a:prstGeom prst="rect">
-            <a:avLst/>
-          </a:prstGeom>
-          <a:noFill/>
-          <a:ln/>
-        </p:spPr>
-        <p:txBody>
-          <a:bodyPr wrap="none" lIns="0" tIns="0" rIns="0" bIns="0" rtlCol="0" anchor="t"/>
-          <a:lstStyle/>
-          <a:p>
-            <a:pPr algn="l" indent="0" marL="0">
-              <a:lnSpc>
-                <a:spcPct val="104000"/>
-              </a:lnSpc>
-              <a:buNone/>
-            </a:pPr>
-            <a:r>
-              <a:rPr lang="en-US" sz="3100" dirty="0">
-                <a:solidFill>
-                  <a:srgbClr val="2C2926"/>
-                </a:solidFill>
-                <a:latin typeface="Bricolage Grotesque SemiBold" pitchFamily="34" charset="0"/>
-                <a:ea typeface="Bricolage Grotesque SemiBold" pitchFamily="34" charset="-122"/>
-                <a:cs typeface="Bricolage Grotesque SemiBold" pitchFamily="34" charset="-120"/>
-              </a:rPr>
-              <a:t>Ядро знань SWEBOK</a:t>
-            </a:r>
-            <a:endParaRPr lang="en-US" sz="3100" dirty="0"/>
-          </a:p>
-        </p:txBody>
-      </p:sp>
-      <p:sp>
-        <p:nvSpPr>
-          <p:cNvPr id="3" name="Text 1"/>
-          <p:cNvSpPr/>
-          <p:nvPr/>
-        </p:nvSpPr>
-        <p:spPr>
-          <a:xfrm>
-            <a:off x="661475" y="1311176"/>
-            <a:ext cx="11478330" cy="235148"/>
-          </a:xfrm>
-          <a:prstGeom prst="rect">
-            <a:avLst/>
-          </a:prstGeom>
-          <a:noFill/>
-          <a:ln/>
-        </p:spPr>
-        <p:txBody>
-          <a:bodyPr wrap="none" lIns="0" tIns="0" rIns="0" bIns="0" rtlCol="0" anchor="t"/>
-          <a:lstStyle/>
-          <a:p>
-            <a:pPr algn="l" indent="0" marL="0">
-              <a:lnSpc>
-                <a:spcPct val="123000"/>
-              </a:lnSpc>
-              <a:buNone/>
-            </a:pPr>
-            <a:r>
-              <a:rPr lang="en-US" sz="1250" dirty="0">
-                <a:solidFill>
-                  <a:srgbClr val="2C2926"/>
-                </a:solidFill>
-                <a:latin typeface="Inter" pitchFamily="34" charset="0"/>
-                <a:ea typeface="Inter" pitchFamily="34" charset="-122"/>
-                <a:cs typeface="Inter" pitchFamily="34" charset="-120"/>
-              </a:rPr>
-              <a:t>У </a:t>
-            </a:r>
-            <a:pPr algn="l" indent="0" marL="0">
-              <a:lnSpc>
-                <a:spcPct val="123000"/>
-              </a:lnSpc>
-              <a:buNone/>
-            </a:pPr>
-            <a:r>
-              <a:rPr lang="en-US" sz="1250" b="1" dirty="0">
-                <a:solidFill>
-                  <a:srgbClr val="2C2926"/>
-                </a:solidFill>
-                <a:latin typeface="Inter Bold" pitchFamily="34" charset="0"/>
-                <a:ea typeface="Inter Bold" pitchFamily="34" charset="-122"/>
-                <a:cs typeface="Inter Bold" pitchFamily="34" charset="-120"/>
-              </a:rPr>
-              <a:t>1993 р.</a:t>
-            </a:r>
-            <a:pPr algn="l" indent="0" marL="0">
-              <a:lnSpc>
-                <a:spcPct val="123000"/>
-              </a:lnSpc>
-              <a:buNone/>
-            </a:pPr>
-            <a:r>
-              <a:rPr lang="en-US" sz="1250" dirty="0">
-                <a:solidFill>
-                  <a:srgbClr val="2C2926"/>
-                </a:solidFill>
-                <a:latin typeface="Inter" pitchFamily="34" charset="0"/>
-                <a:ea typeface="Inter" pitchFamily="34" charset="-122"/>
-                <a:cs typeface="Inter" pitchFamily="34" charset="-120"/>
-              </a:rPr>
-              <a:t> ACM та IEEE створили комітет SWECC для визначення ядра знань ПІ. SWEBOK охоплює </a:t>
-            </a:r>
-            <a:pPr algn="l" indent="0" marL="0">
-              <a:lnSpc>
-                <a:spcPct val="123000"/>
-              </a:lnSpc>
-              <a:buNone/>
-            </a:pPr>
-            <a:r>
-              <a:rPr lang="en-US" sz="1250" dirty="0">
-                <a:solidFill>
-                  <a:srgbClr val="E7BF6A"/>
-                </a:solidFill>
-                <a:latin typeface="Inter" pitchFamily="34" charset="0"/>
-                <a:ea typeface="Inter" pitchFamily="34" charset="-122"/>
-                <a:cs typeface="Inter" pitchFamily="34" charset="-120"/>
-              </a:rPr>
-              <a:t>10 областей знань</a:t>
-            </a:r>
-            <a:pPr algn="l" indent="0" marL="0">
-              <a:lnSpc>
-                <a:spcPct val="123000"/>
-              </a:lnSpc>
-              <a:buNone/>
-            </a:pPr>
-            <a:r>
-              <a:rPr lang="en-US" sz="1250" dirty="0">
-                <a:solidFill>
-                  <a:srgbClr val="2C2926"/>
-                </a:solidFill>
-                <a:latin typeface="Inter" pitchFamily="34" charset="0"/>
-                <a:ea typeface="Inter" pitchFamily="34" charset="-122"/>
-                <a:cs typeface="Inter" pitchFamily="34" charset="-120"/>
-              </a:rPr>
-              <a:t>:</a:t>
-            </a:r>
-            <a:endParaRPr lang="en-US" sz="1250" dirty="0"/>
-          </a:p>
-        </p:txBody>
-      </p:sp>
-      <p:sp>
-        <p:nvSpPr>
-          <p:cNvPr id="4" name="Text 2"/>
-          <p:cNvSpPr/>
-          <p:nvPr/>
-        </p:nvSpPr>
-        <p:spPr>
-          <a:xfrm>
-            <a:off x="661475" y="1697633"/>
-            <a:ext cx="318881" cy="199330"/>
-          </a:xfrm>
-          <a:prstGeom prst="rect">
-            <a:avLst/>
-          </a:prstGeom>
-          <a:noFill/>
-          <a:ln/>
-        </p:spPr>
-        <p:txBody>
-          <a:bodyPr wrap="none" lIns="0" tIns="0" rIns="0" bIns="0" rtlCol="0" anchor="ctr"/>
-          <a:lstStyle/>
-          <a:p>
-            <a:pPr algn="l" indent="0" marL="0">
-              <a:lnSpc>
-                <a:spcPct val="100000"/>
-              </a:lnSpc>
-              <a:buNone/>
-            </a:pPr>
-            <a:r>
-              <a:rPr lang="en-US" sz="1250" dirty="0">
-                <a:solidFill>
-                  <a:srgbClr val="2C2926"/>
-                </a:solidFill>
-                <a:latin typeface="Bricolage Grotesque Light" pitchFamily="34" charset="0"/>
-                <a:ea typeface="Bricolage Grotesque Light" pitchFamily="34" charset="-122"/>
-                <a:cs typeface="Bricolage Grotesque Light" pitchFamily="34" charset="-120"/>
-              </a:rPr>
-              <a:t>01</a:t>
-            </a:r>
-            <a:endParaRPr lang="en-US" sz="1250" dirty="0"/>
-          </a:p>
-        </p:txBody>
-      </p:sp>
-      <p:sp>
-        <p:nvSpPr>
-          <p:cNvPr id="5" name="Shape 3"/>
-          <p:cNvSpPr/>
-          <p:nvPr/>
-        </p:nvSpPr>
-        <p:spPr>
-          <a:xfrm>
-            <a:off x="661475" y="1949549"/>
-            <a:ext cx="5367104" cy="19050"/>
-          </a:xfrm>
-          <a:prstGeom prst="rect">
-            <a:avLst/>
-          </a:prstGeom>
-          <a:solidFill>
-            <a:srgbClr val="DA9B49"/>
-          </a:solidFill>
-          <a:ln/>
-        </p:spPr>
-      </p:sp>
-      <p:sp>
-        <p:nvSpPr>
-          <p:cNvPr id="6" name="Text 4"/>
-          <p:cNvSpPr/>
-          <p:nvPr/>
-        </p:nvSpPr>
-        <p:spPr>
-          <a:xfrm>
-            <a:off x="661475" y="2067322"/>
-            <a:ext cx="5367104" cy="249138"/>
-          </a:xfrm>
-          <a:prstGeom prst="rect">
-            <a:avLst/>
-          </a:prstGeom>
-          <a:noFill/>
-          <a:ln/>
-        </p:spPr>
-        <p:txBody>
-          <a:bodyPr wrap="none" lIns="0" tIns="0" rIns="0" bIns="0" rtlCol="0" anchor="t"/>
-          <a:lstStyle/>
-          <a:p>
-            <a:pPr algn="l" indent="0" marL="0">
-              <a:lnSpc>
-                <a:spcPct val="104000"/>
-              </a:lnSpc>
-              <a:buNone/>
-            </a:pPr>
-            <a:r>
-              <a:rPr lang="en-US" sz="1550" dirty="0">
-                <a:solidFill>
-                  <a:srgbClr val="2C2926"/>
-                </a:solidFill>
-                <a:latin typeface="Bricolage Grotesque SemiBold" pitchFamily="34" charset="0"/>
-                <a:ea typeface="Bricolage Grotesque SemiBold" pitchFamily="34" charset="-122"/>
-                <a:cs typeface="Bricolage Grotesque SemiBold" pitchFamily="34" charset="-120"/>
-              </a:rPr>
-              <a:t>Програмні вимоги</a:t>
-            </a:r>
-            <a:endParaRPr lang="en-US" sz="1550" dirty="0"/>
-          </a:p>
-        </p:txBody>
-      </p:sp>
-      <p:sp>
-        <p:nvSpPr>
-          <p:cNvPr id="7" name="Text 5"/>
-          <p:cNvSpPr/>
-          <p:nvPr/>
-        </p:nvSpPr>
-        <p:spPr>
-          <a:xfrm>
-            <a:off x="6163116" y="1697633"/>
-            <a:ext cx="318881" cy="199330"/>
-          </a:xfrm>
-          <a:prstGeom prst="rect">
-            <a:avLst/>
-          </a:prstGeom>
-          <a:noFill/>
-          <a:ln/>
-        </p:spPr>
-        <p:txBody>
-          <a:bodyPr wrap="none" lIns="0" tIns="0" rIns="0" bIns="0" rtlCol="0" anchor="ctr"/>
-          <a:lstStyle/>
-          <a:p>
-            <a:pPr algn="l" indent="0" marL="0">
-              <a:lnSpc>
-                <a:spcPct val="100000"/>
-              </a:lnSpc>
-              <a:buNone/>
-            </a:pPr>
-            <a:r>
-              <a:rPr lang="en-US" sz="1250" dirty="0">
-                <a:solidFill>
-                  <a:srgbClr val="2C2926"/>
-                </a:solidFill>
-                <a:latin typeface="Bricolage Grotesque Light" pitchFamily="34" charset="0"/>
-                <a:ea typeface="Bricolage Grotesque Light" pitchFamily="34" charset="-122"/>
-                <a:cs typeface="Bricolage Grotesque Light" pitchFamily="34" charset="-120"/>
-              </a:rPr>
-              <a:t>02</a:t>
-            </a:r>
-            <a:endParaRPr lang="en-US" sz="1250" dirty="0"/>
-          </a:p>
-        </p:txBody>
-      </p:sp>
-      <p:sp>
-        <p:nvSpPr>
-          <p:cNvPr id="8" name="Shape 6"/>
-          <p:cNvSpPr/>
-          <p:nvPr/>
-        </p:nvSpPr>
-        <p:spPr>
-          <a:xfrm>
-            <a:off x="6163116" y="1949549"/>
-            <a:ext cx="5367104" cy="19050"/>
-          </a:xfrm>
-          <a:prstGeom prst="rect">
-            <a:avLst/>
-          </a:prstGeom>
-          <a:solidFill>
-            <a:srgbClr val="DA9B49"/>
-          </a:solidFill>
-          <a:ln/>
-        </p:spPr>
-      </p:sp>
-      <p:sp>
-        <p:nvSpPr>
-          <p:cNvPr id="9" name="Text 7"/>
-          <p:cNvSpPr/>
-          <p:nvPr/>
-        </p:nvSpPr>
-        <p:spPr>
-          <a:xfrm>
-            <a:off x="6163116" y="2067322"/>
-            <a:ext cx="5367104" cy="249138"/>
-          </a:xfrm>
-          <a:prstGeom prst="rect">
-            <a:avLst/>
-          </a:prstGeom>
-          <a:noFill/>
-          <a:ln/>
-        </p:spPr>
-        <p:txBody>
-          <a:bodyPr wrap="none" lIns="0" tIns="0" rIns="0" bIns="0" rtlCol="0" anchor="t"/>
-          <a:lstStyle/>
-          <a:p>
-            <a:pPr algn="l" indent="0" marL="0">
-              <a:lnSpc>
-                <a:spcPct val="104000"/>
-              </a:lnSpc>
-              <a:buNone/>
-            </a:pPr>
-            <a:r>
-              <a:rPr lang="en-US" sz="1550" dirty="0">
-                <a:solidFill>
-                  <a:srgbClr val="2C2926"/>
-                </a:solidFill>
-                <a:latin typeface="Bricolage Grotesque SemiBold" pitchFamily="34" charset="0"/>
-                <a:ea typeface="Bricolage Grotesque SemiBold" pitchFamily="34" charset="-122"/>
-                <a:cs typeface="Bricolage Grotesque SemiBold" pitchFamily="34" charset="-120"/>
-              </a:rPr>
-              <a:t>Проектування ПЗ</a:t>
-            </a:r>
-            <a:endParaRPr lang="en-US" sz="1550" dirty="0"/>
-          </a:p>
-        </p:txBody>
-      </p:sp>
-      <p:sp>
-        <p:nvSpPr>
-          <p:cNvPr id="10" name="Text 8"/>
-          <p:cNvSpPr/>
-          <p:nvPr/>
-        </p:nvSpPr>
-        <p:spPr>
-          <a:xfrm>
-            <a:off x="661475" y="2570559"/>
-            <a:ext cx="318881" cy="199330"/>
-          </a:xfrm>
-          <a:prstGeom prst="rect">
-            <a:avLst/>
-          </a:prstGeom>
-          <a:noFill/>
-          <a:ln/>
-        </p:spPr>
-        <p:txBody>
-          <a:bodyPr wrap="none" lIns="0" tIns="0" rIns="0" bIns="0" rtlCol="0" anchor="ctr"/>
-          <a:lstStyle/>
-          <a:p>
-            <a:pPr algn="l" indent="0" marL="0">
-              <a:lnSpc>
-                <a:spcPct val="100000"/>
-              </a:lnSpc>
-              <a:buNone/>
-            </a:pPr>
-            <a:r>
-              <a:rPr lang="en-US" sz="1250" dirty="0">
-                <a:solidFill>
-                  <a:srgbClr val="2C2926"/>
-                </a:solidFill>
-                <a:latin typeface="Bricolage Grotesque Light" pitchFamily="34" charset="0"/>
-                <a:ea typeface="Bricolage Grotesque Light" pitchFamily="34" charset="-122"/>
-                <a:cs typeface="Bricolage Grotesque Light" pitchFamily="34" charset="-120"/>
-              </a:rPr>
-              <a:t>03</a:t>
-            </a:r>
-            <a:endParaRPr lang="en-US" sz="1250" dirty="0"/>
-          </a:p>
-        </p:txBody>
-      </p:sp>
-      <p:sp>
-        <p:nvSpPr>
-          <p:cNvPr id="11" name="Shape 9"/>
-          <p:cNvSpPr/>
-          <p:nvPr/>
-        </p:nvSpPr>
-        <p:spPr>
-          <a:xfrm>
-            <a:off x="661475" y="2806601"/>
-            <a:ext cx="5367104" cy="19050"/>
-          </a:xfrm>
-          <a:prstGeom prst="rect">
-            <a:avLst/>
-          </a:prstGeom>
-          <a:solidFill>
-            <a:srgbClr val="DA9B49"/>
-          </a:solidFill>
-          <a:ln/>
-        </p:spPr>
-      </p:sp>
-      <p:sp>
-        <p:nvSpPr>
-          <p:cNvPr id="12" name="Text 10"/>
-          <p:cNvSpPr/>
-          <p:nvPr/>
-        </p:nvSpPr>
-        <p:spPr>
-          <a:xfrm>
-            <a:off x="661475" y="2940248"/>
-            <a:ext cx="5367104" cy="249138"/>
-          </a:xfrm>
-          <a:prstGeom prst="rect">
-            <a:avLst/>
-          </a:prstGeom>
-          <a:noFill/>
-          <a:ln/>
-        </p:spPr>
-        <p:txBody>
-          <a:bodyPr wrap="none" lIns="0" tIns="0" rIns="0" bIns="0" rtlCol="0" anchor="t"/>
-          <a:lstStyle/>
-          <a:p>
-            <a:pPr algn="l" indent="0" marL="0">
-              <a:lnSpc>
-                <a:spcPct val="104000"/>
-              </a:lnSpc>
-              <a:buNone/>
-            </a:pPr>
-            <a:r>
-              <a:rPr lang="en-US" sz="1550" dirty="0">
-                <a:solidFill>
-                  <a:srgbClr val="2C2926"/>
-                </a:solidFill>
-                <a:latin typeface="Bricolage Grotesque SemiBold" pitchFamily="34" charset="0"/>
-                <a:ea typeface="Bricolage Grotesque SemiBold" pitchFamily="34" charset="-122"/>
-                <a:cs typeface="Bricolage Grotesque SemiBold" pitchFamily="34" charset="-120"/>
-              </a:rPr>
-              <a:t>Конструювання ПЗ</a:t>
-            </a:r>
-            <a:endParaRPr lang="en-US" sz="1550" dirty="0"/>
-          </a:p>
-        </p:txBody>
-      </p:sp>
-      <p:sp>
-        <p:nvSpPr>
-          <p:cNvPr id="13" name="Text 11"/>
-          <p:cNvSpPr/>
-          <p:nvPr/>
-        </p:nvSpPr>
-        <p:spPr>
-          <a:xfrm>
-            <a:off x="6163116" y="2570559"/>
-            <a:ext cx="318881" cy="199330"/>
-          </a:xfrm>
-          <a:prstGeom prst="rect">
-            <a:avLst/>
-          </a:prstGeom>
-          <a:noFill/>
-          <a:ln/>
-        </p:spPr>
-        <p:txBody>
-          <a:bodyPr wrap="none" lIns="0" tIns="0" rIns="0" bIns="0" rtlCol="0" anchor="ctr"/>
-          <a:lstStyle/>
-          <a:p>
-            <a:pPr algn="l" indent="0" marL="0">
-              <a:lnSpc>
-                <a:spcPct val="100000"/>
-              </a:lnSpc>
-              <a:buNone/>
-            </a:pPr>
-            <a:r>
-              <a:rPr lang="en-US" sz="1250" dirty="0">
-                <a:solidFill>
-                  <a:srgbClr val="2C2926"/>
-                </a:solidFill>
-                <a:latin typeface="Bricolage Grotesque Light" pitchFamily="34" charset="0"/>
-                <a:ea typeface="Bricolage Grotesque Light" pitchFamily="34" charset="-122"/>
-                <a:cs typeface="Bricolage Grotesque Light" pitchFamily="34" charset="-120"/>
-              </a:rPr>
-              <a:t>04</a:t>
-            </a:r>
-            <a:endParaRPr lang="en-US" sz="1250" dirty="0"/>
-          </a:p>
-        </p:txBody>
-      </p:sp>
-      <p:sp>
-        <p:nvSpPr>
-          <p:cNvPr id="14" name="Shape 12"/>
-          <p:cNvSpPr/>
-          <p:nvPr/>
-        </p:nvSpPr>
-        <p:spPr>
-          <a:xfrm>
-            <a:off x="6163116" y="2806601"/>
-            <a:ext cx="5367104" cy="19050"/>
-          </a:xfrm>
-          <a:prstGeom prst="rect">
-            <a:avLst/>
-          </a:prstGeom>
-          <a:solidFill>
-            <a:srgbClr val="DA9B49"/>
-          </a:solidFill>
-          <a:ln/>
-        </p:spPr>
-      </p:sp>
-      <p:sp>
-        <p:nvSpPr>
-          <p:cNvPr id="15" name="Text 13"/>
-          <p:cNvSpPr/>
-          <p:nvPr/>
-        </p:nvSpPr>
-        <p:spPr>
-          <a:xfrm>
-            <a:off x="6163116" y="2940248"/>
-            <a:ext cx="5367104" cy="249138"/>
-          </a:xfrm>
-          <a:prstGeom prst="rect">
-            <a:avLst/>
-          </a:prstGeom>
-          <a:noFill/>
-          <a:ln/>
-        </p:spPr>
-        <p:txBody>
-          <a:bodyPr wrap="none" lIns="0" tIns="0" rIns="0" bIns="0" rtlCol="0" anchor="t"/>
-          <a:lstStyle/>
-          <a:p>
-            <a:pPr algn="l" indent="0" marL="0">
-              <a:lnSpc>
-                <a:spcPct val="104000"/>
-              </a:lnSpc>
-              <a:buNone/>
-            </a:pPr>
-            <a:r>
-              <a:rPr lang="en-US" sz="1550" dirty="0">
-                <a:solidFill>
-                  <a:srgbClr val="2C2926"/>
-                </a:solidFill>
-                <a:latin typeface="Bricolage Grotesque SemiBold" pitchFamily="34" charset="0"/>
-                <a:ea typeface="Bricolage Grotesque SemiBold" pitchFamily="34" charset="-122"/>
-                <a:cs typeface="Bricolage Grotesque SemiBold" pitchFamily="34" charset="-120"/>
-              </a:rPr>
-              <a:t>Тестування ПЗ</a:t>
-            </a:r>
-            <a:endParaRPr lang="en-US" sz="1550" dirty="0"/>
-          </a:p>
-        </p:txBody>
-      </p:sp>
-      <p:sp>
-        <p:nvSpPr>
-          <p:cNvPr id="16" name="Text 14"/>
-          <p:cNvSpPr/>
-          <p:nvPr/>
-        </p:nvSpPr>
-        <p:spPr>
-          <a:xfrm>
-            <a:off x="661475" y="3443486"/>
-            <a:ext cx="318881" cy="199330"/>
-          </a:xfrm>
-          <a:prstGeom prst="rect">
-            <a:avLst/>
-          </a:prstGeom>
-          <a:noFill/>
-          <a:ln/>
-        </p:spPr>
-        <p:txBody>
-          <a:bodyPr wrap="none" lIns="0" tIns="0" rIns="0" bIns="0" rtlCol="0" anchor="ctr"/>
-          <a:lstStyle/>
-          <a:p>
-            <a:pPr algn="l" indent="0" marL="0">
-              <a:lnSpc>
-                <a:spcPct val="100000"/>
-              </a:lnSpc>
-              <a:buNone/>
-            </a:pPr>
-            <a:r>
-              <a:rPr lang="en-US" sz="1250" dirty="0">
-                <a:solidFill>
-                  <a:srgbClr val="2C2926"/>
-                </a:solidFill>
-                <a:latin typeface="Bricolage Grotesque Light" pitchFamily="34" charset="0"/>
-                <a:ea typeface="Bricolage Grotesque Light" pitchFamily="34" charset="-122"/>
-                <a:cs typeface="Bricolage Grotesque Light" pitchFamily="34" charset="-120"/>
-              </a:rPr>
-              <a:t>05</a:t>
-            </a:r>
-            <a:endParaRPr lang="en-US" sz="1250" dirty="0"/>
-          </a:p>
-        </p:txBody>
-      </p:sp>
-      <p:sp>
-        <p:nvSpPr>
-          <p:cNvPr id="17" name="Shape 15"/>
-          <p:cNvSpPr/>
-          <p:nvPr/>
-        </p:nvSpPr>
-        <p:spPr>
-          <a:xfrm>
-            <a:off x="661475" y="3663553"/>
-            <a:ext cx="5367104" cy="19050"/>
-          </a:xfrm>
-          <a:prstGeom prst="rect">
-            <a:avLst/>
-          </a:prstGeom>
-          <a:solidFill>
-            <a:srgbClr val="DA9B49"/>
-          </a:solidFill>
-          <a:ln/>
-        </p:spPr>
-      </p:sp>
-      <p:sp>
-        <p:nvSpPr>
-          <p:cNvPr id="18" name="Text 16"/>
-          <p:cNvSpPr/>
-          <p:nvPr/>
-        </p:nvSpPr>
-        <p:spPr>
-          <a:xfrm>
-            <a:off x="661475" y="3813175"/>
-            <a:ext cx="5367104" cy="249138"/>
-          </a:xfrm>
-          <a:prstGeom prst="rect">
-            <a:avLst/>
-          </a:prstGeom>
-          <a:noFill/>
-          <a:ln/>
-        </p:spPr>
-        <p:txBody>
-          <a:bodyPr wrap="none" lIns="0" tIns="0" rIns="0" bIns="0" rtlCol="0" anchor="t"/>
-          <a:lstStyle/>
-          <a:p>
-            <a:pPr algn="l" indent="0" marL="0">
-              <a:lnSpc>
-                <a:spcPct val="104000"/>
-              </a:lnSpc>
-              <a:buNone/>
-            </a:pPr>
-            <a:r>
-              <a:rPr lang="en-US" sz="1550" dirty="0">
-                <a:solidFill>
-                  <a:srgbClr val="2C2926"/>
-                </a:solidFill>
-                <a:latin typeface="Bricolage Grotesque SemiBold" pitchFamily="34" charset="0"/>
-                <a:ea typeface="Bricolage Grotesque SemiBold" pitchFamily="34" charset="-122"/>
-                <a:cs typeface="Bricolage Grotesque SemiBold" pitchFamily="34" charset="-120"/>
-              </a:rPr>
-              <a:t>Супровід ПЗ</a:t>
-            </a:r>
-            <a:endParaRPr lang="en-US" sz="1550" dirty="0"/>
-          </a:p>
-        </p:txBody>
-      </p:sp>
-      <p:sp>
-        <p:nvSpPr>
-          <p:cNvPr id="19" name="Text 17"/>
-          <p:cNvSpPr/>
-          <p:nvPr/>
-        </p:nvSpPr>
-        <p:spPr>
-          <a:xfrm>
-            <a:off x="6163116" y="3443486"/>
-            <a:ext cx="318881" cy="199330"/>
-          </a:xfrm>
-          <a:prstGeom prst="rect">
-            <a:avLst/>
-          </a:prstGeom>
-          <a:noFill/>
-          <a:ln/>
-        </p:spPr>
-        <p:txBody>
-          <a:bodyPr wrap="none" lIns="0" tIns="0" rIns="0" bIns="0" rtlCol="0" anchor="ctr"/>
-          <a:lstStyle/>
-          <a:p>
-            <a:pPr algn="l" indent="0" marL="0">
-              <a:lnSpc>
-                <a:spcPct val="100000"/>
-              </a:lnSpc>
-              <a:buNone/>
-            </a:pPr>
-            <a:r>
-              <a:rPr lang="en-US" sz="1250" dirty="0">
-                <a:solidFill>
-                  <a:srgbClr val="2C2926"/>
-                </a:solidFill>
-                <a:latin typeface="Bricolage Grotesque Light" pitchFamily="34" charset="0"/>
-                <a:ea typeface="Bricolage Grotesque Light" pitchFamily="34" charset="-122"/>
-                <a:cs typeface="Bricolage Grotesque Light" pitchFamily="34" charset="-120"/>
-              </a:rPr>
-              <a:t>06</a:t>
-            </a:r>
-            <a:endParaRPr lang="en-US" sz="1250" dirty="0"/>
-          </a:p>
-        </p:txBody>
-      </p:sp>
-      <p:sp>
-        <p:nvSpPr>
-          <p:cNvPr id="20" name="Shape 18"/>
-          <p:cNvSpPr/>
-          <p:nvPr/>
-        </p:nvSpPr>
-        <p:spPr>
-          <a:xfrm>
-            <a:off x="6163116" y="3663553"/>
-            <a:ext cx="5367104" cy="19050"/>
-          </a:xfrm>
-          <a:prstGeom prst="rect">
-            <a:avLst/>
-          </a:prstGeom>
-          <a:solidFill>
-            <a:srgbClr val="DA9B49"/>
-          </a:solidFill>
-          <a:ln/>
-        </p:spPr>
-      </p:sp>
-      <p:sp>
-        <p:nvSpPr>
-          <p:cNvPr id="21" name="Text 19"/>
-          <p:cNvSpPr/>
-          <p:nvPr/>
-        </p:nvSpPr>
-        <p:spPr>
-          <a:xfrm>
-            <a:off x="6163116" y="3813175"/>
-            <a:ext cx="5367104" cy="249138"/>
-          </a:xfrm>
-          <a:prstGeom prst="rect">
-            <a:avLst/>
-          </a:prstGeom>
-          <a:noFill/>
-          <a:ln/>
-        </p:spPr>
-        <p:txBody>
-          <a:bodyPr wrap="none" lIns="0" tIns="0" rIns="0" bIns="0" rtlCol="0" anchor="t"/>
-          <a:lstStyle/>
-          <a:p>
-            <a:pPr algn="l" indent="0" marL="0">
-              <a:lnSpc>
-                <a:spcPct val="104000"/>
-              </a:lnSpc>
-              <a:buNone/>
-            </a:pPr>
-            <a:r>
-              <a:rPr lang="en-US" sz="1550" dirty="0">
-                <a:solidFill>
-                  <a:srgbClr val="2C2926"/>
-                </a:solidFill>
-                <a:latin typeface="Bricolage Grotesque SemiBold" pitchFamily="34" charset="0"/>
-                <a:ea typeface="Bricolage Grotesque SemiBold" pitchFamily="34" charset="-122"/>
-                <a:cs typeface="Bricolage Grotesque SemiBold" pitchFamily="34" charset="-120"/>
-              </a:rPr>
-              <a:t>Керування конфігурацією ПЗ</a:t>
-            </a:r>
-            <a:endParaRPr lang="en-US" sz="1550" dirty="0"/>
-          </a:p>
-        </p:txBody>
-      </p:sp>
-      <p:sp>
-        <p:nvSpPr>
-          <p:cNvPr id="22" name="Text 20"/>
-          <p:cNvSpPr/>
-          <p:nvPr/>
-        </p:nvSpPr>
-        <p:spPr>
-          <a:xfrm>
-            <a:off x="661475" y="4316413"/>
-            <a:ext cx="318881" cy="199330"/>
-          </a:xfrm>
-          <a:prstGeom prst="rect">
-            <a:avLst/>
-          </a:prstGeom>
-          <a:noFill/>
-          <a:ln/>
-        </p:spPr>
-        <p:txBody>
-          <a:bodyPr wrap="none" lIns="0" tIns="0" rIns="0" bIns="0" rtlCol="0" anchor="ctr"/>
-          <a:lstStyle/>
-          <a:p>
-            <a:pPr algn="l" indent="0" marL="0">
-              <a:lnSpc>
-                <a:spcPct val="100000"/>
-              </a:lnSpc>
-              <a:buNone/>
-            </a:pPr>
-            <a:r>
-              <a:rPr lang="en-US" sz="1250" dirty="0">
-                <a:solidFill>
-                  <a:srgbClr val="2C2926"/>
-                </a:solidFill>
-                <a:latin typeface="Bricolage Grotesque Light" pitchFamily="34" charset="0"/>
-                <a:ea typeface="Bricolage Grotesque Light" pitchFamily="34" charset="-122"/>
-                <a:cs typeface="Bricolage Grotesque Light" pitchFamily="34" charset="-120"/>
-              </a:rPr>
-              <a:t>07</a:t>
-            </a:r>
-            <a:endParaRPr lang="en-US" sz="1250" dirty="0"/>
-          </a:p>
-        </p:txBody>
-      </p:sp>
-      <p:sp>
-        <p:nvSpPr>
-          <p:cNvPr id="23" name="Shape 21"/>
-          <p:cNvSpPr/>
-          <p:nvPr/>
-        </p:nvSpPr>
-        <p:spPr>
-          <a:xfrm>
-            <a:off x="661475" y="4520605"/>
-            <a:ext cx="5367104" cy="19050"/>
-          </a:xfrm>
-          <a:prstGeom prst="rect">
-            <a:avLst/>
-          </a:prstGeom>
-          <a:solidFill>
-            <a:srgbClr val="DA9B49"/>
-          </a:solidFill>
-          <a:ln/>
-        </p:spPr>
-      </p:sp>
-      <p:sp>
-        <p:nvSpPr>
-          <p:cNvPr id="24" name="Text 22"/>
-          <p:cNvSpPr/>
-          <p:nvPr/>
-        </p:nvSpPr>
-        <p:spPr>
-          <a:xfrm>
-            <a:off x="661475" y="4686102"/>
-            <a:ext cx="5367104" cy="249138"/>
-          </a:xfrm>
-          <a:prstGeom prst="rect">
-            <a:avLst/>
-          </a:prstGeom>
-          <a:noFill/>
-          <a:ln/>
-        </p:spPr>
-        <p:txBody>
-          <a:bodyPr wrap="none" lIns="0" tIns="0" rIns="0" bIns="0" rtlCol="0" anchor="t"/>
-          <a:lstStyle/>
-          <a:p>
-            <a:pPr algn="l" indent="0" marL="0">
-              <a:lnSpc>
-                <a:spcPct val="104000"/>
-              </a:lnSpc>
-              <a:buNone/>
-            </a:pPr>
-            <a:r>
-              <a:rPr lang="en-US" sz="1550" dirty="0">
-                <a:solidFill>
-                  <a:srgbClr val="2C2926"/>
-                </a:solidFill>
-                <a:latin typeface="Bricolage Grotesque SemiBold" pitchFamily="34" charset="0"/>
-                <a:ea typeface="Bricolage Grotesque SemiBold" pitchFamily="34" charset="-122"/>
-                <a:cs typeface="Bricolage Grotesque SemiBold" pitchFamily="34" charset="-120"/>
-              </a:rPr>
-              <a:t>Керування інженерією ПЗ</a:t>
-            </a:r>
-            <a:endParaRPr lang="en-US" sz="1550" dirty="0"/>
-          </a:p>
-        </p:txBody>
-      </p:sp>
-      <p:sp>
-        <p:nvSpPr>
-          <p:cNvPr id="25" name="Text 23"/>
-          <p:cNvSpPr/>
-          <p:nvPr/>
-        </p:nvSpPr>
-        <p:spPr>
-          <a:xfrm>
-            <a:off x="6163116" y="4316413"/>
-            <a:ext cx="318881" cy="199330"/>
-          </a:xfrm>
-          <a:prstGeom prst="rect">
-            <a:avLst/>
-          </a:prstGeom>
-          <a:noFill/>
-          <a:ln/>
-        </p:spPr>
-        <p:txBody>
-          <a:bodyPr wrap="none" lIns="0" tIns="0" rIns="0" bIns="0" rtlCol="0" anchor="ctr"/>
-          <a:lstStyle/>
-          <a:p>
-            <a:pPr algn="l" indent="0" marL="0">
-              <a:lnSpc>
-                <a:spcPct val="100000"/>
-              </a:lnSpc>
-              <a:buNone/>
-            </a:pPr>
-            <a:r>
-              <a:rPr lang="en-US" sz="1250" dirty="0">
-                <a:solidFill>
-                  <a:srgbClr val="2C2926"/>
-                </a:solidFill>
-                <a:latin typeface="Bricolage Grotesque Light" pitchFamily="34" charset="0"/>
-                <a:ea typeface="Bricolage Grotesque Light" pitchFamily="34" charset="-122"/>
-                <a:cs typeface="Bricolage Grotesque Light" pitchFamily="34" charset="-120"/>
-              </a:rPr>
-              <a:t>08</a:t>
-            </a:r>
-            <a:endParaRPr lang="en-US" sz="1250" dirty="0"/>
-          </a:p>
-        </p:txBody>
-      </p:sp>
-      <p:sp>
-        <p:nvSpPr>
-          <p:cNvPr id="26" name="Shape 24"/>
-          <p:cNvSpPr/>
-          <p:nvPr/>
-        </p:nvSpPr>
-        <p:spPr>
-          <a:xfrm>
-            <a:off x="6163116" y="4520605"/>
-            <a:ext cx="5367104" cy="19050"/>
-          </a:xfrm>
-          <a:prstGeom prst="rect">
-            <a:avLst/>
-          </a:prstGeom>
-          <a:solidFill>
-            <a:srgbClr val="DA9B49"/>
-          </a:solidFill>
-          <a:ln/>
-        </p:spPr>
-      </p:sp>
-      <p:sp>
-        <p:nvSpPr>
-          <p:cNvPr id="27" name="Text 25"/>
-          <p:cNvSpPr/>
-          <p:nvPr/>
-        </p:nvSpPr>
-        <p:spPr>
-          <a:xfrm>
-            <a:off x="6163116" y="4686102"/>
-            <a:ext cx="5367104" cy="249138"/>
-          </a:xfrm>
-          <a:prstGeom prst="rect">
-            <a:avLst/>
-          </a:prstGeom>
-          <a:noFill/>
-          <a:ln/>
-        </p:spPr>
-        <p:txBody>
-          <a:bodyPr wrap="none" lIns="0" tIns="0" rIns="0" bIns="0" rtlCol="0" anchor="t"/>
-          <a:lstStyle/>
-          <a:p>
-            <a:pPr algn="l" indent="0" marL="0">
-              <a:lnSpc>
-                <a:spcPct val="104000"/>
-              </a:lnSpc>
-              <a:buNone/>
-            </a:pPr>
-            <a:r>
-              <a:rPr lang="en-US" sz="1550" dirty="0">
-                <a:solidFill>
-                  <a:srgbClr val="2C2926"/>
-                </a:solidFill>
-                <a:latin typeface="Bricolage Grotesque SemiBold" pitchFamily="34" charset="0"/>
-                <a:ea typeface="Bricolage Grotesque SemiBold" pitchFamily="34" charset="-122"/>
-                <a:cs typeface="Bricolage Grotesque SemiBold" pitchFamily="34" charset="-120"/>
-              </a:rPr>
-              <a:t>Процес інженерії ПЗ</a:t>
-            </a:r>
-            <a:endParaRPr lang="en-US" sz="1550" dirty="0"/>
-          </a:p>
-        </p:txBody>
-      </p:sp>
-      <p:sp>
-        <p:nvSpPr>
-          <p:cNvPr id="28" name="Text 26"/>
-          <p:cNvSpPr/>
-          <p:nvPr/>
-        </p:nvSpPr>
-        <p:spPr>
-          <a:xfrm>
-            <a:off x="661475" y="5189339"/>
-            <a:ext cx="318881" cy="199330"/>
-          </a:xfrm>
-          <a:prstGeom prst="rect">
-            <a:avLst/>
-          </a:prstGeom>
-          <a:noFill/>
-          <a:ln/>
-        </p:spPr>
-        <p:txBody>
-          <a:bodyPr wrap="none" lIns="0" tIns="0" rIns="0" bIns="0" rtlCol="0" anchor="ctr"/>
-          <a:lstStyle/>
-          <a:p>
-            <a:pPr algn="l" indent="0" marL="0">
-              <a:lnSpc>
-                <a:spcPct val="100000"/>
-              </a:lnSpc>
-              <a:buNone/>
-            </a:pPr>
-            <a:r>
-              <a:rPr lang="en-US" sz="1250" dirty="0">
-                <a:solidFill>
-                  <a:srgbClr val="2C2926"/>
-                </a:solidFill>
-                <a:latin typeface="Bricolage Grotesque Light" pitchFamily="34" charset="0"/>
-                <a:ea typeface="Bricolage Grotesque Light" pitchFamily="34" charset="-122"/>
-                <a:cs typeface="Bricolage Grotesque Light" pitchFamily="34" charset="-120"/>
-              </a:rPr>
-              <a:t>09</a:t>
-            </a:r>
-            <a:endParaRPr lang="en-US" sz="1250" dirty="0"/>
-          </a:p>
-        </p:txBody>
-      </p:sp>
-      <p:sp>
-        <p:nvSpPr>
-          <p:cNvPr id="29" name="Shape 27"/>
-          <p:cNvSpPr/>
-          <p:nvPr/>
-        </p:nvSpPr>
-        <p:spPr>
-          <a:xfrm>
-            <a:off x="661475" y="5377557"/>
-            <a:ext cx="5367104" cy="19050"/>
-          </a:xfrm>
-          <a:prstGeom prst="rect">
-            <a:avLst/>
-          </a:prstGeom>
-          <a:solidFill>
-            <a:srgbClr val="DA9B49"/>
-          </a:solidFill>
-          <a:ln/>
-        </p:spPr>
-      </p:sp>
-      <p:sp>
-        <p:nvSpPr>
-          <p:cNvPr id="30" name="Text 28"/>
-          <p:cNvSpPr/>
-          <p:nvPr/>
-        </p:nvSpPr>
-        <p:spPr>
-          <a:xfrm>
-            <a:off x="661475" y="5559028"/>
-            <a:ext cx="5367104" cy="249138"/>
-          </a:xfrm>
-          <a:prstGeom prst="rect">
-            <a:avLst/>
-          </a:prstGeom>
-          <a:noFill/>
-          <a:ln/>
-        </p:spPr>
-        <p:txBody>
-          <a:bodyPr wrap="none" lIns="0" tIns="0" rIns="0" bIns="0" rtlCol="0" anchor="t"/>
-          <a:lstStyle/>
-          <a:p>
-            <a:pPr algn="l" indent="0" marL="0">
-              <a:lnSpc>
-                <a:spcPct val="104000"/>
-              </a:lnSpc>
-              <a:buNone/>
-            </a:pPr>
-            <a:r>
-              <a:rPr lang="en-US" sz="1550" dirty="0">
-                <a:solidFill>
-                  <a:srgbClr val="2C2926"/>
-                </a:solidFill>
-                <a:latin typeface="Bricolage Grotesque SemiBold" pitchFamily="34" charset="0"/>
-                <a:ea typeface="Bricolage Grotesque SemiBold" pitchFamily="34" charset="-122"/>
-                <a:cs typeface="Bricolage Grotesque SemiBold" pitchFamily="34" charset="-120"/>
-              </a:rPr>
-              <a:t>Інструменти та методи ПІ</a:t>
-            </a:r>
-            <a:endParaRPr lang="en-US" sz="1550" dirty="0"/>
-          </a:p>
-        </p:txBody>
-      </p:sp>
-      <p:sp>
-        <p:nvSpPr>
-          <p:cNvPr id="31" name="Text 29"/>
-          <p:cNvSpPr/>
-          <p:nvPr/>
-        </p:nvSpPr>
-        <p:spPr>
-          <a:xfrm>
-            <a:off x="6163116" y="5189339"/>
-            <a:ext cx="318881" cy="199330"/>
-          </a:xfrm>
-          <a:prstGeom prst="rect">
-            <a:avLst/>
-          </a:prstGeom>
-          <a:noFill/>
-          <a:ln/>
-        </p:spPr>
-        <p:txBody>
-          <a:bodyPr wrap="none" lIns="0" tIns="0" rIns="0" bIns="0" rtlCol="0" anchor="ctr"/>
-          <a:lstStyle/>
-          <a:p>
-            <a:pPr algn="l" indent="0" marL="0">
-              <a:lnSpc>
-                <a:spcPct val="100000"/>
-              </a:lnSpc>
-              <a:buNone/>
-            </a:pPr>
-            <a:r>
-              <a:rPr lang="en-US" sz="1250" dirty="0">
-                <a:solidFill>
-                  <a:srgbClr val="2C2926"/>
-                </a:solidFill>
-                <a:latin typeface="Bricolage Grotesque Light" pitchFamily="34" charset="0"/>
-                <a:ea typeface="Bricolage Grotesque Light" pitchFamily="34" charset="-122"/>
-                <a:cs typeface="Bricolage Grotesque Light" pitchFamily="34" charset="-120"/>
-              </a:rPr>
-              <a:t>10</a:t>
-            </a:r>
-            <a:endParaRPr lang="en-US" sz="1250" dirty="0"/>
-          </a:p>
-        </p:txBody>
-      </p:sp>
-      <p:sp>
-        <p:nvSpPr>
-          <p:cNvPr id="32" name="Shape 30"/>
-          <p:cNvSpPr/>
-          <p:nvPr/>
-        </p:nvSpPr>
-        <p:spPr>
-          <a:xfrm>
-            <a:off x="6163116" y="5377557"/>
-            <a:ext cx="5367104" cy="19050"/>
-          </a:xfrm>
-          <a:prstGeom prst="rect">
-            <a:avLst/>
-          </a:prstGeom>
-          <a:solidFill>
-            <a:srgbClr val="DA9B49"/>
-          </a:solidFill>
-          <a:ln/>
-        </p:spPr>
-      </p:sp>
-      <p:sp>
-        <p:nvSpPr>
-          <p:cNvPr id="33" name="Text 31"/>
-          <p:cNvSpPr/>
-          <p:nvPr/>
-        </p:nvSpPr>
-        <p:spPr>
-          <a:xfrm>
-            <a:off x="6163116" y="5559028"/>
-            <a:ext cx="5367104" cy="249138"/>
-          </a:xfrm>
-          <a:prstGeom prst="rect">
-            <a:avLst/>
-          </a:prstGeom>
-          <a:noFill/>
-          <a:ln/>
-        </p:spPr>
-        <p:txBody>
-          <a:bodyPr wrap="none" lIns="0" tIns="0" rIns="0" bIns="0" rtlCol="0" anchor="t"/>
-          <a:lstStyle/>
-          <a:p>
-            <a:pPr algn="l" indent="0" marL="0">
-              <a:lnSpc>
-                <a:spcPct val="104000"/>
-              </a:lnSpc>
-              <a:buNone/>
-            </a:pPr>
-            <a:r>
-              <a:rPr lang="en-US" sz="1550" dirty="0">
-                <a:solidFill>
-                  <a:srgbClr val="2C2926"/>
-                </a:solidFill>
-                <a:latin typeface="Bricolage Grotesque SemiBold" pitchFamily="34" charset="0"/>
-                <a:ea typeface="Bricolage Grotesque SemiBold" pitchFamily="34" charset="-122"/>
-                <a:cs typeface="Bricolage Grotesque SemiBold" pitchFamily="34" charset="-120"/>
-              </a:rPr>
-              <a:t>Якість ПЗ</a:t>
-            </a:r>
-            <a:endParaRPr lang="en-US" sz="1550" dirty="0"/>
-          </a:p>
-        </p:txBody>
-      </p:sp>
-      <p:sp>
-        <p:nvSpPr>
-          <p:cNvPr id="34" name="Text 32"/>
-          <p:cNvSpPr/>
-          <p:nvPr/>
-        </p:nvSpPr>
-        <p:spPr>
-          <a:xfrm>
-            <a:off x="661475" y="6079034"/>
-            <a:ext cx="11478330" cy="235148"/>
-          </a:xfrm>
-          <a:prstGeom prst="rect">
-            <a:avLst/>
-          </a:prstGeom>
-          <a:noFill/>
-          <a:ln/>
-        </p:spPr>
-        <p:txBody>
-          <a:bodyPr wrap="none" lIns="0" tIns="0" rIns="0" bIns="0" rtlCol="0" anchor="t"/>
-          <a:lstStyle/>
-          <a:p>
-            <a:pPr algn="l" indent="0" marL="0">
-              <a:lnSpc>
-                <a:spcPct val="123000"/>
-              </a:lnSpc>
-              <a:buNone/>
-            </a:pPr>
-            <a:r>
-              <a:rPr lang="en-US" sz="1250" dirty="0">
-                <a:solidFill>
-                  <a:srgbClr val="2C2926"/>
-                </a:solidFill>
-                <a:latin typeface="Inter" pitchFamily="34" charset="0"/>
-                <a:ea typeface="Inter" pitchFamily="34" charset="-122"/>
-                <a:cs typeface="Inter" pitchFamily="34" charset="-120"/>
-              </a:rPr>
-              <a:t>Золоте правило Джексона: </a:t>
-            </a:r>
-            <a:pPr algn="l" indent="0" marL="0">
-              <a:lnSpc>
-                <a:spcPct val="123000"/>
-              </a:lnSpc>
-              <a:buNone/>
-            </a:pPr>
-            <a:r>
-              <a:rPr lang="en-US" sz="1250" i="1" dirty="0">
-                <a:solidFill>
-                  <a:srgbClr val="2C2926"/>
-                </a:solidFill>
-                <a:latin typeface="Inter" pitchFamily="34" charset="0"/>
-                <a:ea typeface="Inter" pitchFamily="34" charset="-122"/>
-                <a:cs typeface="Inter" pitchFamily="34" charset="-120"/>
-              </a:rPr>
-              <a:t>«Будь-яка щойно завершена програмна система одразу потребує змін»</a:t>
-            </a:r>
-            <a:pPr algn="l" indent="0" marL="0">
-              <a:lnSpc>
-                <a:spcPct val="123000"/>
-              </a:lnSpc>
-              <a:buNone/>
-            </a:pPr>
-            <a:r>
-              <a:rPr lang="en-US" sz="1250" dirty="0">
-                <a:solidFill>
-                  <a:srgbClr val="2C2926"/>
-                </a:solidFill>
-                <a:latin typeface="Inter" pitchFamily="34" charset="0"/>
-                <a:ea typeface="Inter" pitchFamily="34" charset="-122"/>
-                <a:cs typeface="Inter" pitchFamily="34" charset="-120"/>
-              </a:rPr>
-              <a:t>.</a:t>
-            </a:r>
-            <a:endParaRPr lang="en-US" sz="1250" dirty="0"/>
           </a:p>
         </p:txBody>
       </p:sp>
@@ -8538,4 +10411,265 @@
     </a:ext>
   </a:extLst>
 </a:theme>
+</file>
+
+<file path=ppt/theme/theme2.xml><?xml version="1.0" encoding="utf-8"?>
+<a:theme xmlns:a="http://schemas.openxmlformats.org/drawingml/2006/main" name="Тема Office">
+  <a:themeElements>
+    <a:clrScheme name="Стандартная">
+      <a:dk1>
+        <a:sysClr val="windowText" lastClr="000000"/>
+      </a:dk1>
+      <a:lt1>
+        <a:sysClr val="window" lastClr="FFFFFF"/>
+      </a:lt1>
+      <a:dk2>
+        <a:srgbClr val="44546A"/>
+      </a:dk2>
+      <a:lt2>
+        <a:srgbClr val="E7E6E6"/>
+      </a:lt2>
+      <a:accent1>
+        <a:srgbClr val="5B9BD5"/>
+      </a:accent1>
+      <a:accent2>
+        <a:srgbClr val="ED7D31"/>
+      </a:accent2>
+      <a:accent3>
+        <a:srgbClr val="A5A5A5"/>
+      </a:accent3>
+      <a:accent4>
+        <a:srgbClr val="FFC000"/>
+      </a:accent4>
+      <a:accent5>
+        <a:srgbClr val="4472C4"/>
+      </a:accent5>
+      <a:accent6>
+        <a:srgbClr val="70AD47"/>
+      </a:accent6>
+      <a:hlink>
+        <a:srgbClr val="0563C1"/>
+      </a:hlink>
+      <a:folHlink>
+        <a:srgbClr val="954F72"/>
+      </a:folHlink>
+    </a:clrScheme>
+    <a:fontScheme name="Стандартная">
+      <a:majorFont>
+        <a:latin typeface="Calibri Light" panose="020F0302020204030204"/>
+        <a:ea typeface=""/>
+        <a:cs typeface=""/>
+        <a:font script="Jpan" typeface="游ゴシック Light"/>
+        <a:font script="Hang" typeface="맑은 고딕"/>
+        <a:font script="Hans" typeface="等线 Light"/>
+        <a:font script="Hant" typeface="新細明體"/>
+        <a:font script="Arab" typeface="Times New Roman"/>
+        <a:font script="Hebr" typeface="Times New Roman"/>
+        <a:font script="Thai" typeface="Angsana New"/>
+        <a:font script="Ethi" typeface="Nyala"/>
+        <a:font script="Beng" typeface="Vrinda"/>
+        <a:font script="Gujr" typeface="Shruti"/>
+        <a:font script="Khmr" typeface="MoolBoran"/>
+        <a:font script="Knda" typeface="Tunga"/>
+        <a:font script="Guru" typeface="Raavi"/>
+        <a:font script="Cans" typeface="Euphemia"/>
+        <a:font script="Cher" typeface="Plantagenet Cherokee"/>
+        <a:font script="Yiii" typeface="Microsoft Yi Baiti"/>
+        <a:font script="Tibt" typeface="Microsoft Himalaya"/>
+        <a:font script="Thaa" typeface="MV Boli"/>
+        <a:font script="Deva" typeface="Mangal"/>
+        <a:font script="Telu" typeface="Gautami"/>
+        <a:font script="Taml" typeface="Latha"/>
+        <a:font script="Syrc" typeface="Estrangelo Edessa"/>
+        <a:font script="Orya" typeface="Kalinga"/>
+        <a:font script="Mlym" typeface="Kartika"/>
+        <a:font script="Laoo" typeface="DokChampa"/>
+        <a:font script="Sinh" typeface="Iskoola Pota"/>
+        <a:font script="Mong" typeface="Mongolian Baiti"/>
+        <a:font script="Viet" typeface="Times New Roman"/>
+        <a:font script="Uigh" typeface="Microsoft Uighur"/>
+        <a:font script="Geor" typeface="Sylfaen"/>
+      </a:majorFont>
+      <a:minorFont>
+        <a:latin typeface="Calibri" panose="020F0502020204030204"/>
+        <a:ea typeface=""/>
+        <a:cs typeface=""/>
+        <a:font script="Jpan" typeface="游ゴシック"/>
+        <a:font script="Hang" typeface="맑은 고딕"/>
+        <a:font script="Hans" typeface="等线"/>
+        <a:font script="Hant" typeface="新細明體"/>
+        <a:font script="Arab" typeface="Arial"/>
+        <a:font script="Hebr" typeface="Arial"/>
+        <a:font script="Thai" typeface="Cordia New"/>
+        <a:font script="Ethi" typeface="Nyala"/>
+        <a:font script="Beng" typeface="Vrinda"/>
+        <a:font script="Gujr" typeface="Shruti"/>
+        <a:font script="Khmr" typeface="DaunPenh"/>
+        <a:font script="Knda" typeface="Tunga"/>
+        <a:font script="Guru" typeface="Raavi"/>
+        <a:font script="Cans" typeface="Euphemia"/>
+        <a:font script="Cher" typeface="Plantagenet Cherokee"/>
+        <a:font script="Yiii" typeface="Microsoft Yi Baiti"/>
+        <a:font script="Tibt" typeface="Microsoft Himalaya"/>
+        <a:font script="Thaa" typeface="MV Boli"/>
+        <a:font script="Deva" typeface="Mangal"/>
+        <a:font script="Telu" typeface="Gautami"/>
+        <a:font script="Taml" typeface="Latha"/>
+        <a:font script="Syrc" typeface="Estrangelo Edessa"/>
+        <a:font script="Orya" typeface="Kalinga"/>
+        <a:font script="Mlym" typeface="Kartika"/>
+        <a:font script="Laoo" typeface="DokChampa"/>
+        <a:font script="Sinh" typeface="Iskoola Pota"/>
+        <a:font script="Mong" typeface="Mongolian Baiti"/>
+        <a:font script="Viet" typeface="Arial"/>
+        <a:font script="Uigh" typeface="Microsoft Uighur"/>
+        <a:font script="Geor" typeface="Sylfaen"/>
+      </a:minorFont>
+    </a:fontScheme>
+    <a:fmtScheme name="Стандартная">
+      <a:fillStyleLst>
+        <a:solidFill>
+          <a:schemeClr val="phClr"/>
+        </a:solidFill>
+        <a:gradFill rotWithShape="1">
+          <a:gsLst>
+            <a:gs pos="0">
+              <a:schemeClr val="phClr">
+                <a:lumMod val="110000"/>
+                <a:satMod val="105000"/>
+                <a:tint val="67000"/>
+              </a:schemeClr>
+            </a:gs>
+            <a:gs pos="50000">
+              <a:schemeClr val="phClr">
+                <a:lumMod val="105000"/>
+                <a:satMod val="103000"/>
+                <a:tint val="73000"/>
+              </a:schemeClr>
+            </a:gs>
+            <a:gs pos="100000">
+              <a:schemeClr val="phClr">
+                <a:lumMod val="105000"/>
+                <a:satMod val="109000"/>
+                <a:tint val="81000"/>
+              </a:schemeClr>
+            </a:gs>
+          </a:gsLst>
+          <a:lin ang="5400000" scaled="0"/>
+        </a:gradFill>
+        <a:gradFill rotWithShape="1">
+          <a:gsLst>
+            <a:gs pos="0">
+              <a:schemeClr val="phClr">
+                <a:satMod val="103000"/>
+                <a:lumMod val="102000"/>
+                <a:tint val="94000"/>
+              </a:schemeClr>
+            </a:gs>
+            <a:gs pos="50000">
+              <a:schemeClr val="phClr">
+                <a:satMod val="110000"/>
+                <a:lumMod val="100000"/>
+                <a:shade val="100000"/>
+              </a:schemeClr>
+            </a:gs>
+            <a:gs pos="100000">
+              <a:schemeClr val="phClr">
+                <a:lumMod val="99000"/>
+                <a:satMod val="120000"/>
+                <a:shade val="78000"/>
+              </a:schemeClr>
+            </a:gs>
+          </a:gsLst>
+          <a:lin ang="5400000" scaled="0"/>
+        </a:gradFill>
+      </a:fillStyleLst>
+      <a:lnStyleLst>
+        <a:ln w="6350" cap="flat" cmpd="sng" algn="ctr">
+          <a:solidFill>
+            <a:schemeClr val="phClr"/>
+          </a:solidFill>
+          <a:prstDash val="solid"/>
+          <a:miter lim="800000"/>
+        </a:ln>
+        <a:ln w="12700" cap="flat" cmpd="sng" algn="ctr">
+          <a:solidFill>
+            <a:schemeClr val="phClr"/>
+          </a:solidFill>
+          <a:prstDash val="solid"/>
+          <a:miter lim="800000"/>
+        </a:ln>
+        <a:ln w="19050" cap="flat" cmpd="sng" algn="ctr">
+          <a:solidFill>
+            <a:schemeClr val="phClr"/>
+          </a:solidFill>
+          <a:prstDash val="solid"/>
+          <a:miter lim="800000"/>
+        </a:ln>
+      </a:lnStyleLst>
+      <a:effectStyleLst>
+        <a:effectStyle>
+          <a:effectLst/>
+        </a:effectStyle>
+        <a:effectStyle>
+          <a:effectLst/>
+        </a:effectStyle>
+        <a:effectStyle>
+          <a:effectLst>
+            <a:outerShdw blurRad="57150" dist="19050" dir="5400000" algn="ctr" rotWithShape="0">
+              <a:srgbClr val="000000">
+                <a:alpha val="63000"/>
+              </a:srgbClr>
+            </a:outerShdw>
+          </a:effectLst>
+        </a:effectStyle>
+      </a:effectStyleLst>
+      <a:bgFillStyleLst>
+        <a:solidFill>
+          <a:schemeClr val="phClr"/>
+        </a:solidFill>
+        <a:solidFill>
+          <a:schemeClr val="phClr">
+            <a:tint val="95000"/>
+            <a:satMod val="170000"/>
+          </a:schemeClr>
+        </a:solidFill>
+        <a:gradFill rotWithShape="1">
+          <a:gsLst>
+            <a:gs pos="0">
+              <a:schemeClr val="phClr">
+                <a:tint val="93000"/>
+                <a:satMod val="150000"/>
+                <a:shade val="98000"/>
+                <a:lumMod val="102000"/>
+              </a:schemeClr>
+            </a:gs>
+            <a:gs pos="50000">
+              <a:schemeClr val="phClr">
+                <a:tint val="98000"/>
+                <a:satMod val="130000"/>
+                <a:shade val="90000"/>
+                <a:lumMod val="103000"/>
+              </a:schemeClr>
+            </a:gs>
+            <a:gs pos="100000">
+              <a:schemeClr val="phClr">
+                <a:shade val="63000"/>
+                <a:satMod val="120000"/>
+              </a:schemeClr>
+            </a:gs>
+          </a:gsLst>
+          <a:lin ang="5400000" scaled="0"/>
+        </a:gradFill>
+      </a:bgFillStyleLst>
+    </a:fmtScheme>
+  </a:themeElements>
+  <a:objectDefaults/>
+  <a:extraClrSchemeLst/>
+  <a:extLst>
+    <a:ext uri="{05A4C25C-085E-4340-85A3-A5531E510DB2}">
+      <thm15:themeFamily xmlns:thm15="http://schemas.microsoft.com/office/thememl/2012/main" name="Office Theme" id="{62F939B6-93AF-4DB8-9C6B-D6C7DFDC589F}" vid="{4A3C46E8-61CC-4603-A589-7422A47A8E4A}"/>
+    </a:ext>
+  </a:extLst>
+</a:theme>
 </file>